--- a/downloads/presentations/modules/lesson-13-public-health-data-modernization-and-ai-architecture.pptx
+++ b/downloads/presentations/modules/lesson-13-public-health-data-modernization-and-ai-architecture.pptx
@@ -3183,6 +3183,45 @@
           </a:p>
         </p:txBody>
       </p:sp>
+      <p:sp>
+        <p:nvSpPr>
+          <p:cNvPr id="8" name="Text 5"/>
+          <p:cNvSpPr/>
+          <p:nvPr/>
+        </p:nvSpPr>
+        <p:spPr>
+          <a:xfrm>
+            <a:off x="11137392" y="6510528"/>
+            <a:ext cx="411480" cy="201168"/>
+          </a:xfrm>
+          <a:prstGeom prst="rect">
+            <a:avLst/>
+          </a:prstGeom>
+          <a:noFill/>
+          <a:ln/>
+        </p:spPr>
+        <p:txBody>
+          <a:bodyPr wrap="square" lIns="0" tIns="0" rIns="0" bIns="0" rtlCol="0" anchor="ctr"/>
+          <a:lstStyle/>
+          <a:p>
+            <a:pPr algn="r" indent="0" marL="0">
+              <a:buNone/>
+            </a:pPr>
+            <a:r>
+              <a:rPr lang="en-US" sz="900" dirty="0">
+                <a:solidFill>
+                  <a:srgbClr val="5F7181"/>
+                </a:solidFill>
+                <a:latin typeface="Aptos" pitchFamily="34" charset="0"/>
+                <a:ea typeface="Aptos" pitchFamily="34" charset="-122"/>
+                <a:cs typeface="Aptos" pitchFamily="34" charset="-120"/>
+              </a:rPr>
+              <a:t>1</a:t>
+            </a:r>
+            <a:endParaRPr lang="en-US" sz="900" dirty="0"/>
+          </a:p>
+        </p:txBody>
+      </p:sp>
     </p:spTree>
   </p:cSld>
   <p:clrMapOvr>
@@ -3376,7 +3415,7 @@
                 <a:ea typeface="Aptos" pitchFamily="34" charset="-122"/>
                 <a:cs typeface="Aptos" pitchFamily="34" charset="-120"/>
               </a:rPr>
-              <a:t>© Paula Soper</a:t>
+              <a:t>Â© Paula Soper</a:t>
             </a:r>
             <a:endParaRPr lang="en-US" sz="800" dirty="0"/>
           </a:p>
@@ -3390,8 +3429,47 @@
         </p:nvSpPr>
         <p:spPr>
           <a:xfrm>
+            <a:off x="11137392" y="6510528"/>
+            <a:ext cx="411480" cy="201168"/>
+          </a:xfrm>
+          <a:prstGeom prst="rect">
+            <a:avLst/>
+          </a:prstGeom>
+          <a:noFill/>
+          <a:ln/>
+        </p:spPr>
+        <p:txBody>
+          <a:bodyPr wrap="square" lIns="0" tIns="0" rIns="0" bIns="0" rtlCol="0" anchor="ctr"/>
+          <a:lstStyle/>
+          <a:p>
+            <a:pPr algn="r" indent="0" marL="0">
+              <a:buNone/>
+            </a:pPr>
+            <a:r>
+              <a:rPr lang="en-US" sz="900" dirty="0">
+                <a:solidFill>
+                  <a:srgbClr val="5F7181"/>
+                </a:solidFill>
+                <a:latin typeface="Aptos" pitchFamily="34" charset="0"/>
+                <a:ea typeface="Aptos" pitchFamily="34" charset="-122"/>
+                <a:cs typeface="Aptos" pitchFamily="34" charset="-120"/>
+              </a:rPr>
+              <a:t>10</a:t>
+            </a:r>
+            <a:endParaRPr lang="en-US" sz="900" dirty="0"/>
+          </a:p>
+        </p:txBody>
+      </p:sp>
+      <p:sp>
+        <p:nvSpPr>
+          <p:cNvPr id="8" name="Text 6"/>
+          <p:cNvSpPr/>
+          <p:nvPr/>
+        </p:nvSpPr>
+        <p:spPr>
+          <a:xfrm>
             <a:off x="640080" y="658368"/>
-            <a:ext cx="10881360" cy="566928"/>
+            <a:ext cx="10881360" cy="713232"/>
           </a:xfrm>
           <a:prstGeom prst="rect">
             <a:avLst/>
@@ -3409,7 +3487,7 @@
               <a:buNone/>
             </a:pPr>
             <a:r>
-              <a:rPr lang="en-US" sz="2700" b="1" dirty="0">
+              <a:rPr lang="en-US" sz="3400" b="1" dirty="0">
                 <a:solidFill>
                   <a:srgbClr val="003A63"/>
                 </a:solidFill>
@@ -3419,20 +3497,20 @@
               </a:rPr>
               <a:t>Core Concepts Continued</a:t>
             </a:r>
-            <a:endParaRPr lang="en-US" sz="2700" dirty="0"/>
-          </a:p>
-        </p:txBody>
-      </p:sp>
-      <p:sp>
-        <p:nvSpPr>
-          <p:cNvPr id="8" name="Text 6"/>
-          <p:cNvSpPr/>
-          <p:nvPr/>
-        </p:nvSpPr>
-        <p:spPr>
-          <a:xfrm>
-            <a:off x="868680" y="1417320"/>
-            <a:ext cx="6675120" cy="4434840"/>
+            <a:endParaRPr lang="en-US" sz="3400" dirty="0"/>
+          </a:p>
+        </p:txBody>
+      </p:sp>
+      <p:sp>
+        <p:nvSpPr>
+          <p:cNvPr id="9" name="Text 7"/>
+          <p:cNvSpPr/>
+          <p:nvPr/>
+        </p:nvSpPr>
+        <p:spPr>
+          <a:xfrm>
+            <a:off x="868680" y="1508760"/>
+            <a:ext cx="6537960" cy="4160520"/>
           </a:xfrm>
           <a:prstGeom prst="rect">
             <a:avLst/>
@@ -3447,7 +3525,7 @@
           <a:lstStyle/>
           <a:p>
             <a:r>
-              <a:rPr lang="en-US" sz="1700" dirty="0">
+              <a:rPr lang="en-US" sz="2100" dirty="0">
                 <a:solidFill>
                   <a:srgbClr val="17364A"/>
                 </a:solidFill>
@@ -3457,11 +3535,11 @@
               </a:rPr>
               <a:t>System of record.</a:t>
             </a:r>
-            <a:endParaRPr lang="en-US" sz="1700" dirty="0"/>
-          </a:p>
-          <a:p>
-            <a:r>
-              <a:rPr lang="en-US" sz="1700" dirty="0">
+            <a:endParaRPr lang="en-US" sz="2100" dirty="0"/>
+          </a:p>
+          <a:p>
+            <a:r>
+              <a:rPr lang="en-US" sz="2100" dirty="0">
                 <a:solidFill>
                   <a:srgbClr val="17364A"/>
                 </a:solidFill>
@@ -3469,13 +3547,13 @@
                 <a:ea typeface="Aptos" pitchFamily="34" charset="-122"/>
                 <a:cs typeface="Aptos" pitchFamily="34" charset="-120"/>
               </a:rPr>
-              <a:t>A system of record is the official system or process where public health information, decisions, and actions are maintained.</a:t>
-            </a:r>
-            <a:endParaRPr lang="en-US" sz="1700" dirty="0"/>
-          </a:p>
-          <a:p>
-            <a:r>
-              <a:rPr lang="en-US" sz="1700" dirty="0">
+              <a:t>A system of record is the official system or process where public health information, decisions, and.</a:t>
+            </a:r>
+            <a:endParaRPr lang="en-US" sz="2100" dirty="0"/>
+          </a:p>
+          <a:p>
+            <a:r>
+              <a:rPr lang="en-US" sz="2100" dirty="0">
                 <a:solidFill>
                   <a:srgbClr val="17364A"/>
                 </a:solidFill>
@@ -3483,29 +3561,15 @@
                 <a:ea typeface="Aptos" pitchFamily="34" charset="-122"/>
                 <a:cs typeface="Aptos" pitchFamily="34" charset="-120"/>
               </a:rPr>
-              <a:t>AI outputs should not automatically become the official record unless the agency has explicitly approved that use.</a:t>
-            </a:r>
-            <a:endParaRPr lang="en-US" sz="1700" dirty="0"/>
-          </a:p>
-          <a:p>
-            <a:r>
-              <a:rPr lang="en-US" sz="1700" dirty="0">
-                <a:solidFill>
-                  <a:srgbClr val="17364A"/>
-                </a:solidFill>
-                <a:latin typeface="Aptos" pitchFamily="34" charset="0"/>
-                <a:ea typeface="Aptos" pitchFamily="34" charset="-122"/>
-                <a:cs typeface="Aptos" pitchFamily="34" charset="-120"/>
-              </a:rPr>
-              <a:t>For example, an AI tool may draft a case summary, but the final case note may still need to be reviewed, edited, and saved.</a:t>
-            </a:r>
-            <a:endParaRPr lang="en-US" sz="1700" dirty="0"/>
-          </a:p>
-        </p:txBody>
-      </p:sp>
-      <p:sp>
-        <p:nvSpPr>
-          <p:cNvPr id="9" name="Shape 7"/>
+              <a:t>AI outputs should not automatically become the official record unless the agency has explicitly.</a:t>
+            </a:r>
+            <a:endParaRPr lang="en-US" sz="2100" dirty="0"/>
+          </a:p>
+        </p:txBody>
+      </p:sp>
+      <p:sp>
+        <p:nvSpPr>
+          <p:cNvPr id="10" name="Shape 8"/>
           <p:cNvSpPr/>
           <p:nvPr/>
         </p:nvSpPr>
@@ -3532,14 +3596,14 @@
       </p:sp>
       <p:sp>
         <p:nvSpPr>
-          <p:cNvPr id="10" name="Text 8"/>
+          <p:cNvPr id="11" name="Text 9"/>
           <p:cNvSpPr/>
           <p:nvPr/>
         </p:nvSpPr>
         <p:spPr>
           <a:xfrm>
             <a:off x="8074152" y="1563624"/>
-            <a:ext cx="2825496" cy="201168"/>
+            <a:ext cx="2825496" cy="256032"/>
           </a:xfrm>
           <a:prstGeom prst="rect">
             <a:avLst/>
@@ -3555,7 +3619,7 @@
               <a:buNone/>
             </a:pPr>
             <a:r>
-              <a:rPr lang="en-US" sz="950" b="1" dirty="0">
+              <a:rPr lang="en-US" sz="1300" b="1" dirty="0">
                 <a:solidFill>
                   <a:srgbClr val="0068B7"/>
                 </a:solidFill>
@@ -3565,20 +3629,20 @@
               </a:rPr>
               <a:t>Key idea</a:t>
             </a:r>
-            <a:endParaRPr lang="en-US" sz="950" dirty="0"/>
-          </a:p>
-        </p:txBody>
-      </p:sp>
-      <p:sp>
-        <p:nvSpPr>
-          <p:cNvPr id="11" name="Text 9"/>
-          <p:cNvSpPr/>
-          <p:nvPr/>
-        </p:nvSpPr>
-        <p:spPr>
-          <a:xfrm>
-            <a:off x="8074152" y="1856232"/>
-            <a:ext cx="2825496" cy="1261872"/>
+            <a:endParaRPr lang="en-US" sz="1300" dirty="0"/>
+          </a:p>
+        </p:txBody>
+      </p:sp>
+      <p:sp>
+        <p:nvSpPr>
+          <p:cNvPr id="12" name="Text 10"/>
+          <p:cNvSpPr/>
+          <p:nvPr/>
+        </p:nvSpPr>
+        <p:spPr>
+          <a:xfrm>
+            <a:off x="8074152" y="1920240"/>
+            <a:ext cx="2825496" cy="1188720"/>
           </a:xfrm>
           <a:prstGeom prst="rect">
             <a:avLst/>
@@ -3596,7 +3660,7 @@
               <a:buNone/>
             </a:pPr>
             <a:r>
-              <a:rPr lang="en-US" sz="1250" dirty="0">
+              <a:rPr lang="en-US" sz="1550" dirty="0">
                 <a:solidFill>
                   <a:srgbClr val="17364A"/>
                 </a:solidFill>
@@ -3606,13 +3670,13 @@
               </a:rPr>
               <a:t>System of record.</a:t>
             </a:r>
-            <a:endParaRPr lang="en-US" sz="1250" dirty="0"/>
-          </a:p>
-        </p:txBody>
-      </p:sp>
-      <p:sp>
-        <p:nvSpPr>
-          <p:cNvPr id="12" name="Shape 10"/>
+            <a:endParaRPr lang="en-US" sz="1550" dirty="0"/>
+          </a:p>
+        </p:txBody>
+      </p:sp>
+      <p:sp>
+        <p:nvSpPr>
+          <p:cNvPr id="13" name="Shape 11"/>
           <p:cNvSpPr/>
           <p:nvPr/>
         </p:nvSpPr>
@@ -3639,14 +3703,14 @@
       </p:sp>
       <p:sp>
         <p:nvSpPr>
-          <p:cNvPr id="13" name="Text 11"/>
+          <p:cNvPr id="14" name="Text 12"/>
           <p:cNvSpPr/>
           <p:nvPr/>
         </p:nvSpPr>
         <p:spPr>
           <a:xfrm>
             <a:off x="8074152" y="3666744"/>
-            <a:ext cx="2825496" cy="201168"/>
+            <a:ext cx="2825496" cy="256032"/>
           </a:xfrm>
           <a:prstGeom prst="rect">
             <a:avLst/>
@@ -3662,7 +3726,7 @@
               <a:buNone/>
             </a:pPr>
             <a:r>
-              <a:rPr lang="en-US" sz="950" b="1" dirty="0">
+              <a:rPr lang="en-US" sz="1300" b="1" dirty="0">
                 <a:solidFill>
                   <a:srgbClr val="0068B7"/>
                 </a:solidFill>
@@ -3672,20 +3736,20 @@
               </a:rPr>
               <a:t>Use this for</a:t>
             </a:r>
-            <a:endParaRPr lang="en-US" sz="950" dirty="0"/>
-          </a:p>
-        </p:txBody>
-      </p:sp>
-      <p:sp>
-        <p:nvSpPr>
-          <p:cNvPr id="14" name="Text 12"/>
-          <p:cNvSpPr/>
-          <p:nvPr/>
-        </p:nvSpPr>
-        <p:spPr>
-          <a:xfrm>
-            <a:off x="8074152" y="3959352"/>
-            <a:ext cx="2825496" cy="1170432"/>
+            <a:endParaRPr lang="en-US" sz="1300" dirty="0"/>
+          </a:p>
+        </p:txBody>
+      </p:sp>
+      <p:sp>
+        <p:nvSpPr>
+          <p:cNvPr id="15" name="Text 13"/>
+          <p:cNvSpPr/>
+          <p:nvPr/>
+        </p:nvSpPr>
+        <p:spPr>
+          <a:xfrm>
+            <a:off x="8074152" y="4023360"/>
+            <a:ext cx="2825496" cy="1097280"/>
           </a:xfrm>
           <a:prstGeom prst="rect">
             <a:avLst/>
@@ -3703,7 +3767,7 @@
               <a:buNone/>
             </a:pPr>
             <a:r>
-              <a:rPr lang="en-US" sz="1250" dirty="0">
+              <a:rPr lang="en-US" sz="1550" dirty="0">
                 <a:solidFill>
                   <a:srgbClr val="17364A"/>
                 </a:solidFill>
@@ -3713,7 +3777,7 @@
               </a:rPr>
               <a:t>Connect the concept to public health decisions, safeguards, documentation, or implementation work.</a:t>
             </a:r>
-            <a:endParaRPr lang="en-US" sz="1250" dirty="0"/>
+            <a:endParaRPr lang="en-US" sz="1550" dirty="0"/>
           </a:p>
         </p:txBody>
       </p:sp>
@@ -3910,7 +3974,7 @@
                 <a:ea typeface="Aptos" pitchFamily="34" charset="-122"/>
                 <a:cs typeface="Aptos" pitchFamily="34" charset="-120"/>
               </a:rPr>
-              <a:t>© Paula Soper</a:t>
+              <a:t>Â© Paula Soper</a:t>
             </a:r>
             <a:endParaRPr lang="en-US" sz="800" dirty="0"/>
           </a:p>
@@ -3918,7 +3982,46 @@
       </p:sp>
       <p:sp>
         <p:nvSpPr>
-          <p:cNvPr id="7" name="Shape 5"/>
+          <p:cNvPr id="7" name="Text 5"/>
+          <p:cNvSpPr/>
+          <p:nvPr/>
+        </p:nvSpPr>
+        <p:spPr>
+          <a:xfrm>
+            <a:off x="11137392" y="6510528"/>
+            <a:ext cx="411480" cy="201168"/>
+          </a:xfrm>
+          <a:prstGeom prst="rect">
+            <a:avLst/>
+          </a:prstGeom>
+          <a:noFill/>
+          <a:ln/>
+        </p:spPr>
+        <p:txBody>
+          <a:bodyPr wrap="square" lIns="0" tIns="0" rIns="0" bIns="0" rtlCol="0" anchor="ctr"/>
+          <a:lstStyle/>
+          <a:p>
+            <a:pPr algn="r" indent="0" marL="0">
+              <a:buNone/>
+            </a:pPr>
+            <a:r>
+              <a:rPr lang="en-US" sz="900" dirty="0">
+                <a:solidFill>
+                  <a:srgbClr val="5F7181"/>
+                </a:solidFill>
+                <a:latin typeface="Aptos" pitchFamily="34" charset="0"/>
+                <a:ea typeface="Aptos" pitchFamily="34" charset="-122"/>
+                <a:cs typeface="Aptos" pitchFamily="34" charset="-120"/>
+              </a:rPr>
+              <a:t>11</a:t>
+            </a:r>
+            <a:endParaRPr lang="en-US" sz="900" dirty="0"/>
+          </a:p>
+        </p:txBody>
+      </p:sp>
+      <p:sp>
+        <p:nvSpPr>
+          <p:cNvPr id="8" name="Shape 6"/>
           <p:cNvSpPr/>
           <p:nvPr/>
         </p:nvSpPr>
@@ -3943,7 +4046,7 @@
       </p:sp>
       <p:sp>
         <p:nvSpPr>
-          <p:cNvPr id="8" name="Text 6"/>
+          <p:cNvPr id="9" name="Text 7"/>
           <p:cNvSpPr/>
           <p:nvPr/>
         </p:nvSpPr>
@@ -3982,14 +4085,14 @@
       </p:sp>
       <p:sp>
         <p:nvSpPr>
-          <p:cNvPr id="9" name="Text 7"/>
+          <p:cNvPr id="10" name="Text 8"/>
           <p:cNvSpPr/>
           <p:nvPr/>
         </p:nvSpPr>
         <p:spPr>
           <a:xfrm>
             <a:off x="640080" y="621792"/>
-            <a:ext cx="10881360" cy="566928"/>
+            <a:ext cx="10881360" cy="713232"/>
           </a:xfrm>
           <a:prstGeom prst="rect">
             <a:avLst/>
@@ -4007,7 +4110,7 @@
               <a:buNone/>
             </a:pPr>
             <a:r>
-              <a:rPr lang="en-US" sz="2700" b="1" dirty="0">
+              <a:rPr lang="en-US" sz="3400" b="1" dirty="0">
                 <a:solidFill>
                   <a:srgbClr val="003A63"/>
                 </a:solidFill>
@@ -4017,20 +4120,20 @@
               </a:rPr>
               <a:t>Public Health Example</a:t>
             </a:r>
-            <a:endParaRPr lang="en-US" sz="2700" dirty="0"/>
-          </a:p>
-        </p:txBody>
-      </p:sp>
-      <p:sp>
-        <p:nvSpPr>
-          <p:cNvPr id="10" name="Text 8"/>
-          <p:cNvSpPr/>
-          <p:nvPr/>
-        </p:nvSpPr>
-        <p:spPr>
-          <a:xfrm>
-            <a:off x="868680" y="1417320"/>
-            <a:ext cx="6675120" cy="4434840"/>
+            <a:endParaRPr lang="en-US" sz="3400" dirty="0"/>
+          </a:p>
+        </p:txBody>
+      </p:sp>
+      <p:sp>
+        <p:nvSpPr>
+          <p:cNvPr id="11" name="Text 9"/>
+          <p:cNvSpPr/>
+          <p:nvPr/>
+        </p:nvSpPr>
+        <p:spPr>
+          <a:xfrm>
+            <a:off x="868680" y="1508760"/>
+            <a:ext cx="6537960" cy="4160520"/>
           </a:xfrm>
           <a:prstGeom prst="rect">
             <a:avLst/>
@@ -4045,7 +4148,7 @@
           <a:lstStyle/>
           <a:p>
             <a:r>
-              <a:rPr lang="en-US" sz="1700" dirty="0">
+              <a:rPr lang="en-US" sz="2100" dirty="0">
                 <a:solidFill>
                   <a:srgbClr val="17364A"/>
                 </a:solidFill>
@@ -4053,13 +4156,13 @@
                 <a:ea typeface="Aptos" pitchFamily="34" charset="-122"/>
                 <a:cs typeface="Aptos" pitchFamily="34" charset="-120"/>
               </a:rPr>
-              <a:t>Consider a health department that wants to use AI to summarize incoming electronic case reports for disease investigators.</a:t>
-            </a:r>
-            <a:endParaRPr lang="en-US" sz="1700" dirty="0"/>
-          </a:p>
-          <a:p>
-            <a:r>
-              <a:rPr lang="en-US" sz="1700" dirty="0">
+              <a:t>Consider a health department that wants to use AI to summarize incoming electronic case reports for.</a:t>
+            </a:r>
+            <a:endParaRPr lang="en-US" sz="2100" dirty="0"/>
+          </a:p>
+          <a:p>
+            <a:r>
+              <a:rPr lang="en-US" sz="2100" dirty="0">
                 <a:solidFill>
                   <a:srgbClr val="17364A"/>
                 </a:solidFill>
@@ -4067,13 +4170,13 @@
                 <a:ea typeface="Aptos" pitchFamily="34" charset="-122"/>
                 <a:cs typeface="Aptos" pitchFamily="34" charset="-120"/>
               </a:rPr>
-              <a:t>The AI tool may be able to produce a concise summary of symptoms, laboratory results, diagnosis, treatment, provider.</a:t>
-            </a:r>
-            <a:endParaRPr lang="en-US" sz="1700" dirty="0"/>
-          </a:p>
-          <a:p>
-            <a:r>
-              <a:rPr lang="en-US" sz="1700" dirty="0">
+              <a:t>The AI tool may be able to produce a concise summary of symptoms, laboratory results, diagnosis,.</a:t>
+            </a:r>
+            <a:endParaRPr lang="en-US" sz="2100" dirty="0"/>
+          </a:p>
+          <a:p>
+            <a:r>
+              <a:rPr lang="en-US" sz="2100" dirty="0">
                 <a:solidFill>
                   <a:srgbClr val="17364A"/>
                 </a:solidFill>
@@ -4083,27 +4186,13 @@
               </a:rPr>
               <a:t>However, the safety of that workflow depends on the surrounding architecture.</a:t>
             </a:r>
-            <a:endParaRPr lang="en-US" sz="1700" dirty="0"/>
-          </a:p>
-          <a:p>
-            <a:r>
-              <a:rPr lang="en-US" sz="1700" dirty="0">
-                <a:solidFill>
-                  <a:srgbClr val="17364A"/>
-                </a:solidFill>
-                <a:latin typeface="Aptos" pitchFamily="34" charset="0"/>
-                <a:ea typeface="Aptos" pitchFamily="34" charset="-122"/>
-                <a:cs typeface="Aptos" pitchFamily="34" charset="-120"/>
-              </a:rPr>
-              <a:t>The eCR data must be received correctly, routed to the right jurisdiction, parsed into the surveillance system, associated.</a:t>
-            </a:r>
-            <a:endParaRPr lang="en-US" sz="1700" dirty="0"/>
-          </a:p>
-        </p:txBody>
-      </p:sp>
-      <p:sp>
-        <p:nvSpPr>
-          <p:cNvPr id="11" name="Shape 9"/>
+            <a:endParaRPr lang="en-US" sz="2100" dirty="0"/>
+          </a:p>
+        </p:txBody>
+      </p:sp>
+      <p:sp>
+        <p:nvSpPr>
+          <p:cNvPr id="12" name="Shape 10"/>
           <p:cNvSpPr/>
           <p:nvPr/>
         </p:nvSpPr>
@@ -4130,14 +4219,14 @@
       </p:sp>
       <p:sp>
         <p:nvSpPr>
-          <p:cNvPr id="12" name="Text 10"/>
+          <p:cNvPr id="13" name="Text 11"/>
           <p:cNvSpPr/>
           <p:nvPr/>
         </p:nvSpPr>
         <p:spPr>
           <a:xfrm>
             <a:off x="8074152" y="1563624"/>
-            <a:ext cx="2825496" cy="201168"/>
+            <a:ext cx="2825496" cy="256032"/>
           </a:xfrm>
           <a:prstGeom prst="rect">
             <a:avLst/>
@@ -4153,7 +4242,7 @@
               <a:buNone/>
             </a:pPr>
             <a:r>
-              <a:rPr lang="en-US" sz="950" b="1" dirty="0">
+              <a:rPr lang="en-US" sz="1300" b="1" dirty="0">
                 <a:solidFill>
                   <a:srgbClr val="0068B7"/>
                 </a:solidFill>
@@ -4163,20 +4252,20 @@
               </a:rPr>
               <a:t>Key idea</a:t>
             </a:r>
-            <a:endParaRPr lang="en-US" sz="950" dirty="0"/>
-          </a:p>
-        </p:txBody>
-      </p:sp>
-      <p:sp>
-        <p:nvSpPr>
-          <p:cNvPr id="13" name="Text 11"/>
-          <p:cNvSpPr/>
-          <p:nvPr/>
-        </p:nvSpPr>
-        <p:spPr>
-          <a:xfrm>
-            <a:off x="8074152" y="1856232"/>
-            <a:ext cx="2825496" cy="1261872"/>
+            <a:endParaRPr lang="en-US" sz="1300" dirty="0"/>
+          </a:p>
+        </p:txBody>
+      </p:sp>
+      <p:sp>
+        <p:nvSpPr>
+          <p:cNvPr id="14" name="Text 12"/>
+          <p:cNvSpPr/>
+          <p:nvPr/>
+        </p:nvSpPr>
+        <p:spPr>
+          <a:xfrm>
+            <a:off x="8074152" y="1920240"/>
+            <a:ext cx="2825496" cy="1188720"/>
           </a:xfrm>
           <a:prstGeom prst="rect">
             <a:avLst/>
@@ -4194,7 +4283,7 @@
               <a:buNone/>
             </a:pPr>
             <a:r>
-              <a:rPr lang="en-US" sz="1250" dirty="0">
+              <a:rPr lang="en-US" sz="1550" dirty="0">
                 <a:solidFill>
                   <a:srgbClr val="17364A"/>
                 </a:solidFill>
@@ -4202,15 +4291,15 @@
                 <a:ea typeface="Aptos" pitchFamily="34" charset="-122"/>
                 <a:cs typeface="Aptos" pitchFamily="34" charset="-120"/>
               </a:rPr>
-              <a:t>Consider a health department that wants to use AI to summarize incoming electronic case reports for disease investigators.</a:t>
-            </a:r>
-            <a:endParaRPr lang="en-US" sz="1250" dirty="0"/>
-          </a:p>
-        </p:txBody>
-      </p:sp>
-      <p:sp>
-        <p:nvSpPr>
-          <p:cNvPr id="14" name="Shape 12"/>
+              <a:t>Consider a health department that wants to use AI to summarize incoming electronic case reports for.</a:t>
+            </a:r>
+            <a:endParaRPr lang="en-US" sz="1550" dirty="0"/>
+          </a:p>
+        </p:txBody>
+      </p:sp>
+      <p:sp>
+        <p:nvSpPr>
+          <p:cNvPr id="15" name="Shape 13"/>
           <p:cNvSpPr/>
           <p:nvPr/>
         </p:nvSpPr>
@@ -4237,14 +4326,14 @@
       </p:sp>
       <p:sp>
         <p:nvSpPr>
-          <p:cNvPr id="15" name="Text 13"/>
+          <p:cNvPr id="16" name="Text 14"/>
           <p:cNvSpPr/>
           <p:nvPr/>
         </p:nvSpPr>
         <p:spPr>
           <a:xfrm>
             <a:off x="8074152" y="3666744"/>
-            <a:ext cx="2825496" cy="201168"/>
+            <a:ext cx="2825496" cy="256032"/>
           </a:xfrm>
           <a:prstGeom prst="rect">
             <a:avLst/>
@@ -4260,7 +4349,7 @@
               <a:buNone/>
             </a:pPr>
             <a:r>
-              <a:rPr lang="en-US" sz="950" b="1" dirty="0">
+              <a:rPr lang="en-US" sz="1300" b="1" dirty="0">
                 <a:solidFill>
                   <a:srgbClr val="0068B7"/>
                 </a:solidFill>
@@ -4270,20 +4359,20 @@
               </a:rPr>
               <a:t>Use this for</a:t>
             </a:r>
-            <a:endParaRPr lang="en-US" sz="950" dirty="0"/>
-          </a:p>
-        </p:txBody>
-      </p:sp>
-      <p:sp>
-        <p:nvSpPr>
-          <p:cNvPr id="16" name="Text 14"/>
-          <p:cNvSpPr/>
-          <p:nvPr/>
-        </p:nvSpPr>
-        <p:spPr>
-          <a:xfrm>
-            <a:off x="8074152" y="3959352"/>
-            <a:ext cx="2825496" cy="1170432"/>
+            <a:endParaRPr lang="en-US" sz="1300" dirty="0"/>
+          </a:p>
+        </p:txBody>
+      </p:sp>
+      <p:sp>
+        <p:nvSpPr>
+          <p:cNvPr id="17" name="Text 15"/>
+          <p:cNvSpPr/>
+          <p:nvPr/>
+        </p:nvSpPr>
+        <p:spPr>
+          <a:xfrm>
+            <a:off x="8074152" y="4023360"/>
+            <a:ext cx="2825496" cy="1097280"/>
           </a:xfrm>
           <a:prstGeom prst="rect">
             <a:avLst/>
@@ -4301,7 +4390,7 @@
               <a:buNone/>
             </a:pPr>
             <a:r>
-              <a:rPr lang="en-US" sz="1250" dirty="0">
+              <a:rPr lang="en-US" sz="1550" dirty="0">
                 <a:solidFill>
                   <a:srgbClr val="17364A"/>
                 </a:solidFill>
@@ -4311,7 +4400,7 @@
               </a:rPr>
               <a:t>Connect the concept to public health decisions, safeguards, documentation, or implementation work.</a:t>
             </a:r>
-            <a:endParaRPr lang="en-US" sz="1250" dirty="0"/>
+            <a:endParaRPr lang="en-US" sz="1550" dirty="0"/>
           </a:p>
         </p:txBody>
       </p:sp>
@@ -4508,7 +4597,7 @@
                 <a:ea typeface="Aptos" pitchFamily="34" charset="-122"/>
                 <a:cs typeface="Aptos" pitchFamily="34" charset="-120"/>
               </a:rPr>
-              <a:t>© Paula Soper</a:t>
+              <a:t>Â© Paula Soper</a:t>
             </a:r>
             <a:endParaRPr lang="en-US" sz="800" dirty="0"/>
           </a:p>
@@ -4516,7 +4605,46 @@
       </p:sp>
       <p:sp>
         <p:nvSpPr>
-          <p:cNvPr id="7" name="Shape 5"/>
+          <p:cNvPr id="7" name="Text 5"/>
+          <p:cNvSpPr/>
+          <p:nvPr/>
+        </p:nvSpPr>
+        <p:spPr>
+          <a:xfrm>
+            <a:off x="11137392" y="6510528"/>
+            <a:ext cx="411480" cy="201168"/>
+          </a:xfrm>
+          <a:prstGeom prst="rect">
+            <a:avLst/>
+          </a:prstGeom>
+          <a:noFill/>
+          <a:ln/>
+        </p:spPr>
+        <p:txBody>
+          <a:bodyPr wrap="square" lIns="0" tIns="0" rIns="0" bIns="0" rtlCol="0" anchor="ctr"/>
+          <a:lstStyle/>
+          <a:p>
+            <a:pPr algn="r" indent="0" marL="0">
+              <a:buNone/>
+            </a:pPr>
+            <a:r>
+              <a:rPr lang="en-US" sz="900" dirty="0">
+                <a:solidFill>
+                  <a:srgbClr val="5F7181"/>
+                </a:solidFill>
+                <a:latin typeface="Aptos" pitchFamily="34" charset="0"/>
+                <a:ea typeface="Aptos" pitchFamily="34" charset="-122"/>
+                <a:cs typeface="Aptos" pitchFamily="34" charset="-120"/>
+              </a:rPr>
+              <a:t>12</a:t>
+            </a:r>
+            <a:endParaRPr lang="en-US" sz="900" dirty="0"/>
+          </a:p>
+        </p:txBody>
+      </p:sp>
+      <p:sp>
+        <p:nvSpPr>
+          <p:cNvPr id="8" name="Shape 6"/>
           <p:cNvSpPr/>
           <p:nvPr/>
         </p:nvSpPr>
@@ -4541,7 +4669,7 @@
       </p:sp>
       <p:sp>
         <p:nvSpPr>
-          <p:cNvPr id="8" name="Text 6"/>
+          <p:cNvPr id="9" name="Text 7"/>
           <p:cNvSpPr/>
           <p:nvPr/>
         </p:nvSpPr>
@@ -4580,14 +4708,14 @@
       </p:sp>
       <p:sp>
         <p:nvSpPr>
-          <p:cNvPr id="9" name="Text 7"/>
+          <p:cNvPr id="10" name="Text 8"/>
           <p:cNvSpPr/>
           <p:nvPr/>
         </p:nvSpPr>
         <p:spPr>
           <a:xfrm>
             <a:off x="640080" y="621792"/>
-            <a:ext cx="10881360" cy="566928"/>
+            <a:ext cx="10881360" cy="713232"/>
           </a:xfrm>
           <a:prstGeom prst="rect">
             <a:avLst/>
@@ -4605,7 +4733,7 @@
               <a:buNone/>
             </a:pPr>
             <a:r>
-              <a:rPr lang="en-US" sz="2700" b="1" dirty="0">
+              <a:rPr lang="en-US" sz="3400" b="1" dirty="0">
                 <a:solidFill>
                   <a:srgbClr val="003A63"/>
                 </a:solidFill>
@@ -4615,20 +4743,20 @@
               </a:rPr>
               <a:t>Technical Deep Dive</a:t>
             </a:r>
-            <a:endParaRPr lang="en-US" sz="2700" dirty="0"/>
-          </a:p>
-        </p:txBody>
-      </p:sp>
-      <p:sp>
-        <p:nvSpPr>
-          <p:cNvPr id="10" name="Text 8"/>
-          <p:cNvSpPr/>
-          <p:nvPr/>
-        </p:nvSpPr>
-        <p:spPr>
-          <a:xfrm>
-            <a:off x="868680" y="1417320"/>
-            <a:ext cx="6675120" cy="4434840"/>
+            <a:endParaRPr lang="en-US" sz="3400" dirty="0"/>
+          </a:p>
+        </p:txBody>
+      </p:sp>
+      <p:sp>
+        <p:nvSpPr>
+          <p:cNvPr id="11" name="Text 9"/>
+          <p:cNvSpPr/>
+          <p:nvPr/>
+        </p:nvSpPr>
+        <p:spPr>
+          <a:xfrm>
+            <a:off x="868680" y="1508760"/>
+            <a:ext cx="6537960" cy="4160520"/>
           </a:xfrm>
           <a:prstGeom prst="rect">
             <a:avLst/>
@@ -4643,7 +4771,7 @@
           <a:lstStyle/>
           <a:p>
             <a:r>
-              <a:rPr lang="en-US" sz="1700" dirty="0">
+              <a:rPr lang="en-US" sz="2100" dirty="0">
                 <a:solidFill>
                   <a:srgbClr val="17364A"/>
                 </a:solidFill>
@@ -4653,11 +4781,11 @@
               </a:rPr>
               <a:t>A public health AI architecture usually begins with source systems.</a:t>
             </a:r>
-            <a:endParaRPr lang="en-US" sz="1700" dirty="0"/>
-          </a:p>
-          <a:p>
-            <a:r>
-              <a:rPr lang="en-US" sz="1700" dirty="0">
+            <a:endParaRPr lang="en-US" sz="2100" dirty="0"/>
+          </a:p>
+          <a:p>
+            <a:r>
+              <a:rPr lang="en-US" sz="2100" dirty="0">
                 <a:solidFill>
                   <a:srgbClr val="17364A"/>
                 </a:solidFill>
@@ -4665,13 +4793,13 @@
                 <a:ea typeface="Aptos" pitchFamily="34" charset="-122"/>
                 <a:cs typeface="Aptos" pitchFamily="34" charset="-120"/>
               </a:rPr>
-              <a:t>These may include electronic health records, laboratories, immunization information systems, vital records systems,.</a:t>
-            </a:r>
-            <a:endParaRPr lang="en-US" sz="1700" dirty="0"/>
-          </a:p>
-          <a:p>
-            <a:r>
-              <a:rPr lang="en-US" sz="1700" dirty="0">
+              <a:t>These may include electronic health records, laboratories, immunization information systems, vital.</a:t>
+            </a:r>
+            <a:endParaRPr lang="en-US" sz="2100" dirty="0"/>
+          </a:p>
+          <a:p>
+            <a:r>
+              <a:rPr lang="en-US" sz="2100" dirty="0">
                 <a:solidFill>
                   <a:srgbClr val="17364A"/>
                 </a:solidFill>
@@ -4679,29 +4807,15 @@
                 <a:ea typeface="Aptos" pitchFamily="34" charset="-122"/>
                 <a:cs typeface="Aptos" pitchFamily="34" charset="-120"/>
               </a:rPr>
-              <a:t>Each source system has its own data quality profile, update frequency, terminology conventions, permissions, and limitations.</a:t>
-            </a:r>
-            <a:endParaRPr lang="en-US" sz="1700" dirty="0"/>
-          </a:p>
-          <a:p>
-            <a:r>
-              <a:rPr lang="en-US" sz="1700" dirty="0">
-                <a:solidFill>
-                  <a:srgbClr val="17364A"/>
-                </a:solidFill>
-                <a:latin typeface="Aptos" pitchFamily="34" charset="0"/>
-                <a:ea typeface="Aptos" pitchFamily="34" charset="-122"/>
-                <a:cs typeface="Aptos" pitchFamily="34" charset="-120"/>
-              </a:rPr>
-              <a:t>Before AI can be used safely, the agency needs to understand these characteristics.</a:t>
-            </a:r>
-            <a:endParaRPr lang="en-US" sz="1700" dirty="0"/>
-          </a:p>
-        </p:txBody>
-      </p:sp>
-      <p:sp>
-        <p:nvSpPr>
-          <p:cNvPr id="11" name="Shape 9"/>
+              <a:t>Each source system has its own data quality profile, update frequency, terminology conventions,.</a:t>
+            </a:r>
+            <a:endParaRPr lang="en-US" sz="2100" dirty="0"/>
+          </a:p>
+        </p:txBody>
+      </p:sp>
+      <p:sp>
+        <p:nvSpPr>
+          <p:cNvPr id="12" name="Shape 10"/>
           <p:cNvSpPr/>
           <p:nvPr/>
         </p:nvSpPr>
@@ -4728,14 +4842,14 @@
       </p:sp>
       <p:sp>
         <p:nvSpPr>
-          <p:cNvPr id="12" name="Text 10"/>
+          <p:cNvPr id="13" name="Text 11"/>
           <p:cNvSpPr/>
           <p:nvPr/>
         </p:nvSpPr>
         <p:spPr>
           <a:xfrm>
             <a:off x="8074152" y="1563624"/>
-            <a:ext cx="2825496" cy="201168"/>
+            <a:ext cx="2825496" cy="256032"/>
           </a:xfrm>
           <a:prstGeom prst="rect">
             <a:avLst/>
@@ -4751,7 +4865,7 @@
               <a:buNone/>
             </a:pPr>
             <a:r>
-              <a:rPr lang="en-US" sz="950" b="1" dirty="0">
+              <a:rPr lang="en-US" sz="1300" b="1" dirty="0">
                 <a:solidFill>
                   <a:srgbClr val="0068B7"/>
                 </a:solidFill>
@@ -4761,20 +4875,20 @@
               </a:rPr>
               <a:t>Key idea</a:t>
             </a:r>
-            <a:endParaRPr lang="en-US" sz="950" dirty="0"/>
-          </a:p>
-        </p:txBody>
-      </p:sp>
-      <p:sp>
-        <p:nvSpPr>
-          <p:cNvPr id="13" name="Text 11"/>
-          <p:cNvSpPr/>
-          <p:nvPr/>
-        </p:nvSpPr>
-        <p:spPr>
-          <a:xfrm>
-            <a:off x="8074152" y="1856232"/>
-            <a:ext cx="2825496" cy="1261872"/>
+            <a:endParaRPr lang="en-US" sz="1300" dirty="0"/>
+          </a:p>
+        </p:txBody>
+      </p:sp>
+      <p:sp>
+        <p:nvSpPr>
+          <p:cNvPr id="14" name="Text 12"/>
+          <p:cNvSpPr/>
+          <p:nvPr/>
+        </p:nvSpPr>
+        <p:spPr>
+          <a:xfrm>
+            <a:off x="8074152" y="1920240"/>
+            <a:ext cx="2825496" cy="1188720"/>
           </a:xfrm>
           <a:prstGeom prst="rect">
             <a:avLst/>
@@ -4792,7 +4906,7 @@
               <a:buNone/>
             </a:pPr>
             <a:r>
-              <a:rPr lang="en-US" sz="1250" dirty="0">
+              <a:rPr lang="en-US" sz="1550" dirty="0">
                 <a:solidFill>
                   <a:srgbClr val="17364A"/>
                 </a:solidFill>
@@ -4802,13 +4916,13 @@
               </a:rPr>
               <a:t>A public health AI architecture usually begins with source systems.</a:t>
             </a:r>
-            <a:endParaRPr lang="en-US" sz="1250" dirty="0"/>
-          </a:p>
-        </p:txBody>
-      </p:sp>
-      <p:sp>
-        <p:nvSpPr>
-          <p:cNvPr id="14" name="Shape 12"/>
+            <a:endParaRPr lang="en-US" sz="1550" dirty="0"/>
+          </a:p>
+        </p:txBody>
+      </p:sp>
+      <p:sp>
+        <p:nvSpPr>
+          <p:cNvPr id="15" name="Shape 13"/>
           <p:cNvSpPr/>
           <p:nvPr/>
         </p:nvSpPr>
@@ -4835,14 +4949,14 @@
       </p:sp>
       <p:sp>
         <p:nvSpPr>
-          <p:cNvPr id="15" name="Text 13"/>
+          <p:cNvPr id="16" name="Text 14"/>
           <p:cNvSpPr/>
           <p:nvPr/>
         </p:nvSpPr>
         <p:spPr>
           <a:xfrm>
             <a:off x="8074152" y="3666744"/>
-            <a:ext cx="2825496" cy="201168"/>
+            <a:ext cx="2825496" cy="256032"/>
           </a:xfrm>
           <a:prstGeom prst="rect">
             <a:avLst/>
@@ -4858,7 +4972,7 @@
               <a:buNone/>
             </a:pPr>
             <a:r>
-              <a:rPr lang="en-US" sz="950" b="1" dirty="0">
+              <a:rPr lang="en-US" sz="1300" b="1" dirty="0">
                 <a:solidFill>
                   <a:srgbClr val="0068B7"/>
                 </a:solidFill>
@@ -4868,20 +4982,20 @@
               </a:rPr>
               <a:t>Use this for</a:t>
             </a:r>
-            <a:endParaRPr lang="en-US" sz="950" dirty="0"/>
-          </a:p>
-        </p:txBody>
-      </p:sp>
-      <p:sp>
-        <p:nvSpPr>
-          <p:cNvPr id="16" name="Text 14"/>
-          <p:cNvSpPr/>
-          <p:nvPr/>
-        </p:nvSpPr>
-        <p:spPr>
-          <a:xfrm>
-            <a:off x="8074152" y="3959352"/>
-            <a:ext cx="2825496" cy="1170432"/>
+            <a:endParaRPr lang="en-US" sz="1300" dirty="0"/>
+          </a:p>
+        </p:txBody>
+      </p:sp>
+      <p:sp>
+        <p:nvSpPr>
+          <p:cNvPr id="17" name="Text 15"/>
+          <p:cNvSpPr/>
+          <p:nvPr/>
+        </p:nvSpPr>
+        <p:spPr>
+          <a:xfrm>
+            <a:off x="8074152" y="4023360"/>
+            <a:ext cx="2825496" cy="1097280"/>
           </a:xfrm>
           <a:prstGeom prst="rect">
             <a:avLst/>
@@ -4899,7 +5013,7 @@
               <a:buNone/>
             </a:pPr>
             <a:r>
-              <a:rPr lang="en-US" sz="1250" dirty="0">
+              <a:rPr lang="en-US" sz="1550" dirty="0">
                 <a:solidFill>
                   <a:srgbClr val="17364A"/>
                 </a:solidFill>
@@ -4909,7 +5023,7 @@
               </a:rPr>
               <a:t>Connect the concept to public health decisions, safeguards, documentation, or implementation work.</a:t>
             </a:r>
-            <a:endParaRPr lang="en-US" sz="1250" dirty="0"/>
+            <a:endParaRPr lang="en-US" sz="1550" dirty="0"/>
           </a:p>
         </p:txBody>
       </p:sp>
@@ -5106,7 +5220,7 @@
                 <a:ea typeface="Aptos" pitchFamily="34" charset="-122"/>
                 <a:cs typeface="Aptos" pitchFamily="34" charset="-120"/>
               </a:rPr>
-              <a:t>© Paula Soper</a:t>
+              <a:t>Â© Paula Soper</a:t>
             </a:r>
             <a:endParaRPr lang="en-US" sz="800" dirty="0"/>
           </a:p>
@@ -5120,8 +5234,47 @@
         </p:nvSpPr>
         <p:spPr>
           <a:xfrm>
+            <a:off x="11137392" y="6510528"/>
+            <a:ext cx="411480" cy="201168"/>
+          </a:xfrm>
+          <a:prstGeom prst="rect">
+            <a:avLst/>
+          </a:prstGeom>
+          <a:noFill/>
+          <a:ln/>
+        </p:spPr>
+        <p:txBody>
+          <a:bodyPr wrap="square" lIns="0" tIns="0" rIns="0" bIns="0" rtlCol="0" anchor="ctr"/>
+          <a:lstStyle/>
+          <a:p>
+            <a:pPr algn="r" indent="0" marL="0">
+              <a:buNone/>
+            </a:pPr>
+            <a:r>
+              <a:rPr lang="en-US" sz="900" dirty="0">
+                <a:solidFill>
+                  <a:srgbClr val="5F7181"/>
+                </a:solidFill>
+                <a:latin typeface="Aptos" pitchFamily="34" charset="0"/>
+                <a:ea typeface="Aptos" pitchFamily="34" charset="-122"/>
+                <a:cs typeface="Aptos" pitchFamily="34" charset="-120"/>
+              </a:rPr>
+              <a:t>13</a:t>
+            </a:r>
+            <a:endParaRPr lang="en-US" sz="900" dirty="0"/>
+          </a:p>
+        </p:txBody>
+      </p:sp>
+      <p:sp>
+        <p:nvSpPr>
+          <p:cNvPr id="8" name="Text 6"/>
+          <p:cNvSpPr/>
+          <p:nvPr/>
+        </p:nvSpPr>
+        <p:spPr>
+          <a:xfrm>
             <a:off x="640080" y="658368"/>
-            <a:ext cx="10881360" cy="566928"/>
+            <a:ext cx="10881360" cy="713232"/>
           </a:xfrm>
           <a:prstGeom prst="rect">
             <a:avLst/>
@@ -5139,7 +5292,7 @@
               <a:buNone/>
             </a:pPr>
             <a:r>
-              <a:rPr lang="en-US" sz="2700" b="1" dirty="0">
+              <a:rPr lang="en-US" sz="3400" b="1" dirty="0">
                 <a:solidFill>
                   <a:srgbClr val="003A63"/>
                 </a:solidFill>
@@ -5149,20 +5302,20 @@
               </a:rPr>
               <a:t>Technical Deep Dive Continued</a:t>
             </a:r>
-            <a:endParaRPr lang="en-US" sz="2700" dirty="0"/>
-          </a:p>
-        </p:txBody>
-      </p:sp>
-      <p:sp>
-        <p:nvSpPr>
-          <p:cNvPr id="8" name="Text 6"/>
-          <p:cNvSpPr/>
-          <p:nvPr/>
-        </p:nvSpPr>
-        <p:spPr>
-          <a:xfrm>
-            <a:off x="868680" y="1417320"/>
-            <a:ext cx="6675120" cy="4434840"/>
+            <a:endParaRPr lang="en-US" sz="3400" dirty="0"/>
+          </a:p>
+        </p:txBody>
+      </p:sp>
+      <p:sp>
+        <p:nvSpPr>
+          <p:cNvPr id="9" name="Text 7"/>
+          <p:cNvSpPr/>
+          <p:nvPr/>
+        </p:nvSpPr>
+        <p:spPr>
+          <a:xfrm>
+            <a:off x="868680" y="1508760"/>
+            <a:ext cx="6537960" cy="4160520"/>
           </a:xfrm>
           <a:prstGeom prst="rect">
             <a:avLst/>
@@ -5177,7 +5330,7 @@
           <a:lstStyle/>
           <a:p>
             <a:r>
-              <a:rPr lang="en-US" sz="1700" dirty="0">
+              <a:rPr lang="en-US" sz="2100" dirty="0">
                 <a:solidFill>
                   <a:srgbClr val="17364A"/>
                 </a:solidFill>
@@ -5187,11 +5340,11 @@
               </a:rPr>
               <a:t>The fourth layer is the AI service or model.</a:t>
             </a:r>
-            <a:endParaRPr lang="en-US" sz="1700" dirty="0"/>
-          </a:p>
-          <a:p>
-            <a:r>
-              <a:rPr lang="en-US" sz="1700" dirty="0">
+            <a:endParaRPr lang="en-US" sz="2100" dirty="0"/>
+          </a:p>
+          <a:p>
+            <a:r>
+              <a:rPr lang="en-US" sz="2100" dirty="0">
                 <a:solidFill>
                   <a:srgbClr val="17364A"/>
                 </a:solidFill>
@@ -5199,13 +5352,13 @@
                 <a:ea typeface="Aptos" pitchFamily="34" charset="-122"/>
                 <a:cs typeface="Aptos" pitchFamily="34" charset="-120"/>
               </a:rPr>
-              <a:t>This may be a predictive model, natural language processing tool, generative AI assistant, retrieval-augmented generation.</a:t>
-            </a:r>
-            <a:endParaRPr lang="en-US" sz="1700" dirty="0"/>
-          </a:p>
-          <a:p>
-            <a:r>
-              <a:rPr lang="en-US" sz="1700" dirty="0">
+              <a:t>This may be a predictive model, natural language processing tool, generative AI assistant,.</a:t>
+            </a:r>
+            <a:endParaRPr lang="en-US" sz="2100" dirty="0"/>
+          </a:p>
+          <a:p>
+            <a:r>
+              <a:rPr lang="en-US" sz="2100" dirty="0">
                 <a:solidFill>
                   <a:srgbClr val="17364A"/>
                 </a:solidFill>
@@ -5215,27 +5368,13 @@
               </a:rPr>
               <a:t>The model should have a defined intended use and explicit limits.</a:t>
             </a:r>
-            <a:endParaRPr lang="en-US" sz="1700" dirty="0"/>
-          </a:p>
-          <a:p>
-            <a:r>
-              <a:rPr lang="en-US" sz="1700" dirty="0">
-                <a:solidFill>
-                  <a:srgbClr val="17364A"/>
-                </a:solidFill>
-                <a:latin typeface="Aptos" pitchFamily="34" charset="0"/>
-                <a:ea typeface="Aptos" pitchFamily="34" charset="-122"/>
-                <a:cs typeface="Aptos" pitchFamily="34" charset="-120"/>
-              </a:rPr>
-              <a:t>A tool designed to summarize case notes should not silently make eligibility decisions.</a:t>
-            </a:r>
-            <a:endParaRPr lang="en-US" sz="1700" dirty="0"/>
-          </a:p>
-        </p:txBody>
-      </p:sp>
-      <p:sp>
-        <p:nvSpPr>
-          <p:cNvPr id="9" name="Shape 7"/>
+            <a:endParaRPr lang="en-US" sz="2100" dirty="0"/>
+          </a:p>
+        </p:txBody>
+      </p:sp>
+      <p:sp>
+        <p:nvSpPr>
+          <p:cNvPr id="10" name="Shape 8"/>
           <p:cNvSpPr/>
           <p:nvPr/>
         </p:nvSpPr>
@@ -5262,14 +5401,14 @@
       </p:sp>
       <p:sp>
         <p:nvSpPr>
-          <p:cNvPr id="10" name="Text 8"/>
+          <p:cNvPr id="11" name="Text 9"/>
           <p:cNvSpPr/>
           <p:nvPr/>
         </p:nvSpPr>
         <p:spPr>
           <a:xfrm>
             <a:off x="8074152" y="1563624"/>
-            <a:ext cx="2825496" cy="201168"/>
+            <a:ext cx="2825496" cy="256032"/>
           </a:xfrm>
           <a:prstGeom prst="rect">
             <a:avLst/>
@@ -5285,7 +5424,7 @@
               <a:buNone/>
             </a:pPr>
             <a:r>
-              <a:rPr lang="en-US" sz="950" b="1" dirty="0">
+              <a:rPr lang="en-US" sz="1300" b="1" dirty="0">
                 <a:solidFill>
                   <a:srgbClr val="0068B7"/>
                 </a:solidFill>
@@ -5295,20 +5434,20 @@
               </a:rPr>
               <a:t>Key idea</a:t>
             </a:r>
-            <a:endParaRPr lang="en-US" sz="950" dirty="0"/>
-          </a:p>
-        </p:txBody>
-      </p:sp>
-      <p:sp>
-        <p:nvSpPr>
-          <p:cNvPr id="11" name="Text 9"/>
-          <p:cNvSpPr/>
-          <p:nvPr/>
-        </p:nvSpPr>
-        <p:spPr>
-          <a:xfrm>
-            <a:off x="8074152" y="1856232"/>
-            <a:ext cx="2825496" cy="1261872"/>
+            <a:endParaRPr lang="en-US" sz="1300" dirty="0"/>
+          </a:p>
+        </p:txBody>
+      </p:sp>
+      <p:sp>
+        <p:nvSpPr>
+          <p:cNvPr id="12" name="Text 10"/>
+          <p:cNvSpPr/>
+          <p:nvPr/>
+        </p:nvSpPr>
+        <p:spPr>
+          <a:xfrm>
+            <a:off x="8074152" y="1920240"/>
+            <a:ext cx="2825496" cy="1188720"/>
           </a:xfrm>
           <a:prstGeom prst="rect">
             <a:avLst/>
@@ -5326,7 +5465,7 @@
               <a:buNone/>
             </a:pPr>
             <a:r>
-              <a:rPr lang="en-US" sz="1250" dirty="0">
+              <a:rPr lang="en-US" sz="1550" dirty="0">
                 <a:solidFill>
                   <a:srgbClr val="17364A"/>
                 </a:solidFill>
@@ -5336,13 +5475,13 @@
               </a:rPr>
               <a:t>The fourth layer is the AI service or model.</a:t>
             </a:r>
-            <a:endParaRPr lang="en-US" sz="1250" dirty="0"/>
-          </a:p>
-        </p:txBody>
-      </p:sp>
-      <p:sp>
-        <p:nvSpPr>
-          <p:cNvPr id="12" name="Shape 10"/>
+            <a:endParaRPr lang="en-US" sz="1550" dirty="0"/>
+          </a:p>
+        </p:txBody>
+      </p:sp>
+      <p:sp>
+        <p:nvSpPr>
+          <p:cNvPr id="13" name="Shape 11"/>
           <p:cNvSpPr/>
           <p:nvPr/>
         </p:nvSpPr>
@@ -5369,14 +5508,14 @@
       </p:sp>
       <p:sp>
         <p:nvSpPr>
-          <p:cNvPr id="13" name="Text 11"/>
+          <p:cNvPr id="14" name="Text 12"/>
           <p:cNvSpPr/>
           <p:nvPr/>
         </p:nvSpPr>
         <p:spPr>
           <a:xfrm>
             <a:off x="8074152" y="3666744"/>
-            <a:ext cx="2825496" cy="201168"/>
+            <a:ext cx="2825496" cy="256032"/>
           </a:xfrm>
           <a:prstGeom prst="rect">
             <a:avLst/>
@@ -5392,7 +5531,7 @@
               <a:buNone/>
             </a:pPr>
             <a:r>
-              <a:rPr lang="en-US" sz="950" b="1" dirty="0">
+              <a:rPr lang="en-US" sz="1300" b="1" dirty="0">
                 <a:solidFill>
                   <a:srgbClr val="0068B7"/>
                 </a:solidFill>
@@ -5402,20 +5541,20 @@
               </a:rPr>
               <a:t>Use this for</a:t>
             </a:r>
-            <a:endParaRPr lang="en-US" sz="950" dirty="0"/>
-          </a:p>
-        </p:txBody>
-      </p:sp>
-      <p:sp>
-        <p:nvSpPr>
-          <p:cNvPr id="14" name="Text 12"/>
-          <p:cNvSpPr/>
-          <p:nvPr/>
-        </p:nvSpPr>
-        <p:spPr>
-          <a:xfrm>
-            <a:off x="8074152" y="3959352"/>
-            <a:ext cx="2825496" cy="1170432"/>
+            <a:endParaRPr lang="en-US" sz="1300" dirty="0"/>
+          </a:p>
+        </p:txBody>
+      </p:sp>
+      <p:sp>
+        <p:nvSpPr>
+          <p:cNvPr id="15" name="Text 13"/>
+          <p:cNvSpPr/>
+          <p:nvPr/>
+        </p:nvSpPr>
+        <p:spPr>
+          <a:xfrm>
+            <a:off x="8074152" y="4023360"/>
+            <a:ext cx="2825496" cy="1097280"/>
           </a:xfrm>
           <a:prstGeom prst="rect">
             <a:avLst/>
@@ -5433,7 +5572,7 @@
               <a:buNone/>
             </a:pPr>
             <a:r>
-              <a:rPr lang="en-US" sz="1250" dirty="0">
+              <a:rPr lang="en-US" sz="1550" dirty="0">
                 <a:solidFill>
                   <a:srgbClr val="17364A"/>
                 </a:solidFill>
@@ -5443,7 +5582,7 @@
               </a:rPr>
               <a:t>Connect the concept to public health decisions, safeguards, documentation, or implementation work.</a:t>
             </a:r>
-            <a:endParaRPr lang="en-US" sz="1250" dirty="0"/>
+            <a:endParaRPr lang="en-US" sz="1550" dirty="0"/>
           </a:p>
         </p:txBody>
       </p:sp>
@@ -5640,7 +5779,7 @@
                 <a:ea typeface="Aptos" pitchFamily="34" charset="-122"/>
                 <a:cs typeface="Aptos" pitchFamily="34" charset="-120"/>
               </a:rPr>
-              <a:t>© Paula Soper</a:t>
+              <a:t>Â© Paula Soper</a:t>
             </a:r>
             <a:endParaRPr lang="en-US" sz="800" dirty="0"/>
           </a:p>
@@ -5648,7 +5787,46 @@
       </p:sp>
       <p:sp>
         <p:nvSpPr>
-          <p:cNvPr id="7" name="Shape 5"/>
+          <p:cNvPr id="7" name="Text 5"/>
+          <p:cNvSpPr/>
+          <p:nvPr/>
+        </p:nvSpPr>
+        <p:spPr>
+          <a:xfrm>
+            <a:off x="11137392" y="6510528"/>
+            <a:ext cx="411480" cy="201168"/>
+          </a:xfrm>
+          <a:prstGeom prst="rect">
+            <a:avLst/>
+          </a:prstGeom>
+          <a:noFill/>
+          <a:ln/>
+        </p:spPr>
+        <p:txBody>
+          <a:bodyPr wrap="square" lIns="0" tIns="0" rIns="0" bIns="0" rtlCol="0" anchor="ctr"/>
+          <a:lstStyle/>
+          <a:p>
+            <a:pPr algn="r" indent="0" marL="0">
+              <a:buNone/>
+            </a:pPr>
+            <a:r>
+              <a:rPr lang="en-US" sz="900" dirty="0">
+                <a:solidFill>
+                  <a:srgbClr val="5F7181"/>
+                </a:solidFill>
+                <a:latin typeface="Aptos" pitchFamily="34" charset="0"/>
+                <a:ea typeface="Aptos" pitchFamily="34" charset="-122"/>
+                <a:cs typeface="Aptos" pitchFamily="34" charset="-120"/>
+              </a:rPr>
+              <a:t>14</a:t>
+            </a:r>
+            <a:endParaRPr lang="en-US" sz="900" dirty="0"/>
+          </a:p>
+        </p:txBody>
+      </p:sp>
+      <p:sp>
+        <p:nvSpPr>
+          <p:cNvPr id="8" name="Shape 6"/>
           <p:cNvSpPr/>
           <p:nvPr/>
         </p:nvSpPr>
@@ -5673,7 +5851,7 @@
       </p:sp>
       <p:sp>
         <p:nvSpPr>
-          <p:cNvPr id="8" name="Text 6"/>
+          <p:cNvPr id="9" name="Text 7"/>
           <p:cNvSpPr/>
           <p:nvPr/>
         </p:nvSpPr>
@@ -5712,14 +5890,14 @@
       </p:sp>
       <p:sp>
         <p:nvSpPr>
-          <p:cNvPr id="9" name="Text 7"/>
+          <p:cNvPr id="10" name="Text 8"/>
           <p:cNvSpPr/>
           <p:nvPr/>
         </p:nvSpPr>
         <p:spPr>
           <a:xfrm>
             <a:off x="640080" y="621792"/>
-            <a:ext cx="10881360" cy="566928"/>
+            <a:ext cx="10881360" cy="713232"/>
           </a:xfrm>
           <a:prstGeom prst="rect">
             <a:avLst/>
@@ -5737,7 +5915,7 @@
               <a:buNone/>
             </a:pPr>
             <a:r>
-              <a:rPr lang="en-US" sz="2700" b="1" dirty="0">
+              <a:rPr lang="en-US" sz="3400" b="1" dirty="0">
                 <a:solidFill>
                   <a:srgbClr val="003A63"/>
                 </a:solidFill>
@@ -5747,20 +5925,20 @@
               </a:rPr>
               <a:t>Risks, Failure Modes, and Guardrails</a:t>
             </a:r>
-            <a:endParaRPr lang="en-US" sz="2700" dirty="0"/>
-          </a:p>
-        </p:txBody>
-      </p:sp>
-      <p:sp>
-        <p:nvSpPr>
-          <p:cNvPr id="10" name="Text 8"/>
-          <p:cNvSpPr/>
-          <p:nvPr/>
-        </p:nvSpPr>
-        <p:spPr>
-          <a:xfrm>
-            <a:off x="868680" y="1417320"/>
-            <a:ext cx="6675120" cy="4434840"/>
+            <a:endParaRPr lang="en-US" sz="3400" dirty="0"/>
+          </a:p>
+        </p:txBody>
+      </p:sp>
+      <p:sp>
+        <p:nvSpPr>
+          <p:cNvPr id="11" name="Text 9"/>
+          <p:cNvSpPr/>
+          <p:nvPr/>
+        </p:nvSpPr>
+        <p:spPr>
+          <a:xfrm>
+            <a:off x="868680" y="1508760"/>
+            <a:ext cx="6537960" cy="4160520"/>
           </a:xfrm>
           <a:prstGeom prst="rect">
             <a:avLst/>
@@ -5775,7 +5953,7 @@
           <a:lstStyle/>
           <a:p>
             <a:r>
-              <a:rPr lang="en-US" sz="1700" dirty="0">
+              <a:rPr lang="en-US" sz="2100" dirty="0">
                 <a:solidFill>
                   <a:srgbClr val="17364A"/>
                 </a:solidFill>
@@ -5785,11 +5963,11 @@
               </a:rPr>
               <a:t>Architectural invisibility.</a:t>
             </a:r>
-            <a:endParaRPr lang="en-US" sz="1700" dirty="0"/>
-          </a:p>
-          <a:p>
-            <a:r>
-              <a:rPr lang="en-US" sz="1700" dirty="0">
+            <a:endParaRPr lang="en-US" sz="2100" dirty="0"/>
+          </a:p>
+          <a:p>
+            <a:r>
+              <a:rPr lang="en-US" sz="2100" dirty="0">
                 <a:solidFill>
                   <a:srgbClr val="17364A"/>
                 </a:solidFill>
@@ -5797,13 +5975,13 @@
                 <a:ea typeface="Aptos" pitchFamily="34" charset="-122"/>
                 <a:cs typeface="Aptos" pitchFamily="34" charset="-120"/>
               </a:rPr>
-              <a:t>If staff cannot explain how data move through the system, they may not recognize when an AI output is based on incomplete,.</a:t>
-            </a:r>
-            <a:endParaRPr lang="en-US" sz="1700" dirty="0"/>
-          </a:p>
-          <a:p>
-            <a:r>
-              <a:rPr lang="en-US" sz="1700" dirty="0">
+              <a:t>If staff cannot explain how data move through the system, they may not recognize when an AI output is.</a:t>
+            </a:r>
+            <a:endParaRPr lang="en-US" sz="2100" dirty="0"/>
+          </a:p>
+          <a:p>
+            <a:r>
+              <a:rPr lang="en-US" sz="2100" dirty="0">
                 <a:solidFill>
                   <a:srgbClr val="17364A"/>
                 </a:solidFill>
@@ -5813,27 +5991,13 @@
               </a:rPr>
               <a:t>A practical guardrail is to require a workflow and data flow map before AI use is approved.</a:t>
             </a:r>
-            <a:endParaRPr lang="en-US" sz="1700" dirty="0"/>
-          </a:p>
-          <a:p>
-            <a:r>
-              <a:rPr lang="en-US" sz="1700" dirty="0">
-                <a:solidFill>
-                  <a:srgbClr val="17364A"/>
-                </a:solidFill>
-                <a:latin typeface="Aptos" pitchFamily="34" charset="0"/>
-                <a:ea typeface="Aptos" pitchFamily="34" charset="-122"/>
-                <a:cs typeface="Aptos" pitchFamily="34" charset="-120"/>
-              </a:rPr>
-              <a:t>Unclear authority.</a:t>
-            </a:r>
-            <a:endParaRPr lang="en-US" sz="1700" dirty="0"/>
-          </a:p>
-        </p:txBody>
-      </p:sp>
-      <p:sp>
-        <p:nvSpPr>
-          <p:cNvPr id="11" name="Shape 9"/>
+            <a:endParaRPr lang="en-US" sz="2100" dirty="0"/>
+          </a:p>
+        </p:txBody>
+      </p:sp>
+      <p:sp>
+        <p:nvSpPr>
+          <p:cNvPr id="12" name="Shape 10"/>
           <p:cNvSpPr/>
           <p:nvPr/>
         </p:nvSpPr>
@@ -5860,14 +6024,14 @@
       </p:sp>
       <p:sp>
         <p:nvSpPr>
-          <p:cNvPr id="12" name="Text 10"/>
+          <p:cNvPr id="13" name="Text 11"/>
           <p:cNvSpPr/>
           <p:nvPr/>
         </p:nvSpPr>
         <p:spPr>
           <a:xfrm>
             <a:off x="8074152" y="1563624"/>
-            <a:ext cx="2825496" cy="201168"/>
+            <a:ext cx="2825496" cy="256032"/>
           </a:xfrm>
           <a:prstGeom prst="rect">
             <a:avLst/>
@@ -5883,7 +6047,7 @@
               <a:buNone/>
             </a:pPr>
             <a:r>
-              <a:rPr lang="en-US" sz="950" b="1" dirty="0">
+              <a:rPr lang="en-US" sz="1300" b="1" dirty="0">
                 <a:solidFill>
                   <a:srgbClr val="0068B7"/>
                 </a:solidFill>
@@ -5893,20 +6057,20 @@
               </a:rPr>
               <a:t>Key idea</a:t>
             </a:r>
-            <a:endParaRPr lang="en-US" sz="950" dirty="0"/>
-          </a:p>
-        </p:txBody>
-      </p:sp>
-      <p:sp>
-        <p:nvSpPr>
-          <p:cNvPr id="13" name="Text 11"/>
-          <p:cNvSpPr/>
-          <p:nvPr/>
-        </p:nvSpPr>
-        <p:spPr>
-          <a:xfrm>
-            <a:off x="8074152" y="1856232"/>
-            <a:ext cx="2825496" cy="1261872"/>
+            <a:endParaRPr lang="en-US" sz="1300" dirty="0"/>
+          </a:p>
+        </p:txBody>
+      </p:sp>
+      <p:sp>
+        <p:nvSpPr>
+          <p:cNvPr id="14" name="Text 12"/>
+          <p:cNvSpPr/>
+          <p:nvPr/>
+        </p:nvSpPr>
+        <p:spPr>
+          <a:xfrm>
+            <a:off x="8074152" y="1920240"/>
+            <a:ext cx="2825496" cy="1188720"/>
           </a:xfrm>
           <a:prstGeom prst="rect">
             <a:avLst/>
@@ -5924,7 +6088,7 @@
               <a:buNone/>
             </a:pPr>
             <a:r>
-              <a:rPr lang="en-US" sz="1250" dirty="0">
+              <a:rPr lang="en-US" sz="1550" dirty="0">
                 <a:solidFill>
                   <a:srgbClr val="17364A"/>
                 </a:solidFill>
@@ -5934,13 +6098,13 @@
               </a:rPr>
               <a:t>Architectural invisibility.</a:t>
             </a:r>
-            <a:endParaRPr lang="en-US" sz="1250" dirty="0"/>
-          </a:p>
-        </p:txBody>
-      </p:sp>
-      <p:sp>
-        <p:nvSpPr>
-          <p:cNvPr id="14" name="Shape 12"/>
+            <a:endParaRPr lang="en-US" sz="1550" dirty="0"/>
+          </a:p>
+        </p:txBody>
+      </p:sp>
+      <p:sp>
+        <p:nvSpPr>
+          <p:cNvPr id="15" name="Shape 13"/>
           <p:cNvSpPr/>
           <p:nvPr/>
         </p:nvSpPr>
@@ -5967,14 +6131,14 @@
       </p:sp>
       <p:sp>
         <p:nvSpPr>
-          <p:cNvPr id="15" name="Text 13"/>
+          <p:cNvPr id="16" name="Text 14"/>
           <p:cNvSpPr/>
           <p:nvPr/>
         </p:nvSpPr>
         <p:spPr>
           <a:xfrm>
             <a:off x="8074152" y="3666744"/>
-            <a:ext cx="2825496" cy="201168"/>
+            <a:ext cx="2825496" cy="256032"/>
           </a:xfrm>
           <a:prstGeom prst="rect">
             <a:avLst/>
@@ -5990,7 +6154,7 @@
               <a:buNone/>
             </a:pPr>
             <a:r>
-              <a:rPr lang="en-US" sz="950" b="1" dirty="0">
+              <a:rPr lang="en-US" sz="1300" b="1" dirty="0">
                 <a:solidFill>
                   <a:srgbClr val="0068B7"/>
                 </a:solidFill>
@@ -6000,20 +6164,20 @@
               </a:rPr>
               <a:t>Use this for</a:t>
             </a:r>
-            <a:endParaRPr lang="en-US" sz="950" dirty="0"/>
-          </a:p>
-        </p:txBody>
-      </p:sp>
-      <p:sp>
-        <p:nvSpPr>
-          <p:cNvPr id="16" name="Text 14"/>
-          <p:cNvSpPr/>
-          <p:nvPr/>
-        </p:nvSpPr>
-        <p:spPr>
-          <a:xfrm>
-            <a:off x="8074152" y="3959352"/>
-            <a:ext cx="2825496" cy="1170432"/>
+            <a:endParaRPr lang="en-US" sz="1300" dirty="0"/>
+          </a:p>
+        </p:txBody>
+      </p:sp>
+      <p:sp>
+        <p:nvSpPr>
+          <p:cNvPr id="17" name="Text 15"/>
+          <p:cNvSpPr/>
+          <p:nvPr/>
+        </p:nvSpPr>
+        <p:spPr>
+          <a:xfrm>
+            <a:off x="8074152" y="4023360"/>
+            <a:ext cx="2825496" cy="1097280"/>
           </a:xfrm>
           <a:prstGeom prst="rect">
             <a:avLst/>
@@ -6031,7 +6195,7 @@
               <a:buNone/>
             </a:pPr>
             <a:r>
-              <a:rPr lang="en-US" sz="1250" dirty="0">
+              <a:rPr lang="en-US" sz="1550" dirty="0">
                 <a:solidFill>
                   <a:srgbClr val="17364A"/>
                 </a:solidFill>
@@ -6041,7 +6205,7 @@
               </a:rPr>
               <a:t>Connect the concept to public health decisions, safeguards, documentation, or implementation work.</a:t>
             </a:r>
-            <a:endParaRPr lang="en-US" sz="1250" dirty="0"/>
+            <a:endParaRPr lang="en-US" sz="1550" dirty="0"/>
           </a:p>
         </p:txBody>
       </p:sp>
@@ -6238,7 +6402,7 @@
                 <a:ea typeface="Aptos" pitchFamily="34" charset="-122"/>
                 <a:cs typeface="Aptos" pitchFamily="34" charset="-120"/>
               </a:rPr>
-              <a:t>© Paula Soper</a:t>
+              <a:t>Â© Paula Soper</a:t>
             </a:r>
             <a:endParaRPr lang="en-US" sz="800" dirty="0"/>
           </a:p>
@@ -6252,8 +6416,47 @@
         </p:nvSpPr>
         <p:spPr>
           <a:xfrm>
+            <a:off x="11137392" y="6510528"/>
+            <a:ext cx="411480" cy="201168"/>
+          </a:xfrm>
+          <a:prstGeom prst="rect">
+            <a:avLst/>
+          </a:prstGeom>
+          <a:noFill/>
+          <a:ln/>
+        </p:spPr>
+        <p:txBody>
+          <a:bodyPr wrap="square" lIns="0" tIns="0" rIns="0" bIns="0" rtlCol="0" anchor="ctr"/>
+          <a:lstStyle/>
+          <a:p>
+            <a:pPr algn="r" indent="0" marL="0">
+              <a:buNone/>
+            </a:pPr>
+            <a:r>
+              <a:rPr lang="en-US" sz="900" dirty="0">
+                <a:solidFill>
+                  <a:srgbClr val="5F7181"/>
+                </a:solidFill>
+                <a:latin typeface="Aptos" pitchFamily="34" charset="0"/>
+                <a:ea typeface="Aptos" pitchFamily="34" charset="-122"/>
+                <a:cs typeface="Aptos" pitchFamily="34" charset="-120"/>
+              </a:rPr>
+              <a:t>15</a:t>
+            </a:r>
+            <a:endParaRPr lang="en-US" sz="900" dirty="0"/>
+          </a:p>
+        </p:txBody>
+      </p:sp>
+      <p:sp>
+        <p:nvSpPr>
+          <p:cNvPr id="8" name="Text 6"/>
+          <p:cNvSpPr/>
+          <p:nvPr/>
+        </p:nvSpPr>
+        <p:spPr>
+          <a:xfrm>
             <a:off x="640080" y="658368"/>
-            <a:ext cx="10881360" cy="566928"/>
+            <a:ext cx="10881360" cy="713232"/>
           </a:xfrm>
           <a:prstGeom prst="rect">
             <a:avLst/>
@@ -6271,7 +6474,7 @@
               <a:buNone/>
             </a:pPr>
             <a:r>
-              <a:rPr lang="en-US" sz="2700" b="1" dirty="0">
+              <a:rPr lang="en-US" sz="3400" b="1" dirty="0">
                 <a:solidFill>
                   <a:srgbClr val="003A63"/>
                 </a:solidFill>
@@ -6281,20 +6484,20 @@
               </a:rPr>
               <a:t>Risks, Failure Modes, and Guardrails Continued</a:t>
             </a:r>
-            <a:endParaRPr lang="en-US" sz="2700" dirty="0"/>
-          </a:p>
-        </p:txBody>
-      </p:sp>
-      <p:sp>
-        <p:nvSpPr>
-          <p:cNvPr id="8" name="Text 6"/>
-          <p:cNvSpPr/>
-          <p:nvPr/>
-        </p:nvSpPr>
-        <p:spPr>
-          <a:xfrm>
-            <a:off x="868680" y="1417320"/>
-            <a:ext cx="6675120" cy="4434840"/>
+            <a:endParaRPr lang="en-US" sz="3400" dirty="0"/>
+          </a:p>
+        </p:txBody>
+      </p:sp>
+      <p:sp>
+        <p:nvSpPr>
+          <p:cNvPr id="9" name="Text 7"/>
+          <p:cNvSpPr/>
+          <p:nvPr/>
+        </p:nvSpPr>
+        <p:spPr>
+          <a:xfrm>
+            <a:off x="868680" y="1508760"/>
+            <a:ext cx="6537960" cy="4160520"/>
           </a:xfrm>
           <a:prstGeom prst="rect">
             <a:avLst/>
@@ -6309,7 +6512,7 @@
           <a:lstStyle/>
           <a:p>
             <a:r>
-              <a:rPr lang="en-US" sz="1700" dirty="0">
+              <a:rPr lang="en-US" sz="2100" dirty="0">
                 <a:solidFill>
                   <a:srgbClr val="17364A"/>
                 </a:solidFill>
@@ -6319,11 +6522,11 @@
               </a:rPr>
               <a:t>Poor monitoring and equity harm.</a:t>
             </a:r>
-            <a:endParaRPr lang="en-US" sz="1700" dirty="0"/>
-          </a:p>
-          <a:p>
-            <a:r>
-              <a:rPr lang="en-US" sz="1700" dirty="0">
+            <a:endParaRPr lang="en-US" sz="2100" dirty="0"/>
+          </a:p>
+          <a:p>
+            <a:r>
+              <a:rPr lang="en-US" sz="2100" dirty="0">
                 <a:solidFill>
                   <a:srgbClr val="17364A"/>
                 </a:solidFill>
@@ -6331,13 +6534,13 @@
                 <a:ea typeface="Aptos" pitchFamily="34" charset="-122"/>
                 <a:cs typeface="Aptos" pitchFamily="34" charset="-120"/>
               </a:rPr>
-              <a:t>AI tools can degrade over time when data patterns, reporting sources, terminology, policies, or workflows change.</a:t>
-            </a:r>
-            <a:endParaRPr lang="en-US" sz="1700" dirty="0"/>
-          </a:p>
-          <a:p>
-            <a:r>
-              <a:rPr lang="en-US" sz="1700" dirty="0">
+              <a:t>AI tools can degrade over time when data patterns, reporting sources, terminology, policies, or.</a:t>
+            </a:r>
+            <a:endParaRPr lang="en-US" sz="2100" dirty="0"/>
+          </a:p>
+          <a:p>
+            <a:r>
+              <a:rPr lang="en-US" sz="2100" dirty="0">
                 <a:solidFill>
                   <a:srgbClr val="17364A"/>
                 </a:solidFill>
@@ -6345,29 +6548,15 @@
                 <a:ea typeface="Aptos" pitchFamily="34" charset="-122"/>
                 <a:cs typeface="Aptos" pitchFamily="34" charset="-120"/>
               </a:rPr>
-              <a:t>If the architecture relies on data sources that underrepresent some communities, the tool may also produce inequitable.</a:t>
-            </a:r>
-            <a:endParaRPr lang="en-US" sz="1700" dirty="0"/>
-          </a:p>
-          <a:p>
-            <a:r>
-              <a:rPr lang="en-US" sz="1700" dirty="0">
-                <a:solidFill>
-                  <a:srgbClr val="17364A"/>
-                </a:solidFill>
-                <a:latin typeface="Aptos" pitchFamily="34" charset="0"/>
-                <a:ea typeface="Aptos" pitchFamily="34" charset="-122"/>
-                <a:cs typeface="Aptos" pitchFamily="34" charset="-120"/>
-              </a:rPr>
-              <a:t>Practical guardrails include pre-deployment subgroup review, monitoring indicators, user override tracking, and clear.</a:t>
-            </a:r>
-            <a:endParaRPr lang="en-US" sz="1700" dirty="0"/>
-          </a:p>
-        </p:txBody>
-      </p:sp>
-      <p:sp>
-        <p:nvSpPr>
-          <p:cNvPr id="9" name="Shape 7"/>
+              <a:t>If the architecture relies on data sources that underrepresent some communities, the tool may also.</a:t>
+            </a:r>
+            <a:endParaRPr lang="en-US" sz="2100" dirty="0"/>
+          </a:p>
+        </p:txBody>
+      </p:sp>
+      <p:sp>
+        <p:nvSpPr>
+          <p:cNvPr id="10" name="Shape 8"/>
           <p:cNvSpPr/>
           <p:nvPr/>
         </p:nvSpPr>
@@ -6394,14 +6583,14 @@
       </p:sp>
       <p:sp>
         <p:nvSpPr>
-          <p:cNvPr id="10" name="Text 8"/>
+          <p:cNvPr id="11" name="Text 9"/>
           <p:cNvSpPr/>
           <p:nvPr/>
         </p:nvSpPr>
         <p:spPr>
           <a:xfrm>
             <a:off x="8074152" y="1563624"/>
-            <a:ext cx="2825496" cy="201168"/>
+            <a:ext cx="2825496" cy="256032"/>
           </a:xfrm>
           <a:prstGeom prst="rect">
             <a:avLst/>
@@ -6417,7 +6606,7 @@
               <a:buNone/>
             </a:pPr>
             <a:r>
-              <a:rPr lang="en-US" sz="950" b="1" dirty="0">
+              <a:rPr lang="en-US" sz="1300" b="1" dirty="0">
                 <a:solidFill>
                   <a:srgbClr val="0068B7"/>
                 </a:solidFill>
@@ -6427,20 +6616,20 @@
               </a:rPr>
               <a:t>Key idea</a:t>
             </a:r>
-            <a:endParaRPr lang="en-US" sz="950" dirty="0"/>
-          </a:p>
-        </p:txBody>
-      </p:sp>
-      <p:sp>
-        <p:nvSpPr>
-          <p:cNvPr id="11" name="Text 9"/>
-          <p:cNvSpPr/>
-          <p:nvPr/>
-        </p:nvSpPr>
-        <p:spPr>
-          <a:xfrm>
-            <a:off x="8074152" y="1856232"/>
-            <a:ext cx="2825496" cy="1261872"/>
+            <a:endParaRPr lang="en-US" sz="1300" dirty="0"/>
+          </a:p>
+        </p:txBody>
+      </p:sp>
+      <p:sp>
+        <p:nvSpPr>
+          <p:cNvPr id="12" name="Text 10"/>
+          <p:cNvSpPr/>
+          <p:nvPr/>
+        </p:nvSpPr>
+        <p:spPr>
+          <a:xfrm>
+            <a:off x="8074152" y="1920240"/>
+            <a:ext cx="2825496" cy="1188720"/>
           </a:xfrm>
           <a:prstGeom prst="rect">
             <a:avLst/>
@@ -6458,7 +6647,7 @@
               <a:buNone/>
             </a:pPr>
             <a:r>
-              <a:rPr lang="en-US" sz="1250" dirty="0">
+              <a:rPr lang="en-US" sz="1550" dirty="0">
                 <a:solidFill>
                   <a:srgbClr val="17364A"/>
                 </a:solidFill>
@@ -6468,13 +6657,13 @@
               </a:rPr>
               <a:t>Poor monitoring and equity harm.</a:t>
             </a:r>
-            <a:endParaRPr lang="en-US" sz="1250" dirty="0"/>
-          </a:p>
-        </p:txBody>
-      </p:sp>
-      <p:sp>
-        <p:nvSpPr>
-          <p:cNvPr id="12" name="Shape 10"/>
+            <a:endParaRPr lang="en-US" sz="1550" dirty="0"/>
+          </a:p>
+        </p:txBody>
+      </p:sp>
+      <p:sp>
+        <p:nvSpPr>
+          <p:cNvPr id="13" name="Shape 11"/>
           <p:cNvSpPr/>
           <p:nvPr/>
         </p:nvSpPr>
@@ -6501,14 +6690,14 @@
       </p:sp>
       <p:sp>
         <p:nvSpPr>
-          <p:cNvPr id="13" name="Text 11"/>
+          <p:cNvPr id="14" name="Text 12"/>
           <p:cNvSpPr/>
           <p:nvPr/>
         </p:nvSpPr>
         <p:spPr>
           <a:xfrm>
             <a:off x="8074152" y="3666744"/>
-            <a:ext cx="2825496" cy="201168"/>
+            <a:ext cx="2825496" cy="256032"/>
           </a:xfrm>
           <a:prstGeom prst="rect">
             <a:avLst/>
@@ -6524,7 +6713,7 @@
               <a:buNone/>
             </a:pPr>
             <a:r>
-              <a:rPr lang="en-US" sz="950" b="1" dirty="0">
+              <a:rPr lang="en-US" sz="1300" b="1" dirty="0">
                 <a:solidFill>
                   <a:srgbClr val="0068B7"/>
                 </a:solidFill>
@@ -6534,20 +6723,20 @@
               </a:rPr>
               <a:t>Use this for</a:t>
             </a:r>
-            <a:endParaRPr lang="en-US" sz="950" dirty="0"/>
-          </a:p>
-        </p:txBody>
-      </p:sp>
-      <p:sp>
-        <p:nvSpPr>
-          <p:cNvPr id="14" name="Text 12"/>
-          <p:cNvSpPr/>
-          <p:nvPr/>
-        </p:nvSpPr>
-        <p:spPr>
-          <a:xfrm>
-            <a:off x="8074152" y="3959352"/>
-            <a:ext cx="2825496" cy="1170432"/>
+            <a:endParaRPr lang="en-US" sz="1300" dirty="0"/>
+          </a:p>
+        </p:txBody>
+      </p:sp>
+      <p:sp>
+        <p:nvSpPr>
+          <p:cNvPr id="15" name="Text 13"/>
+          <p:cNvSpPr/>
+          <p:nvPr/>
+        </p:nvSpPr>
+        <p:spPr>
+          <a:xfrm>
+            <a:off x="8074152" y="4023360"/>
+            <a:ext cx="2825496" cy="1097280"/>
           </a:xfrm>
           <a:prstGeom prst="rect">
             <a:avLst/>
@@ -6565,7 +6754,7 @@
               <a:buNone/>
             </a:pPr>
             <a:r>
-              <a:rPr lang="en-US" sz="1250" dirty="0">
+              <a:rPr lang="en-US" sz="1550" dirty="0">
                 <a:solidFill>
                   <a:srgbClr val="17364A"/>
                 </a:solidFill>
@@ -6575,7 +6764,7 @@
               </a:rPr>
               <a:t>Connect the concept to public health decisions, safeguards, documentation, or implementation work.</a:t>
             </a:r>
-            <a:endParaRPr lang="en-US" sz="1250" dirty="0"/>
+            <a:endParaRPr lang="en-US" sz="1550" dirty="0"/>
           </a:p>
         </p:txBody>
       </p:sp>
@@ -6772,7 +6961,7 @@
                 <a:ea typeface="Aptos" pitchFamily="34" charset="-122"/>
                 <a:cs typeface="Aptos" pitchFamily="34" charset="-120"/>
               </a:rPr>
-              <a:t>© Paula Soper</a:t>
+              <a:t>Â© Paula Soper</a:t>
             </a:r>
             <a:endParaRPr lang="en-US" sz="800" dirty="0"/>
           </a:p>
@@ -6780,7 +6969,46 @@
       </p:sp>
       <p:sp>
         <p:nvSpPr>
-          <p:cNvPr id="7" name="Shape 5"/>
+          <p:cNvPr id="7" name="Text 5"/>
+          <p:cNvSpPr/>
+          <p:nvPr/>
+        </p:nvSpPr>
+        <p:spPr>
+          <a:xfrm>
+            <a:off x="11137392" y="6510528"/>
+            <a:ext cx="411480" cy="201168"/>
+          </a:xfrm>
+          <a:prstGeom prst="rect">
+            <a:avLst/>
+          </a:prstGeom>
+          <a:noFill/>
+          <a:ln/>
+        </p:spPr>
+        <p:txBody>
+          <a:bodyPr wrap="square" lIns="0" tIns="0" rIns="0" bIns="0" rtlCol="0" anchor="ctr"/>
+          <a:lstStyle/>
+          <a:p>
+            <a:pPr algn="r" indent="0" marL="0">
+              <a:buNone/>
+            </a:pPr>
+            <a:r>
+              <a:rPr lang="en-US" sz="900" dirty="0">
+                <a:solidFill>
+                  <a:srgbClr val="5F7181"/>
+                </a:solidFill>
+                <a:latin typeface="Aptos" pitchFamily="34" charset="0"/>
+                <a:ea typeface="Aptos" pitchFamily="34" charset="-122"/>
+                <a:cs typeface="Aptos" pitchFamily="34" charset="-120"/>
+              </a:rPr>
+              <a:t>16</a:t>
+            </a:r>
+            <a:endParaRPr lang="en-US" sz="900" dirty="0"/>
+          </a:p>
+        </p:txBody>
+      </p:sp>
+      <p:sp>
+        <p:nvSpPr>
+          <p:cNvPr id="8" name="Shape 6"/>
           <p:cNvSpPr/>
           <p:nvPr/>
         </p:nvSpPr>
@@ -6805,7 +7033,7 @@
       </p:sp>
       <p:sp>
         <p:nvSpPr>
-          <p:cNvPr id="8" name="Text 6"/>
+          <p:cNvPr id="9" name="Text 7"/>
           <p:cNvSpPr/>
           <p:nvPr/>
         </p:nvSpPr>
@@ -6844,14 +7072,14 @@
       </p:sp>
       <p:sp>
         <p:nvSpPr>
-          <p:cNvPr id="9" name="Text 7"/>
+          <p:cNvPr id="10" name="Text 8"/>
           <p:cNvSpPr/>
           <p:nvPr/>
         </p:nvSpPr>
         <p:spPr>
           <a:xfrm>
             <a:off x="640080" y="621792"/>
-            <a:ext cx="10881360" cy="566928"/>
+            <a:ext cx="10881360" cy="713232"/>
           </a:xfrm>
           <a:prstGeom prst="rect">
             <a:avLst/>
@@ -6869,7 +7097,7 @@
               <a:buNone/>
             </a:pPr>
             <a:r>
-              <a:rPr lang="en-US" sz="2700" b="1" dirty="0">
+              <a:rPr lang="en-US" sz="3400" b="1" dirty="0">
                 <a:solidFill>
                   <a:srgbClr val="003A63"/>
                 </a:solidFill>
@@ -6879,20 +7107,20 @@
               </a:rPr>
               <a:t>Application to AI-Supported Workflows</a:t>
             </a:r>
-            <a:endParaRPr lang="en-US" sz="2700" dirty="0"/>
-          </a:p>
-        </p:txBody>
-      </p:sp>
-      <p:sp>
-        <p:nvSpPr>
-          <p:cNvPr id="10" name="Text 8"/>
-          <p:cNvSpPr/>
-          <p:nvPr/>
-        </p:nvSpPr>
-        <p:spPr>
-          <a:xfrm>
-            <a:off x="868680" y="1417320"/>
-            <a:ext cx="6675120" cy="4434840"/>
+            <a:endParaRPr lang="en-US" sz="3400" dirty="0"/>
+          </a:p>
+        </p:txBody>
+      </p:sp>
+      <p:sp>
+        <p:nvSpPr>
+          <p:cNvPr id="11" name="Text 9"/>
+          <p:cNvSpPr/>
+          <p:nvPr/>
+        </p:nvSpPr>
+        <p:spPr>
+          <a:xfrm>
+            <a:off x="868680" y="1508760"/>
+            <a:ext cx="6537960" cy="4160520"/>
           </a:xfrm>
           <a:prstGeom prst="rect">
             <a:avLst/>
@@ -6907,7 +7135,7 @@
           <a:lstStyle/>
           <a:p>
             <a:r>
-              <a:rPr lang="en-US" sz="1700" dirty="0">
+              <a:rPr lang="en-US" sz="2100" dirty="0">
                 <a:solidFill>
                   <a:srgbClr val="17364A"/>
                 </a:solidFill>
@@ -6915,13 +7143,13 @@
                 <a:ea typeface="Aptos" pitchFamily="34" charset="-122"/>
                 <a:cs typeface="Aptos" pitchFamily="34" charset="-120"/>
               </a:rPr>
-              <a:t>For generative AI, architecture determines what source material the tool can access, whether it can cite sources, whether.</a:t>
-            </a:r>
-            <a:endParaRPr lang="en-US" sz="1700" dirty="0"/>
-          </a:p>
-          <a:p>
-            <a:r>
-              <a:rPr lang="en-US" sz="1700" dirty="0">
+              <a:t>For generative AI, architecture determines what source material the tool can access, whether it can.</a:t>
+            </a:r>
+            <a:endParaRPr lang="en-US" sz="2100" dirty="0"/>
+          </a:p>
+          <a:p>
+            <a:r>
+              <a:rPr lang="en-US" sz="2100" dirty="0">
                 <a:solidFill>
                   <a:srgbClr val="17364A"/>
                 </a:solidFill>
@@ -6929,13 +7157,13 @@
                 <a:ea typeface="Aptos" pitchFamily="34" charset="-122"/>
                 <a:cs typeface="Aptos" pitchFamily="34" charset="-120"/>
               </a:rPr>
-              <a:t>A generative AI tool used to summarize policy documents has different architectural requirements than one used to summarize.</a:t>
-            </a:r>
-            <a:endParaRPr lang="en-US" sz="1700" dirty="0"/>
-          </a:p>
-          <a:p>
-            <a:r>
-              <a:rPr lang="en-US" sz="1700" dirty="0">
+              <a:t>A generative AI tool used to summarize policy documents has different architectural requirements than.</a:t>
+            </a:r>
+            <a:endParaRPr lang="en-US" sz="2100" dirty="0"/>
+          </a:p>
+          <a:p>
+            <a:r>
+              <a:rPr lang="en-US" sz="2100" dirty="0">
                 <a:solidFill>
                   <a:srgbClr val="17364A"/>
                 </a:solidFill>
@@ -6945,27 +7173,13 @@
               </a:rPr>
               <a:t>The more sensitive or operational the use case, the stronger the controls should be.</a:t>
             </a:r>
-            <a:endParaRPr lang="en-US" sz="1700" dirty="0"/>
-          </a:p>
-          <a:p>
-            <a:r>
-              <a:rPr lang="en-US" sz="1700" dirty="0">
-                <a:solidFill>
-                  <a:srgbClr val="17364A"/>
-                </a:solidFill>
-                <a:latin typeface="Aptos" pitchFamily="34" charset="0"/>
-                <a:ea typeface="Aptos" pitchFamily="34" charset="-122"/>
-                <a:cs typeface="Aptos" pitchFamily="34" charset="-120"/>
-              </a:rPr>
-              <a:t>For predictive analytics, architecture determines whether the model receives timely and consistent data, whether the.</a:t>
-            </a:r>
-            <a:endParaRPr lang="en-US" sz="1700" dirty="0"/>
-          </a:p>
-        </p:txBody>
-      </p:sp>
-      <p:sp>
-        <p:nvSpPr>
-          <p:cNvPr id="11" name="Shape 9"/>
+            <a:endParaRPr lang="en-US" sz="2100" dirty="0"/>
+          </a:p>
+        </p:txBody>
+      </p:sp>
+      <p:sp>
+        <p:nvSpPr>
+          <p:cNvPr id="12" name="Shape 10"/>
           <p:cNvSpPr/>
           <p:nvPr/>
         </p:nvSpPr>
@@ -6992,14 +7206,14 @@
       </p:sp>
       <p:sp>
         <p:nvSpPr>
-          <p:cNvPr id="12" name="Text 10"/>
+          <p:cNvPr id="13" name="Text 11"/>
           <p:cNvSpPr/>
           <p:nvPr/>
         </p:nvSpPr>
         <p:spPr>
           <a:xfrm>
             <a:off x="8074152" y="1563624"/>
-            <a:ext cx="2825496" cy="201168"/>
+            <a:ext cx="2825496" cy="256032"/>
           </a:xfrm>
           <a:prstGeom prst="rect">
             <a:avLst/>
@@ -7015,7 +7229,7 @@
               <a:buNone/>
             </a:pPr>
             <a:r>
-              <a:rPr lang="en-US" sz="950" b="1" dirty="0">
+              <a:rPr lang="en-US" sz="1300" b="1" dirty="0">
                 <a:solidFill>
                   <a:srgbClr val="0068B7"/>
                 </a:solidFill>
@@ -7025,20 +7239,20 @@
               </a:rPr>
               <a:t>Key idea</a:t>
             </a:r>
-            <a:endParaRPr lang="en-US" sz="950" dirty="0"/>
-          </a:p>
-        </p:txBody>
-      </p:sp>
-      <p:sp>
-        <p:nvSpPr>
-          <p:cNvPr id="13" name="Text 11"/>
-          <p:cNvSpPr/>
-          <p:nvPr/>
-        </p:nvSpPr>
-        <p:spPr>
-          <a:xfrm>
-            <a:off x="8074152" y="1856232"/>
-            <a:ext cx="2825496" cy="1261872"/>
+            <a:endParaRPr lang="en-US" sz="1300" dirty="0"/>
+          </a:p>
+        </p:txBody>
+      </p:sp>
+      <p:sp>
+        <p:nvSpPr>
+          <p:cNvPr id="14" name="Text 12"/>
+          <p:cNvSpPr/>
+          <p:nvPr/>
+        </p:nvSpPr>
+        <p:spPr>
+          <a:xfrm>
+            <a:off x="8074152" y="1920240"/>
+            <a:ext cx="2825496" cy="1188720"/>
           </a:xfrm>
           <a:prstGeom prst="rect">
             <a:avLst/>
@@ -7056,7 +7270,7 @@
               <a:buNone/>
             </a:pPr>
             <a:r>
-              <a:rPr lang="en-US" sz="1250" dirty="0">
+              <a:rPr lang="en-US" sz="1550" dirty="0">
                 <a:solidFill>
                   <a:srgbClr val="17364A"/>
                 </a:solidFill>
@@ -7064,15 +7278,15 @@
                 <a:ea typeface="Aptos" pitchFamily="34" charset="-122"/>
                 <a:cs typeface="Aptos" pitchFamily="34" charset="-120"/>
               </a:rPr>
-              <a:t>For generative AI, architecture determines what source material the tool can access, whether it can cite sources, whether.</a:t>
-            </a:r>
-            <a:endParaRPr lang="en-US" sz="1250" dirty="0"/>
-          </a:p>
-        </p:txBody>
-      </p:sp>
-      <p:sp>
-        <p:nvSpPr>
-          <p:cNvPr id="14" name="Shape 12"/>
+              <a:t>For generative AI, architecture determines what source material the tool can access, whether it can.</a:t>
+            </a:r>
+            <a:endParaRPr lang="en-US" sz="1550" dirty="0"/>
+          </a:p>
+        </p:txBody>
+      </p:sp>
+      <p:sp>
+        <p:nvSpPr>
+          <p:cNvPr id="15" name="Shape 13"/>
           <p:cNvSpPr/>
           <p:nvPr/>
         </p:nvSpPr>
@@ -7099,14 +7313,14 @@
       </p:sp>
       <p:sp>
         <p:nvSpPr>
-          <p:cNvPr id="15" name="Text 13"/>
+          <p:cNvPr id="16" name="Text 14"/>
           <p:cNvSpPr/>
           <p:nvPr/>
         </p:nvSpPr>
         <p:spPr>
           <a:xfrm>
             <a:off x="8074152" y="3666744"/>
-            <a:ext cx="2825496" cy="201168"/>
+            <a:ext cx="2825496" cy="256032"/>
           </a:xfrm>
           <a:prstGeom prst="rect">
             <a:avLst/>
@@ -7122,7 +7336,7 @@
               <a:buNone/>
             </a:pPr>
             <a:r>
-              <a:rPr lang="en-US" sz="950" b="1" dirty="0">
+              <a:rPr lang="en-US" sz="1300" b="1" dirty="0">
                 <a:solidFill>
                   <a:srgbClr val="0068B7"/>
                 </a:solidFill>
@@ -7132,20 +7346,20 @@
               </a:rPr>
               <a:t>Use this for</a:t>
             </a:r>
-            <a:endParaRPr lang="en-US" sz="950" dirty="0"/>
-          </a:p>
-        </p:txBody>
-      </p:sp>
-      <p:sp>
-        <p:nvSpPr>
-          <p:cNvPr id="16" name="Text 14"/>
-          <p:cNvSpPr/>
-          <p:nvPr/>
-        </p:nvSpPr>
-        <p:spPr>
-          <a:xfrm>
-            <a:off x="8074152" y="3959352"/>
-            <a:ext cx="2825496" cy="1170432"/>
+            <a:endParaRPr lang="en-US" sz="1300" dirty="0"/>
+          </a:p>
+        </p:txBody>
+      </p:sp>
+      <p:sp>
+        <p:nvSpPr>
+          <p:cNvPr id="17" name="Text 15"/>
+          <p:cNvSpPr/>
+          <p:nvPr/>
+        </p:nvSpPr>
+        <p:spPr>
+          <a:xfrm>
+            <a:off x="8074152" y="4023360"/>
+            <a:ext cx="2825496" cy="1097280"/>
           </a:xfrm>
           <a:prstGeom prst="rect">
             <a:avLst/>
@@ -7163,7 +7377,7 @@
               <a:buNone/>
             </a:pPr>
             <a:r>
-              <a:rPr lang="en-US" sz="1250" dirty="0">
+              <a:rPr lang="en-US" sz="1550" dirty="0">
                 <a:solidFill>
                   <a:srgbClr val="17364A"/>
                 </a:solidFill>
@@ -7173,7 +7387,7 @@
               </a:rPr>
               <a:t>Connect the concept to public health decisions, safeguards, documentation, or implementation work.</a:t>
             </a:r>
-            <a:endParaRPr lang="en-US" sz="1250" dirty="0"/>
+            <a:endParaRPr lang="en-US" sz="1550" dirty="0"/>
           </a:p>
         </p:txBody>
       </p:sp>
@@ -7370,7 +7584,7 @@
                 <a:ea typeface="Aptos" pitchFamily="34" charset="-122"/>
                 <a:cs typeface="Aptos" pitchFamily="34" charset="-120"/>
               </a:rPr>
-              <a:t>© Paula Soper</a:t>
+              <a:t>Â© Paula Soper</a:t>
             </a:r>
             <a:endParaRPr lang="en-US" sz="800" dirty="0"/>
           </a:p>
@@ -7378,7 +7592,46 @@
       </p:sp>
       <p:sp>
         <p:nvSpPr>
-          <p:cNvPr id="7" name="Shape 5"/>
+          <p:cNvPr id="7" name="Text 5"/>
+          <p:cNvSpPr/>
+          <p:nvPr/>
+        </p:nvSpPr>
+        <p:spPr>
+          <a:xfrm>
+            <a:off x="11137392" y="6510528"/>
+            <a:ext cx="411480" cy="201168"/>
+          </a:xfrm>
+          <a:prstGeom prst="rect">
+            <a:avLst/>
+          </a:prstGeom>
+          <a:noFill/>
+          <a:ln/>
+        </p:spPr>
+        <p:txBody>
+          <a:bodyPr wrap="square" lIns="0" tIns="0" rIns="0" bIns="0" rtlCol="0" anchor="ctr"/>
+          <a:lstStyle/>
+          <a:p>
+            <a:pPr algn="r" indent="0" marL="0">
+              <a:buNone/>
+            </a:pPr>
+            <a:r>
+              <a:rPr lang="en-US" sz="900" dirty="0">
+                <a:solidFill>
+                  <a:srgbClr val="5F7181"/>
+                </a:solidFill>
+                <a:latin typeface="Aptos" pitchFamily="34" charset="0"/>
+                <a:ea typeface="Aptos" pitchFamily="34" charset="-122"/>
+                <a:cs typeface="Aptos" pitchFamily="34" charset="-120"/>
+              </a:rPr>
+              <a:t>17</a:t>
+            </a:r>
+            <a:endParaRPr lang="en-US" sz="900" dirty="0"/>
+          </a:p>
+        </p:txBody>
+      </p:sp>
+      <p:sp>
+        <p:nvSpPr>
+          <p:cNvPr id="8" name="Shape 6"/>
           <p:cNvSpPr/>
           <p:nvPr/>
         </p:nvSpPr>
@@ -7403,7 +7656,7 @@
       </p:sp>
       <p:sp>
         <p:nvSpPr>
-          <p:cNvPr id="8" name="Text 6"/>
+          <p:cNvPr id="9" name="Text 7"/>
           <p:cNvSpPr/>
           <p:nvPr/>
         </p:nvSpPr>
@@ -7442,14 +7695,14 @@
       </p:sp>
       <p:sp>
         <p:nvSpPr>
-          <p:cNvPr id="9" name="Text 7"/>
+          <p:cNvPr id="10" name="Text 8"/>
           <p:cNvSpPr/>
           <p:nvPr/>
         </p:nvSpPr>
         <p:spPr>
           <a:xfrm>
             <a:off x="640080" y="621792"/>
-            <a:ext cx="10881360" cy="566928"/>
+            <a:ext cx="10881360" cy="713232"/>
           </a:xfrm>
           <a:prstGeom prst="rect">
             <a:avLst/>
@@ -7467,7 +7720,7 @@
               <a:buNone/>
             </a:pPr>
             <a:r>
-              <a:rPr lang="en-US" sz="2700" b="1" dirty="0">
+              <a:rPr lang="en-US" sz="3400" b="1" dirty="0">
                 <a:solidFill>
                   <a:srgbClr val="003A63"/>
                 </a:solidFill>
@@ -7477,20 +7730,20 @@
               </a:rPr>
               <a:t>Reflection Questions</a:t>
             </a:r>
-            <a:endParaRPr lang="en-US" sz="2700" dirty="0"/>
-          </a:p>
-        </p:txBody>
-      </p:sp>
-      <p:sp>
-        <p:nvSpPr>
-          <p:cNvPr id="10" name="Text 8"/>
-          <p:cNvSpPr/>
-          <p:nvPr/>
-        </p:nvSpPr>
-        <p:spPr>
-          <a:xfrm>
-            <a:off x="868680" y="1417320"/>
-            <a:ext cx="6675120" cy="4434840"/>
+            <a:endParaRPr lang="en-US" sz="3400" dirty="0"/>
+          </a:p>
+        </p:txBody>
+      </p:sp>
+      <p:sp>
+        <p:nvSpPr>
+          <p:cNvPr id="11" name="Text 9"/>
+          <p:cNvSpPr/>
+          <p:nvPr/>
+        </p:nvSpPr>
+        <p:spPr>
+          <a:xfrm>
+            <a:off x="868680" y="1508760"/>
+            <a:ext cx="6537960" cy="4160520"/>
           </a:xfrm>
           <a:prstGeom prst="rect">
             <a:avLst/>
@@ -7505,7 +7758,7 @@
           <a:lstStyle/>
           <a:p>
             <a:r>
-              <a:rPr lang="en-US" sz="1700" dirty="0">
+              <a:rPr lang="en-US" sz="2100" dirty="0">
                 <a:solidFill>
                   <a:srgbClr val="17364A"/>
                 </a:solidFill>
@@ -7515,11 +7768,11 @@
               </a:rPr>
               <a:t>Which public health workflow in your agency would be most helpful to map before considering AI?</a:t>
             </a:r>
-            <a:endParaRPr lang="en-US" sz="1700" dirty="0"/>
-          </a:p>
-          <a:p>
-            <a:r>
-              <a:rPr lang="en-US" sz="1700" dirty="0">
+            <a:endParaRPr lang="en-US" sz="2100" dirty="0"/>
+          </a:p>
+          <a:p>
+            <a:r>
+              <a:rPr lang="en-US" sz="2100" dirty="0">
                 <a:solidFill>
                   <a:srgbClr val="17364A"/>
                 </a:solidFill>
@@ -7529,11 +7782,11 @@
               </a:rPr>
               <a:t>What are the source systems, systems of record, and downstream outputs for that workflow?</a:t>
             </a:r>
-            <a:endParaRPr lang="en-US" sz="1700" dirty="0"/>
-          </a:p>
-          <a:p>
-            <a:r>
-              <a:rPr lang="en-US" sz="1700" dirty="0">
+            <a:endParaRPr lang="en-US" sz="2100" dirty="0"/>
+          </a:p>
+          <a:p>
+            <a:r>
+              <a:rPr lang="en-US" sz="2100" dirty="0">
                 <a:solidFill>
                   <a:srgbClr val="17364A"/>
                 </a:solidFill>
@@ -7543,13 +7796,13 @@
               </a:rPr>
               <a:t>Where are data transformed, linked, summarized, interpreted, or manually corrected?</a:t>
             </a:r>
-            <a:endParaRPr lang="en-US" sz="1700" dirty="0"/>
-          </a:p>
-        </p:txBody>
-      </p:sp>
-      <p:sp>
-        <p:nvSpPr>
-          <p:cNvPr id="11" name="Shape 9"/>
+            <a:endParaRPr lang="en-US" sz="2100" dirty="0"/>
+          </a:p>
+        </p:txBody>
+      </p:sp>
+      <p:sp>
+        <p:nvSpPr>
+          <p:cNvPr id="12" name="Shape 10"/>
           <p:cNvSpPr/>
           <p:nvPr/>
         </p:nvSpPr>
@@ -7576,14 +7829,14 @@
       </p:sp>
       <p:sp>
         <p:nvSpPr>
-          <p:cNvPr id="12" name="Text 10"/>
+          <p:cNvPr id="13" name="Text 11"/>
           <p:cNvSpPr/>
           <p:nvPr/>
         </p:nvSpPr>
         <p:spPr>
           <a:xfrm>
             <a:off x="8074152" y="1563624"/>
-            <a:ext cx="2825496" cy="201168"/>
+            <a:ext cx="2825496" cy="256032"/>
           </a:xfrm>
           <a:prstGeom prst="rect">
             <a:avLst/>
@@ -7599,7 +7852,7 @@
               <a:buNone/>
             </a:pPr>
             <a:r>
-              <a:rPr lang="en-US" sz="950" b="1" dirty="0">
+              <a:rPr lang="en-US" sz="1300" b="1" dirty="0">
                 <a:solidFill>
                   <a:srgbClr val="0068B7"/>
                 </a:solidFill>
@@ -7609,20 +7862,20 @@
               </a:rPr>
               <a:t>Key idea</a:t>
             </a:r>
-            <a:endParaRPr lang="en-US" sz="950" dirty="0"/>
-          </a:p>
-        </p:txBody>
-      </p:sp>
-      <p:sp>
-        <p:nvSpPr>
-          <p:cNvPr id="13" name="Text 11"/>
-          <p:cNvSpPr/>
-          <p:nvPr/>
-        </p:nvSpPr>
-        <p:spPr>
-          <a:xfrm>
-            <a:off x="8074152" y="1856232"/>
-            <a:ext cx="2825496" cy="1261872"/>
+            <a:endParaRPr lang="en-US" sz="1300" dirty="0"/>
+          </a:p>
+        </p:txBody>
+      </p:sp>
+      <p:sp>
+        <p:nvSpPr>
+          <p:cNvPr id="14" name="Text 12"/>
+          <p:cNvSpPr/>
+          <p:nvPr/>
+        </p:nvSpPr>
+        <p:spPr>
+          <a:xfrm>
+            <a:off x="8074152" y="1920240"/>
+            <a:ext cx="2825496" cy="1188720"/>
           </a:xfrm>
           <a:prstGeom prst="rect">
             <a:avLst/>
@@ -7640,7 +7893,7 @@
               <a:buNone/>
             </a:pPr>
             <a:r>
-              <a:rPr lang="en-US" sz="1250" dirty="0">
+              <a:rPr lang="en-US" sz="1550" dirty="0">
                 <a:solidFill>
                   <a:srgbClr val="17364A"/>
                 </a:solidFill>
@@ -7650,13 +7903,13 @@
               </a:rPr>
               <a:t>Which public health workflow in your agency would be most helpful to map before considering AI?</a:t>
             </a:r>
-            <a:endParaRPr lang="en-US" sz="1250" dirty="0"/>
-          </a:p>
-        </p:txBody>
-      </p:sp>
-      <p:sp>
-        <p:nvSpPr>
-          <p:cNvPr id="14" name="Shape 12"/>
+            <a:endParaRPr lang="en-US" sz="1550" dirty="0"/>
+          </a:p>
+        </p:txBody>
+      </p:sp>
+      <p:sp>
+        <p:nvSpPr>
+          <p:cNvPr id="15" name="Shape 13"/>
           <p:cNvSpPr/>
           <p:nvPr/>
         </p:nvSpPr>
@@ -7683,14 +7936,14 @@
       </p:sp>
       <p:sp>
         <p:nvSpPr>
-          <p:cNvPr id="15" name="Text 13"/>
+          <p:cNvPr id="16" name="Text 14"/>
           <p:cNvSpPr/>
           <p:nvPr/>
         </p:nvSpPr>
         <p:spPr>
           <a:xfrm>
             <a:off x="8074152" y="3666744"/>
-            <a:ext cx="2825496" cy="201168"/>
+            <a:ext cx="2825496" cy="256032"/>
           </a:xfrm>
           <a:prstGeom prst="rect">
             <a:avLst/>
@@ -7706,7 +7959,7 @@
               <a:buNone/>
             </a:pPr>
             <a:r>
-              <a:rPr lang="en-US" sz="950" b="1" dirty="0">
+              <a:rPr lang="en-US" sz="1300" b="1" dirty="0">
                 <a:solidFill>
                   <a:srgbClr val="0068B7"/>
                 </a:solidFill>
@@ -7716,20 +7969,20 @@
               </a:rPr>
               <a:t>Use this for</a:t>
             </a:r>
-            <a:endParaRPr lang="en-US" sz="950" dirty="0"/>
-          </a:p>
-        </p:txBody>
-      </p:sp>
-      <p:sp>
-        <p:nvSpPr>
-          <p:cNvPr id="16" name="Text 14"/>
-          <p:cNvSpPr/>
-          <p:nvPr/>
-        </p:nvSpPr>
-        <p:spPr>
-          <a:xfrm>
-            <a:off x="8074152" y="3959352"/>
-            <a:ext cx="2825496" cy="1170432"/>
+            <a:endParaRPr lang="en-US" sz="1300" dirty="0"/>
+          </a:p>
+        </p:txBody>
+      </p:sp>
+      <p:sp>
+        <p:nvSpPr>
+          <p:cNvPr id="17" name="Text 15"/>
+          <p:cNvSpPr/>
+          <p:nvPr/>
+        </p:nvSpPr>
+        <p:spPr>
+          <a:xfrm>
+            <a:off x="8074152" y="4023360"/>
+            <a:ext cx="2825496" cy="1097280"/>
           </a:xfrm>
           <a:prstGeom prst="rect">
             <a:avLst/>
@@ -7747,7 +8000,7 @@
               <a:buNone/>
             </a:pPr>
             <a:r>
-              <a:rPr lang="en-US" sz="1250" dirty="0">
+              <a:rPr lang="en-US" sz="1550" dirty="0">
                 <a:solidFill>
                   <a:srgbClr val="17364A"/>
                 </a:solidFill>
@@ -7757,7 +8010,7 @@
               </a:rPr>
               <a:t>Connect the concept to public health decisions, safeguards, documentation, or implementation work.</a:t>
             </a:r>
-            <a:endParaRPr lang="en-US" sz="1250" dirty="0"/>
+            <a:endParaRPr lang="en-US" sz="1550" dirty="0"/>
           </a:p>
         </p:txBody>
       </p:sp>
@@ -7954,7 +8207,7 @@
                 <a:ea typeface="Aptos" pitchFamily="34" charset="-122"/>
                 <a:cs typeface="Aptos" pitchFamily="34" charset="-120"/>
               </a:rPr>
-              <a:t>© Paula Soper</a:t>
+              <a:t>Â© Paula Soper</a:t>
             </a:r>
             <a:endParaRPr lang="en-US" sz="800" dirty="0"/>
           </a:p>
@@ -7968,8 +8221,47 @@
         </p:nvSpPr>
         <p:spPr>
           <a:xfrm>
+            <a:off x="11137392" y="6510528"/>
+            <a:ext cx="411480" cy="201168"/>
+          </a:xfrm>
+          <a:prstGeom prst="rect">
+            <a:avLst/>
+          </a:prstGeom>
+          <a:noFill/>
+          <a:ln/>
+        </p:spPr>
+        <p:txBody>
+          <a:bodyPr wrap="square" lIns="0" tIns="0" rIns="0" bIns="0" rtlCol="0" anchor="ctr"/>
+          <a:lstStyle/>
+          <a:p>
+            <a:pPr algn="r" indent="0" marL="0">
+              <a:buNone/>
+            </a:pPr>
+            <a:r>
+              <a:rPr lang="en-US" sz="900" dirty="0">
+                <a:solidFill>
+                  <a:srgbClr val="5F7181"/>
+                </a:solidFill>
+                <a:latin typeface="Aptos" pitchFamily="34" charset="0"/>
+                <a:ea typeface="Aptos" pitchFamily="34" charset="-122"/>
+                <a:cs typeface="Aptos" pitchFamily="34" charset="-120"/>
+              </a:rPr>
+              <a:t>18</a:t>
+            </a:r>
+            <a:endParaRPr lang="en-US" sz="900" dirty="0"/>
+          </a:p>
+        </p:txBody>
+      </p:sp>
+      <p:sp>
+        <p:nvSpPr>
+          <p:cNvPr id="8" name="Text 6"/>
+          <p:cNvSpPr/>
+          <p:nvPr/>
+        </p:nvSpPr>
+        <p:spPr>
+          <a:xfrm>
             <a:off x="640080" y="658368"/>
-            <a:ext cx="10881360" cy="566928"/>
+            <a:ext cx="10881360" cy="713232"/>
           </a:xfrm>
           <a:prstGeom prst="rect">
             <a:avLst/>
@@ -7987,7 +8279,7 @@
               <a:buNone/>
             </a:pPr>
             <a:r>
-              <a:rPr lang="en-US" sz="2700" b="1" dirty="0">
+              <a:rPr lang="en-US" sz="3400" b="1" dirty="0">
                 <a:solidFill>
                   <a:srgbClr val="003A63"/>
                 </a:solidFill>
@@ -7997,20 +8289,20 @@
               </a:rPr>
               <a:t>Reflection Questions Continued</a:t>
             </a:r>
-            <a:endParaRPr lang="en-US" sz="2700" dirty="0"/>
-          </a:p>
-        </p:txBody>
-      </p:sp>
-      <p:sp>
-        <p:nvSpPr>
-          <p:cNvPr id="8" name="Text 6"/>
-          <p:cNvSpPr/>
-          <p:nvPr/>
-        </p:nvSpPr>
-        <p:spPr>
-          <a:xfrm>
-            <a:off x="868680" y="1417320"/>
-            <a:ext cx="6675120" cy="4434840"/>
+            <a:endParaRPr lang="en-US" sz="3400" dirty="0"/>
+          </a:p>
+        </p:txBody>
+      </p:sp>
+      <p:sp>
+        <p:nvSpPr>
+          <p:cNvPr id="9" name="Text 7"/>
+          <p:cNvSpPr/>
+          <p:nvPr/>
+        </p:nvSpPr>
+        <p:spPr>
+          <a:xfrm>
+            <a:off x="868680" y="1508760"/>
+            <a:ext cx="6537960" cy="4160520"/>
           </a:xfrm>
           <a:prstGeom prst="rect">
             <a:avLst/>
@@ -8025,7 +8317,7 @@
           <a:lstStyle/>
           <a:p>
             <a:r>
-              <a:rPr lang="en-US" sz="1700" dirty="0">
+              <a:rPr lang="en-US" sz="2100" dirty="0">
                 <a:solidFill>
                   <a:srgbClr val="17364A"/>
                 </a:solidFill>
@@ -8033,13 +8325,13 @@
                 <a:ea typeface="Aptos" pitchFamily="34" charset="-122"/>
                 <a:cs typeface="Aptos" pitchFamily="34" charset="-120"/>
               </a:rPr>
-              <a:t>Which parts of the workflow require legal, epidemiologic, clinical, communications, equity, privacy, or leadership review?</a:t>
-            </a:r>
-            <a:endParaRPr lang="en-US" sz="1700" dirty="0"/>
-          </a:p>
-          <a:p>
-            <a:r>
-              <a:rPr lang="en-US" sz="1700" dirty="0">
+              <a:t>Which parts of the workflow require legal, epidemiologic, clinical, communications, equity, privacy, or.</a:t>
+            </a:r>
+            <a:endParaRPr lang="en-US" sz="2100" dirty="0"/>
+          </a:p>
+          <a:p>
+            <a:r>
+              <a:rPr lang="en-US" sz="2100" dirty="0">
                 <a:solidFill>
                   <a:srgbClr val="17364A"/>
                 </a:solidFill>
@@ -8049,11 +8341,11 @@
               </a:rPr>
               <a:t>What could go wrong if AI were added without changing the architecture?</a:t>
             </a:r>
-            <a:endParaRPr lang="en-US" sz="1700" dirty="0"/>
-          </a:p>
-          <a:p>
-            <a:r>
-              <a:rPr lang="en-US" sz="1700" dirty="0">
+            <a:endParaRPr lang="en-US" sz="2100" dirty="0"/>
+          </a:p>
+          <a:p>
+            <a:r>
+              <a:rPr lang="en-US" sz="2100" dirty="0">
                 <a:solidFill>
                   <a:srgbClr val="17364A"/>
                 </a:solidFill>
@@ -8063,13 +8355,13 @@
               </a:rPr>
               <a:t>Which monitoring indicators would show whether the AI-supported workflow is working safely and equitably?</a:t>
             </a:r>
-            <a:endParaRPr lang="en-US" sz="1700" dirty="0"/>
-          </a:p>
-        </p:txBody>
-      </p:sp>
-      <p:sp>
-        <p:nvSpPr>
-          <p:cNvPr id="9" name="Shape 7"/>
+            <a:endParaRPr lang="en-US" sz="2100" dirty="0"/>
+          </a:p>
+        </p:txBody>
+      </p:sp>
+      <p:sp>
+        <p:nvSpPr>
+          <p:cNvPr id="10" name="Shape 8"/>
           <p:cNvSpPr/>
           <p:nvPr/>
         </p:nvSpPr>
@@ -8096,14 +8388,14 @@
       </p:sp>
       <p:sp>
         <p:nvSpPr>
-          <p:cNvPr id="10" name="Text 8"/>
+          <p:cNvPr id="11" name="Text 9"/>
           <p:cNvSpPr/>
           <p:nvPr/>
         </p:nvSpPr>
         <p:spPr>
           <a:xfrm>
             <a:off x="8074152" y="1563624"/>
-            <a:ext cx="2825496" cy="201168"/>
+            <a:ext cx="2825496" cy="256032"/>
           </a:xfrm>
           <a:prstGeom prst="rect">
             <a:avLst/>
@@ -8119,7 +8411,7 @@
               <a:buNone/>
             </a:pPr>
             <a:r>
-              <a:rPr lang="en-US" sz="950" b="1" dirty="0">
+              <a:rPr lang="en-US" sz="1300" b="1" dirty="0">
                 <a:solidFill>
                   <a:srgbClr val="0068B7"/>
                 </a:solidFill>
@@ -8129,20 +8421,20 @@
               </a:rPr>
               <a:t>Key idea</a:t>
             </a:r>
-            <a:endParaRPr lang="en-US" sz="950" dirty="0"/>
-          </a:p>
-        </p:txBody>
-      </p:sp>
-      <p:sp>
-        <p:nvSpPr>
-          <p:cNvPr id="11" name="Text 9"/>
-          <p:cNvSpPr/>
-          <p:nvPr/>
-        </p:nvSpPr>
-        <p:spPr>
-          <a:xfrm>
-            <a:off x="8074152" y="1856232"/>
-            <a:ext cx="2825496" cy="1261872"/>
+            <a:endParaRPr lang="en-US" sz="1300" dirty="0"/>
+          </a:p>
+        </p:txBody>
+      </p:sp>
+      <p:sp>
+        <p:nvSpPr>
+          <p:cNvPr id="12" name="Text 10"/>
+          <p:cNvSpPr/>
+          <p:nvPr/>
+        </p:nvSpPr>
+        <p:spPr>
+          <a:xfrm>
+            <a:off x="8074152" y="1920240"/>
+            <a:ext cx="2825496" cy="1188720"/>
           </a:xfrm>
           <a:prstGeom prst="rect">
             <a:avLst/>
@@ -8160,7 +8452,7 @@
               <a:buNone/>
             </a:pPr>
             <a:r>
-              <a:rPr lang="en-US" sz="1250" dirty="0">
+              <a:rPr lang="en-US" sz="1550" dirty="0">
                 <a:solidFill>
                   <a:srgbClr val="17364A"/>
                 </a:solidFill>
@@ -8168,15 +8460,15 @@
                 <a:ea typeface="Aptos" pitchFamily="34" charset="-122"/>
                 <a:cs typeface="Aptos" pitchFamily="34" charset="-120"/>
               </a:rPr>
-              <a:t>Which parts of the workflow require legal, epidemiologic, clinical, communications, equity, privacy, or leadership review?</a:t>
-            </a:r>
-            <a:endParaRPr lang="en-US" sz="1250" dirty="0"/>
-          </a:p>
-        </p:txBody>
-      </p:sp>
-      <p:sp>
-        <p:nvSpPr>
-          <p:cNvPr id="12" name="Shape 10"/>
+              <a:t>Which parts of the workflow require legal, epidemiologic, clinical, communications, equity, privacy, or.</a:t>
+            </a:r>
+            <a:endParaRPr lang="en-US" sz="1550" dirty="0"/>
+          </a:p>
+        </p:txBody>
+      </p:sp>
+      <p:sp>
+        <p:nvSpPr>
+          <p:cNvPr id="13" name="Shape 11"/>
           <p:cNvSpPr/>
           <p:nvPr/>
         </p:nvSpPr>
@@ -8203,14 +8495,14 @@
       </p:sp>
       <p:sp>
         <p:nvSpPr>
-          <p:cNvPr id="13" name="Text 11"/>
+          <p:cNvPr id="14" name="Text 12"/>
           <p:cNvSpPr/>
           <p:nvPr/>
         </p:nvSpPr>
         <p:spPr>
           <a:xfrm>
             <a:off x="8074152" y="3666744"/>
-            <a:ext cx="2825496" cy="201168"/>
+            <a:ext cx="2825496" cy="256032"/>
           </a:xfrm>
           <a:prstGeom prst="rect">
             <a:avLst/>
@@ -8226,7 +8518,7 @@
               <a:buNone/>
             </a:pPr>
             <a:r>
-              <a:rPr lang="en-US" sz="950" b="1" dirty="0">
+              <a:rPr lang="en-US" sz="1300" b="1" dirty="0">
                 <a:solidFill>
                   <a:srgbClr val="0068B7"/>
                 </a:solidFill>
@@ -8236,20 +8528,20 @@
               </a:rPr>
               <a:t>Use this for</a:t>
             </a:r>
-            <a:endParaRPr lang="en-US" sz="950" dirty="0"/>
-          </a:p>
-        </p:txBody>
-      </p:sp>
-      <p:sp>
-        <p:nvSpPr>
-          <p:cNvPr id="14" name="Text 12"/>
-          <p:cNvSpPr/>
-          <p:nvPr/>
-        </p:nvSpPr>
-        <p:spPr>
-          <a:xfrm>
-            <a:off x="8074152" y="3959352"/>
-            <a:ext cx="2825496" cy="1170432"/>
+            <a:endParaRPr lang="en-US" sz="1300" dirty="0"/>
+          </a:p>
+        </p:txBody>
+      </p:sp>
+      <p:sp>
+        <p:nvSpPr>
+          <p:cNvPr id="15" name="Text 13"/>
+          <p:cNvSpPr/>
+          <p:nvPr/>
+        </p:nvSpPr>
+        <p:spPr>
+          <a:xfrm>
+            <a:off x="8074152" y="4023360"/>
+            <a:ext cx="2825496" cy="1097280"/>
           </a:xfrm>
           <a:prstGeom prst="rect">
             <a:avLst/>
@@ -8267,7 +8559,7 @@
               <a:buNone/>
             </a:pPr>
             <a:r>
-              <a:rPr lang="en-US" sz="1250" dirty="0">
+              <a:rPr lang="en-US" sz="1550" dirty="0">
                 <a:solidFill>
                   <a:srgbClr val="17364A"/>
                 </a:solidFill>
@@ -8277,7 +8569,7 @@
               </a:rPr>
               <a:t>Connect the concept to public health decisions, safeguards, documentation, or implementation work.</a:t>
             </a:r>
-            <a:endParaRPr lang="en-US" sz="1250" dirty="0"/>
+            <a:endParaRPr lang="en-US" sz="1550" dirty="0"/>
           </a:p>
         </p:txBody>
       </p:sp>
@@ -8474,7 +8766,7 @@
                 <a:ea typeface="Aptos" pitchFamily="34" charset="-122"/>
                 <a:cs typeface="Aptos" pitchFamily="34" charset="-120"/>
               </a:rPr>
-              <a:t>© Paula Soper</a:t>
+              <a:t>Â© Paula Soper</a:t>
             </a:r>
             <a:endParaRPr lang="en-US" sz="800" dirty="0"/>
           </a:p>
@@ -8482,7 +8774,46 @@
       </p:sp>
       <p:sp>
         <p:nvSpPr>
-          <p:cNvPr id="7" name="Shape 5"/>
+          <p:cNvPr id="7" name="Text 5"/>
+          <p:cNvSpPr/>
+          <p:nvPr/>
+        </p:nvSpPr>
+        <p:spPr>
+          <a:xfrm>
+            <a:off x="11137392" y="6510528"/>
+            <a:ext cx="411480" cy="201168"/>
+          </a:xfrm>
+          <a:prstGeom prst="rect">
+            <a:avLst/>
+          </a:prstGeom>
+          <a:noFill/>
+          <a:ln/>
+        </p:spPr>
+        <p:txBody>
+          <a:bodyPr wrap="square" lIns="0" tIns="0" rIns="0" bIns="0" rtlCol="0" anchor="ctr"/>
+          <a:lstStyle/>
+          <a:p>
+            <a:pPr algn="r" indent="0" marL="0">
+              <a:buNone/>
+            </a:pPr>
+            <a:r>
+              <a:rPr lang="en-US" sz="900" dirty="0">
+                <a:solidFill>
+                  <a:srgbClr val="5F7181"/>
+                </a:solidFill>
+                <a:latin typeface="Aptos" pitchFamily="34" charset="0"/>
+                <a:ea typeface="Aptos" pitchFamily="34" charset="-122"/>
+                <a:cs typeface="Aptos" pitchFamily="34" charset="-120"/>
+              </a:rPr>
+              <a:t>19</a:t>
+            </a:r>
+            <a:endParaRPr lang="en-US" sz="900" dirty="0"/>
+          </a:p>
+        </p:txBody>
+      </p:sp>
+      <p:sp>
+        <p:nvSpPr>
+          <p:cNvPr id="8" name="Shape 6"/>
           <p:cNvSpPr/>
           <p:nvPr/>
         </p:nvSpPr>
@@ -8507,7 +8838,7 @@
       </p:sp>
       <p:sp>
         <p:nvSpPr>
-          <p:cNvPr id="8" name="Text 6"/>
+          <p:cNvPr id="9" name="Text 7"/>
           <p:cNvSpPr/>
           <p:nvPr/>
         </p:nvSpPr>
@@ -8546,14 +8877,14 @@
       </p:sp>
       <p:sp>
         <p:nvSpPr>
-          <p:cNvPr id="9" name="Text 7"/>
+          <p:cNvPr id="10" name="Text 8"/>
           <p:cNvSpPr/>
           <p:nvPr/>
         </p:nvSpPr>
         <p:spPr>
           <a:xfrm>
             <a:off x="640080" y="621792"/>
-            <a:ext cx="10881360" cy="566928"/>
+            <a:ext cx="10881360" cy="713232"/>
           </a:xfrm>
           <a:prstGeom prst="rect">
             <a:avLst/>
@@ -8571,7 +8902,7 @@
               <a:buNone/>
             </a:pPr>
             <a:r>
-              <a:rPr lang="en-US" sz="2700" b="1" dirty="0">
+              <a:rPr lang="en-US" sz="3400" b="1" dirty="0">
                 <a:solidFill>
                   <a:srgbClr val="003A63"/>
                 </a:solidFill>
@@ -8581,20 +8912,20 @@
               </a:rPr>
               <a:t>Practical Exercise</a:t>
             </a:r>
-            <a:endParaRPr lang="en-US" sz="2700" dirty="0"/>
-          </a:p>
-        </p:txBody>
-      </p:sp>
-      <p:sp>
-        <p:nvSpPr>
-          <p:cNvPr id="10" name="Text 8"/>
-          <p:cNvSpPr/>
-          <p:nvPr/>
-        </p:nvSpPr>
-        <p:spPr>
-          <a:xfrm>
-            <a:off x="868680" y="1417320"/>
-            <a:ext cx="6675120" cy="4434840"/>
+            <a:endParaRPr lang="en-US" sz="3400" dirty="0"/>
+          </a:p>
+        </p:txBody>
+      </p:sp>
+      <p:sp>
+        <p:nvSpPr>
+          <p:cNvPr id="11" name="Text 9"/>
+          <p:cNvSpPr/>
+          <p:nvPr/>
+        </p:nvSpPr>
+        <p:spPr>
+          <a:xfrm>
+            <a:off x="868680" y="1508760"/>
+            <a:ext cx="6537960" cy="4160520"/>
           </a:xfrm>
           <a:prstGeom prst="rect">
             <a:avLst/>
@@ -8609,7 +8940,7 @@
           <a:lstStyle/>
           <a:p>
             <a:r>
-              <a:rPr lang="en-US" sz="1700" dirty="0">
+              <a:rPr lang="en-US" sz="2100" dirty="0">
                 <a:solidFill>
                   <a:srgbClr val="17364A"/>
                 </a:solidFill>
@@ -8619,11 +8950,11 @@
               </a:rPr>
               <a:t>Create an AI-enabled workflow architecture map for one public health workflow.</a:t>
             </a:r>
-            <a:endParaRPr lang="en-US" sz="1700" dirty="0"/>
-          </a:p>
-          <a:p>
-            <a:r>
-              <a:rPr lang="en-US" sz="1700" dirty="0">
+            <a:endParaRPr lang="en-US" sz="2100" dirty="0"/>
+          </a:p>
+          <a:p>
+            <a:r>
+              <a:rPr lang="en-US" sz="2100" dirty="0">
                 <a:solidFill>
                   <a:srgbClr val="17364A"/>
                 </a:solidFill>
@@ -8631,13 +8962,13 @@
                 <a:ea typeface="Aptos" pitchFamily="34" charset="-122"/>
                 <a:cs typeface="Aptos" pitchFamily="34" charset="-120"/>
               </a:rPr>
-              <a:t>Choose a workflow that is real or realistic for your agency, such as case report intake, lab result triage, immunization.</a:t>
-            </a:r>
-            <a:endParaRPr lang="en-US" sz="1700" dirty="0"/>
-          </a:p>
-          <a:p>
-            <a:r>
-              <a:rPr lang="en-US" sz="1700" dirty="0">
+              <a:t>Choose a workflow that is real or realistic for your agency, such as case report intake, lab result.</a:t>
+            </a:r>
+            <a:endParaRPr lang="en-US" sz="2100" dirty="0"/>
+          </a:p>
+          <a:p>
+            <a:r>
+              <a:rPr lang="en-US" sz="2100" dirty="0">
                 <a:solidFill>
                   <a:srgbClr val="17364A"/>
                 </a:solidFill>
@@ -8645,29 +8976,15 @@
                 <a:ea typeface="Aptos" pitchFamily="34" charset="-122"/>
                 <a:cs typeface="Aptos" pitchFamily="34" charset="-120"/>
               </a:rPr>
-              <a:t>Your map should include the source systems, data exchange methods, transformation steps, system of record, AI-supported.</a:t>
-            </a:r>
-            <a:endParaRPr lang="en-US" sz="1700" dirty="0"/>
-          </a:p>
-          <a:p>
-            <a:r>
-              <a:rPr lang="en-US" sz="1700" dirty="0">
-                <a:solidFill>
-                  <a:srgbClr val="17364A"/>
-                </a:solidFill>
-                <a:latin typeface="Aptos" pitchFamily="34" charset="0"/>
-                <a:ea typeface="Aptos" pitchFamily="34" charset="-122"/>
-                <a:cs typeface="Aptos" pitchFamily="34" charset="-120"/>
-              </a:rPr>
-              <a:t>After completing the map, identify at least five readiness gaps that should be addressed before implementation.</a:t>
-            </a:r>
-            <a:endParaRPr lang="en-US" sz="1700" dirty="0"/>
-          </a:p>
-        </p:txBody>
-      </p:sp>
-      <p:sp>
-        <p:nvSpPr>
-          <p:cNvPr id="11" name="Shape 9"/>
+              <a:t>Your map should include the source systems, data exchange methods, transformation steps, system of.</a:t>
+            </a:r>
+            <a:endParaRPr lang="en-US" sz="2100" dirty="0"/>
+          </a:p>
+        </p:txBody>
+      </p:sp>
+      <p:sp>
+        <p:nvSpPr>
+          <p:cNvPr id="12" name="Shape 10"/>
           <p:cNvSpPr/>
           <p:nvPr/>
         </p:nvSpPr>
@@ -8694,14 +9011,14 @@
       </p:sp>
       <p:sp>
         <p:nvSpPr>
-          <p:cNvPr id="12" name="Text 10"/>
+          <p:cNvPr id="13" name="Text 11"/>
           <p:cNvSpPr/>
           <p:nvPr/>
         </p:nvSpPr>
         <p:spPr>
           <a:xfrm>
             <a:off x="8074152" y="1563624"/>
-            <a:ext cx="2825496" cy="201168"/>
+            <a:ext cx="2825496" cy="256032"/>
           </a:xfrm>
           <a:prstGeom prst="rect">
             <a:avLst/>
@@ -8717,7 +9034,7 @@
               <a:buNone/>
             </a:pPr>
             <a:r>
-              <a:rPr lang="en-US" sz="950" b="1" dirty="0">
+              <a:rPr lang="en-US" sz="1300" b="1" dirty="0">
                 <a:solidFill>
                   <a:srgbClr val="0068B7"/>
                 </a:solidFill>
@@ -8727,20 +9044,20 @@
               </a:rPr>
               <a:t>Key idea</a:t>
             </a:r>
-            <a:endParaRPr lang="en-US" sz="950" dirty="0"/>
-          </a:p>
-        </p:txBody>
-      </p:sp>
-      <p:sp>
-        <p:nvSpPr>
-          <p:cNvPr id="13" name="Text 11"/>
-          <p:cNvSpPr/>
-          <p:nvPr/>
-        </p:nvSpPr>
-        <p:spPr>
-          <a:xfrm>
-            <a:off x="8074152" y="1856232"/>
-            <a:ext cx="2825496" cy="1261872"/>
+            <a:endParaRPr lang="en-US" sz="1300" dirty="0"/>
+          </a:p>
+        </p:txBody>
+      </p:sp>
+      <p:sp>
+        <p:nvSpPr>
+          <p:cNvPr id="14" name="Text 12"/>
+          <p:cNvSpPr/>
+          <p:nvPr/>
+        </p:nvSpPr>
+        <p:spPr>
+          <a:xfrm>
+            <a:off x="8074152" y="1920240"/>
+            <a:ext cx="2825496" cy="1188720"/>
           </a:xfrm>
           <a:prstGeom prst="rect">
             <a:avLst/>
@@ -8758,7 +9075,7 @@
               <a:buNone/>
             </a:pPr>
             <a:r>
-              <a:rPr lang="en-US" sz="1250" dirty="0">
+              <a:rPr lang="en-US" sz="1550" dirty="0">
                 <a:solidFill>
                   <a:srgbClr val="17364A"/>
                 </a:solidFill>
@@ -8768,13 +9085,13 @@
               </a:rPr>
               <a:t>Create an AI-enabled workflow architecture map for one public health workflow.</a:t>
             </a:r>
-            <a:endParaRPr lang="en-US" sz="1250" dirty="0"/>
-          </a:p>
-        </p:txBody>
-      </p:sp>
-      <p:sp>
-        <p:nvSpPr>
-          <p:cNvPr id="14" name="Shape 12"/>
+            <a:endParaRPr lang="en-US" sz="1550" dirty="0"/>
+          </a:p>
+        </p:txBody>
+      </p:sp>
+      <p:sp>
+        <p:nvSpPr>
+          <p:cNvPr id="15" name="Shape 13"/>
           <p:cNvSpPr/>
           <p:nvPr/>
         </p:nvSpPr>
@@ -8801,14 +9118,14 @@
       </p:sp>
       <p:sp>
         <p:nvSpPr>
-          <p:cNvPr id="15" name="Text 13"/>
+          <p:cNvPr id="16" name="Text 14"/>
           <p:cNvSpPr/>
           <p:nvPr/>
         </p:nvSpPr>
         <p:spPr>
           <a:xfrm>
             <a:off x="8074152" y="3666744"/>
-            <a:ext cx="2825496" cy="201168"/>
+            <a:ext cx="2825496" cy="256032"/>
           </a:xfrm>
           <a:prstGeom prst="rect">
             <a:avLst/>
@@ -8824,7 +9141,7 @@
               <a:buNone/>
             </a:pPr>
             <a:r>
-              <a:rPr lang="en-US" sz="950" b="1" dirty="0">
+              <a:rPr lang="en-US" sz="1300" b="1" dirty="0">
                 <a:solidFill>
                   <a:srgbClr val="0068B7"/>
                 </a:solidFill>
@@ -8834,20 +9151,20 @@
               </a:rPr>
               <a:t>Use this for</a:t>
             </a:r>
-            <a:endParaRPr lang="en-US" sz="950" dirty="0"/>
-          </a:p>
-        </p:txBody>
-      </p:sp>
-      <p:sp>
-        <p:nvSpPr>
-          <p:cNvPr id="16" name="Text 14"/>
-          <p:cNvSpPr/>
-          <p:nvPr/>
-        </p:nvSpPr>
-        <p:spPr>
-          <a:xfrm>
-            <a:off x="8074152" y="3959352"/>
-            <a:ext cx="2825496" cy="1170432"/>
+            <a:endParaRPr lang="en-US" sz="1300" dirty="0"/>
+          </a:p>
+        </p:txBody>
+      </p:sp>
+      <p:sp>
+        <p:nvSpPr>
+          <p:cNvPr id="17" name="Text 15"/>
+          <p:cNvSpPr/>
+          <p:nvPr/>
+        </p:nvSpPr>
+        <p:spPr>
+          <a:xfrm>
+            <a:off x="8074152" y="4023360"/>
+            <a:ext cx="2825496" cy="1097280"/>
           </a:xfrm>
           <a:prstGeom prst="rect">
             <a:avLst/>
@@ -8865,7 +9182,7 @@
               <a:buNone/>
             </a:pPr>
             <a:r>
-              <a:rPr lang="en-US" sz="1250" dirty="0">
+              <a:rPr lang="en-US" sz="1550" dirty="0">
                 <a:solidFill>
                   <a:srgbClr val="17364A"/>
                 </a:solidFill>
@@ -8875,7 +9192,7 @@
               </a:rPr>
               <a:t>Connect the concept to public health decisions, safeguards, documentation, or implementation work.</a:t>
             </a:r>
-            <a:endParaRPr lang="en-US" sz="1250" dirty="0"/>
+            <a:endParaRPr lang="en-US" sz="1550" dirty="0"/>
           </a:p>
         </p:txBody>
       </p:sp>
@@ -9072,7 +9389,7 @@
                 <a:ea typeface="Aptos" pitchFamily="34" charset="-122"/>
                 <a:cs typeface="Aptos" pitchFamily="34" charset="-120"/>
               </a:rPr>
-              <a:t>© Paula Soper</a:t>
+              <a:t>Â© Paula Soper</a:t>
             </a:r>
             <a:endParaRPr lang="en-US" sz="800" dirty="0"/>
           </a:p>
@@ -9086,8 +9403,47 @@
         </p:nvSpPr>
         <p:spPr>
           <a:xfrm>
+            <a:off x="11137392" y="6510528"/>
+            <a:ext cx="411480" cy="201168"/>
+          </a:xfrm>
+          <a:prstGeom prst="rect">
+            <a:avLst/>
+          </a:prstGeom>
+          <a:noFill/>
+          <a:ln/>
+        </p:spPr>
+        <p:txBody>
+          <a:bodyPr wrap="square" lIns="0" tIns="0" rIns="0" bIns="0" rtlCol="0" anchor="ctr"/>
+          <a:lstStyle/>
+          <a:p>
+            <a:pPr algn="r" indent="0" marL="0">
+              <a:buNone/>
+            </a:pPr>
+            <a:r>
+              <a:rPr lang="en-US" sz="900" dirty="0">
+                <a:solidFill>
+                  <a:srgbClr val="5F7181"/>
+                </a:solidFill>
+                <a:latin typeface="Aptos" pitchFamily="34" charset="0"/>
+                <a:ea typeface="Aptos" pitchFamily="34" charset="-122"/>
+                <a:cs typeface="Aptos" pitchFamily="34" charset="-120"/>
+              </a:rPr>
+              <a:t>2</a:t>
+            </a:r>
+            <a:endParaRPr lang="en-US" sz="900" dirty="0"/>
+          </a:p>
+        </p:txBody>
+      </p:sp>
+      <p:sp>
+        <p:nvSpPr>
+          <p:cNvPr id="8" name="Text 6"/>
+          <p:cNvSpPr/>
+          <p:nvPr/>
+        </p:nvSpPr>
+        <p:spPr>
+          <a:xfrm>
             <a:off x="640080" y="658368"/>
-            <a:ext cx="10881360" cy="566928"/>
+            <a:ext cx="10881360" cy="713232"/>
           </a:xfrm>
           <a:prstGeom prst="rect">
             <a:avLst/>
@@ -9105,7 +9461,7 @@
               <a:buNone/>
             </a:pPr>
             <a:r>
-              <a:rPr lang="en-US" sz="2700" b="1" dirty="0">
+              <a:rPr lang="en-US" sz="3400" b="1" dirty="0">
                 <a:solidFill>
                   <a:srgbClr val="003A63"/>
                 </a:solidFill>
@@ -9115,20 +9471,20 @@
               </a:rPr>
               <a:t>What this module helps you do</a:t>
             </a:r>
-            <a:endParaRPr lang="en-US" sz="2700" dirty="0"/>
-          </a:p>
-        </p:txBody>
-      </p:sp>
-      <p:sp>
-        <p:nvSpPr>
-          <p:cNvPr id="8" name="Text 6"/>
-          <p:cNvSpPr/>
-          <p:nvPr/>
-        </p:nvSpPr>
-        <p:spPr>
-          <a:xfrm>
-            <a:off x="868680" y="1417320"/>
-            <a:ext cx="6675120" cy="3291840"/>
+            <a:endParaRPr lang="en-US" sz="3400" dirty="0"/>
+          </a:p>
+        </p:txBody>
+      </p:sp>
+      <p:sp>
+        <p:nvSpPr>
+          <p:cNvPr id="9" name="Text 7"/>
+          <p:cNvSpPr/>
+          <p:nvPr/>
+        </p:nvSpPr>
+        <p:spPr>
+          <a:xfrm>
+            <a:off x="868680" y="1508760"/>
+            <a:ext cx="6446520" cy="2926080"/>
           </a:xfrm>
           <a:prstGeom prst="rect">
             <a:avLst/>
@@ -9143,7 +9499,7 @@
           <a:lstStyle/>
           <a:p>
             <a:r>
-              <a:rPr lang="en-US" sz="1700" dirty="0">
+              <a:rPr lang="en-US" sz="2100" dirty="0">
                 <a:solidFill>
                   <a:srgbClr val="17364A"/>
                 </a:solidFill>
@@ -9153,11 +9509,11 @@
               </a:rPr>
               <a:t>Artificial intelligence does not operate separately from the public health data environment.</a:t>
             </a:r>
-            <a:endParaRPr lang="en-US" sz="1700" dirty="0"/>
-          </a:p>
-          <a:p>
-            <a:r>
-              <a:rPr lang="en-US" sz="1700" dirty="0">
+            <a:endParaRPr lang="en-US" sz="2100" dirty="0"/>
+          </a:p>
+          <a:p>
+            <a:r>
+              <a:rPr lang="en-US" sz="2100" dirty="0">
                 <a:solidFill>
                   <a:srgbClr val="17364A"/>
                 </a:solidFill>
@@ -9165,13 +9521,13 @@
                 <a:ea typeface="Aptos" pitchFamily="34" charset="-122"/>
                 <a:cs typeface="Aptos" pitchFamily="34" charset="-120"/>
               </a:rPr>
-              <a:t>Every AI-supported workflow depends on the quality, structure, timeliness, governance, and security of the systems that supply data to it.</a:t>
-            </a:r>
-            <a:endParaRPr lang="en-US" sz="1700" dirty="0"/>
-          </a:p>
-          <a:p>
-            <a:r>
-              <a:rPr lang="en-US" sz="1700" dirty="0">
+              <a:t>Every AI-supported workflow depends on the quality, structure, timeliness, governance, and security of the.</a:t>
+            </a:r>
+            <a:endParaRPr lang="en-US" sz="2100" dirty="0"/>
+          </a:p>
+          <a:p>
+            <a:r>
+              <a:rPr lang="en-US" sz="2100" dirty="0">
                 <a:solidFill>
                   <a:srgbClr val="17364A"/>
                 </a:solidFill>
@@ -9181,27 +9537,13 @@
               </a:rPr>
               <a:t>For public health agencies, this means that AI readiness is inseparable from data modernization.</a:t>
             </a:r>
-            <a:endParaRPr lang="en-US" sz="1700" dirty="0"/>
-          </a:p>
-          <a:p>
-            <a:r>
-              <a:rPr lang="en-US" sz="1700" dirty="0">
-                <a:solidFill>
-                  <a:srgbClr val="17364A"/>
-                </a:solidFill>
-                <a:latin typeface="Aptos" pitchFamily="34" charset="0"/>
-                <a:ea typeface="Aptos" pitchFamily="34" charset="-122"/>
-                <a:cs typeface="Aptos" pitchFamily="34" charset="-120"/>
-              </a:rPr>
-              <a:t>A department cannot responsibly deploy AI for surveillance, case investigation, forecasting, summarization, resource allocation, public.</a:t>
-            </a:r>
-            <a:endParaRPr lang="en-US" sz="1700" dirty="0"/>
-          </a:p>
-        </p:txBody>
-      </p:sp>
-      <p:sp>
-        <p:nvSpPr>
-          <p:cNvPr id="9" name="Shape 7"/>
+            <a:endParaRPr lang="en-US" sz="2100" dirty="0"/>
+          </a:p>
+        </p:txBody>
+      </p:sp>
+      <p:sp>
+        <p:nvSpPr>
+          <p:cNvPr id="10" name="Shape 8"/>
           <p:cNvSpPr/>
           <p:nvPr/>
         </p:nvSpPr>
@@ -9228,14 +9570,14 @@
       </p:sp>
       <p:sp>
         <p:nvSpPr>
-          <p:cNvPr id="10" name="Text 8"/>
+          <p:cNvPr id="11" name="Text 9"/>
           <p:cNvSpPr/>
           <p:nvPr/>
         </p:nvSpPr>
         <p:spPr>
           <a:xfrm>
             <a:off x="8074152" y="1563624"/>
-            <a:ext cx="2825496" cy="201168"/>
+            <a:ext cx="2825496" cy="256032"/>
           </a:xfrm>
           <a:prstGeom prst="rect">
             <a:avLst/>
@@ -9251,7 +9593,7 @@
               <a:buNone/>
             </a:pPr>
             <a:r>
-              <a:rPr lang="en-US" sz="950" b="1" dirty="0">
+              <a:rPr lang="en-US" sz="1300" b="1" dirty="0">
                 <a:solidFill>
                   <a:srgbClr val="0068B7"/>
                 </a:solidFill>
@@ -9261,20 +9603,20 @@
               </a:rPr>
               <a:t>Module details</a:t>
             </a:r>
-            <a:endParaRPr lang="en-US" sz="950" dirty="0"/>
-          </a:p>
-        </p:txBody>
-      </p:sp>
-      <p:sp>
-        <p:nvSpPr>
-          <p:cNvPr id="11" name="Text 9"/>
-          <p:cNvSpPr/>
-          <p:nvPr/>
-        </p:nvSpPr>
-        <p:spPr>
-          <a:xfrm>
-            <a:off x="8074152" y="1856232"/>
-            <a:ext cx="2825496" cy="1353312"/>
+            <a:endParaRPr lang="en-US" sz="1300" dirty="0"/>
+          </a:p>
+        </p:txBody>
+      </p:sp>
+      <p:sp>
+        <p:nvSpPr>
+          <p:cNvPr id="12" name="Text 10"/>
+          <p:cNvSpPr/>
+          <p:nvPr/>
+        </p:nvSpPr>
+        <p:spPr>
+          <a:xfrm>
+            <a:off x="8074152" y="1920240"/>
+            <a:ext cx="2825496" cy="1280160"/>
           </a:xfrm>
           <a:prstGeom prst="rect">
             <a:avLst/>
@@ -9292,7 +9634,7 @@
               <a:buNone/>
             </a:pPr>
             <a:r>
-              <a:rPr lang="en-US" sz="1250" dirty="0">
+              <a:rPr lang="en-US" sz="1550" dirty="0">
                 <a:solidFill>
                   <a:srgbClr val="17364A"/>
                 </a:solidFill>
@@ -9302,14 +9644,14 @@
               </a:rPr>
               <a:t>Level: applied/foundational</a:t>
             </a:r>
-            <a:endParaRPr lang="en-US" sz="1250" dirty="0"/>
+            <a:endParaRPr lang="en-US" sz="1550" dirty="0"/>
           </a:p>
           <a:p>
             <a:pPr indent="0" marL="0">
               <a:buNone/>
             </a:pPr>
             <a:r>
-              <a:rPr lang="en-US" sz="1250" dirty="0">
+              <a:rPr lang="en-US" sz="1550" dirty="0">
                 <a:solidFill>
                   <a:srgbClr val="17364A"/>
                 </a:solidFill>
@@ -9319,14 +9661,14 @@
               </a:rPr>
               <a:t>Primary track: Technical Architecture Track</a:t>
             </a:r>
-            <a:endParaRPr lang="en-US" sz="1250" dirty="0"/>
+            <a:endParaRPr lang="en-US" sz="1550" dirty="0"/>
           </a:p>
           <a:p>
             <a:pPr indent="0" marL="0">
               <a:buNone/>
             </a:pPr>
             <a:r>
-              <a:rPr lang="en-US" sz="1250" dirty="0">
+              <a:rPr lang="en-US" sz="1550" dirty="0">
                 <a:solidFill>
                   <a:srgbClr val="17364A"/>
                 </a:solidFill>
@@ -9336,32 +9678,32 @@
               </a:rPr>
               <a:t>Appears in tracks: technical-architecture</a:t>
             </a:r>
-            <a:endParaRPr lang="en-US" sz="1250" dirty="0"/>
-          </a:p>
-        </p:txBody>
-      </p:sp>
-      <p:sp>
-        <p:nvSpPr>
-          <p:cNvPr id="12" name="Shape 10"/>
-          <p:cNvSpPr/>
-          <p:nvPr/>
-        </p:nvSpPr>
-        <p:spPr>
-          <a:xfrm>
-            <a:off x="7909560" y="3611880"/>
-            <a:ext cx="3154680" cy="1783080"/>
+            <a:endParaRPr lang="en-US" sz="1550" dirty="0"/>
+          </a:p>
+        </p:txBody>
+      </p:sp>
+      <p:sp>
+        <p:nvSpPr>
+          <p:cNvPr id="13" name="Shape 11"/>
+          <p:cNvSpPr/>
+          <p:nvPr/>
+        </p:nvSpPr>
+        <p:spPr>
+          <a:xfrm>
+            <a:off x="7635240" y="3730752"/>
+            <a:ext cx="1033272" cy="749808"/>
           </a:xfrm>
           <a:prstGeom prst="roundRect">
             <a:avLst>
-              <a:gd name="adj" fmla="val 6154"/>
+              <a:gd name="adj" fmla="val 14634"/>
             </a:avLst>
           </a:prstGeom>
           <a:solidFill>
-            <a:srgbClr val="EEF8ED"/>
+            <a:srgbClr val="0068B7"/>
           </a:solidFill>
           <a:ln w="12700">
             <a:solidFill>
-              <a:srgbClr val="B9D7E6"/>
+              <a:srgbClr val="0068B7"/>
             </a:solidFill>
             <a:prstDash val="solid"/>
           </a:ln>
@@ -9369,81 +9711,256 @@
       </p:sp>
       <p:sp>
         <p:nvSpPr>
-          <p:cNvPr id="13" name="Text 11"/>
-          <p:cNvSpPr/>
-          <p:nvPr/>
-        </p:nvSpPr>
-        <p:spPr>
-          <a:xfrm>
-            <a:off x="8074152" y="3758184"/>
-            <a:ext cx="2825496" cy="201168"/>
-          </a:xfrm>
-          <a:prstGeom prst="rect">
-            <a:avLst/>
-          </a:prstGeom>
-          <a:noFill/>
-          <a:ln/>
-        </p:spPr>
-        <p:txBody>
-          <a:bodyPr wrap="square" lIns="0" tIns="0" rIns="0" bIns="0" rtlCol="0" anchor="ctr"/>
-          <a:lstStyle/>
-          <a:p>
-            <a:pPr indent="0" marL="0">
-              <a:buNone/>
-            </a:pPr>
-            <a:r>
-              <a:rPr lang="en-US" sz="950" b="1" dirty="0">
-                <a:solidFill>
-                  <a:srgbClr val="0068B7"/>
-                </a:solidFill>
-                <a:latin typeface="Aptos" pitchFamily="34" charset="0"/>
-                <a:ea typeface="Aptos" pitchFamily="34" charset="-122"/>
-                <a:cs typeface="Aptos" pitchFamily="34" charset="-120"/>
-              </a:rPr>
-              <a:t>Learning approach</a:t>
-            </a:r>
-            <a:endParaRPr lang="en-US" sz="950" dirty="0"/>
-          </a:p>
-        </p:txBody>
-      </p:sp>
-      <p:sp>
-        <p:nvSpPr>
           <p:cNvPr id="14" name="Text 12"/>
           <p:cNvSpPr/>
           <p:nvPr/>
         </p:nvSpPr>
         <p:spPr>
           <a:xfrm>
-            <a:off x="8074152" y="4050792"/>
-            <a:ext cx="2825496" cy="1216152"/>
-          </a:xfrm>
-          <a:prstGeom prst="rect">
-            <a:avLst/>
-          </a:prstGeom>
-          <a:noFill/>
-          <a:ln/>
-        </p:spPr>
-        <p:txBody>
-          <a:bodyPr wrap="square" lIns="0" tIns="0" rIns="0" bIns="0" rtlCol="0" anchor="t">
+            <a:off x="7708392" y="3922776"/>
+            <a:ext cx="886968" cy="310896"/>
+          </a:xfrm>
+          <a:prstGeom prst="rect">
+            <a:avLst/>
+          </a:prstGeom>
+          <a:noFill/>
+          <a:ln/>
+        </p:spPr>
+        <p:txBody>
+          <a:bodyPr wrap="square" lIns="0" tIns="0" rIns="0" bIns="0" rtlCol="0" anchor="ctr">
             <a:normAutofit/>
           </a:bodyPr>
           <a:lstStyle/>
           <a:p>
-            <a:pPr indent="0" marL="0">
-              <a:buNone/>
-            </a:pPr>
-            <a:r>
-              <a:rPr lang="en-US" sz="1250" dirty="0">
-                <a:solidFill>
-                  <a:srgbClr val="17364A"/>
-                </a:solidFill>
-                <a:latin typeface="Aptos" pitchFamily="34" charset="0"/>
-                <a:ea typeface="Aptos" pitchFamily="34" charset="-122"/>
-                <a:cs typeface="Aptos" pitchFamily="34" charset="-120"/>
-              </a:rPr>
-              <a:t>Review the core ideas, complete the practical exercise, check your understanding, and use the related plays and tools to apply the lesson.</a:t>
-            </a:r>
-            <a:endParaRPr lang="en-US" sz="1250" dirty="0"/>
+            <a:pPr algn="ctr" indent="0" marL="0">
+              <a:buNone/>
+            </a:pPr>
+            <a:r>
+              <a:rPr lang="en-US" sz="1500" b="1" dirty="0">
+                <a:solidFill>
+                  <a:srgbClr val="FFFFFF"/>
+                </a:solidFill>
+                <a:latin typeface="Aptos" pitchFamily="34" charset="0"/>
+                <a:ea typeface="Aptos" pitchFamily="34" charset="-122"/>
+                <a:cs typeface="Aptos" pitchFamily="34" charset="-120"/>
+              </a:rPr>
+              <a:t>Learn</a:t>
+            </a:r>
+            <a:endParaRPr lang="en-US" sz="1500" dirty="0"/>
+          </a:p>
+        </p:txBody>
+      </p:sp>
+      <p:sp>
+        <p:nvSpPr>
+          <p:cNvPr id="15" name="Text 13"/>
+          <p:cNvSpPr/>
+          <p:nvPr/>
+        </p:nvSpPr>
+        <p:spPr>
+          <a:xfrm>
+            <a:off x="8695944" y="3941064"/>
+            <a:ext cx="201168" cy="256032"/>
+          </a:xfrm>
+          <a:prstGeom prst="rect">
+            <a:avLst/>
+          </a:prstGeom>
+          <a:noFill/>
+          <a:ln/>
+        </p:spPr>
+        <p:txBody>
+          <a:bodyPr wrap="square" lIns="0" tIns="0" rIns="0" bIns="0" rtlCol="0" anchor="ctr"/>
+          <a:lstStyle/>
+          <a:p>
+            <a:pPr algn="ctr" indent="0" marL="0">
+              <a:buNone/>
+            </a:pPr>
+            <a:r>
+              <a:rPr lang="en-US" sz="1800" b="1" dirty="0">
+                <a:solidFill>
+                  <a:srgbClr val="0068B7"/>
+                </a:solidFill>
+                <a:latin typeface="Aptos" pitchFamily="34" charset="0"/>
+                <a:ea typeface="Aptos" pitchFamily="34" charset="-122"/>
+                <a:cs typeface="Aptos" pitchFamily="34" charset="-120"/>
+              </a:rPr>
+              <a:t>â†’</a:t>
+            </a:r>
+            <a:endParaRPr lang="en-US" sz="1800" dirty="0"/>
+          </a:p>
+        </p:txBody>
+      </p:sp>
+      <p:sp>
+        <p:nvSpPr>
+          <p:cNvPr id="16" name="Shape 14"/>
+          <p:cNvSpPr/>
+          <p:nvPr/>
+        </p:nvSpPr>
+        <p:spPr>
+          <a:xfrm>
+            <a:off x="8924544" y="3730752"/>
+            <a:ext cx="1033272" cy="749808"/>
+          </a:xfrm>
+          <a:prstGeom prst="roundRect">
+            <a:avLst>
+              <a:gd name="adj" fmla="val 14634"/>
+            </a:avLst>
+          </a:prstGeom>
+          <a:solidFill>
+            <a:srgbClr val="2F8A28"/>
+          </a:solidFill>
+          <a:ln w="12700">
+            <a:solidFill>
+              <a:srgbClr val="2F8A28"/>
+            </a:solidFill>
+            <a:prstDash val="solid"/>
+          </a:ln>
+        </p:spPr>
+      </p:sp>
+      <p:sp>
+        <p:nvSpPr>
+          <p:cNvPr id="17" name="Text 15"/>
+          <p:cNvSpPr/>
+          <p:nvPr/>
+        </p:nvSpPr>
+        <p:spPr>
+          <a:xfrm>
+            <a:off x="8997696" y="3922776"/>
+            <a:ext cx="886968" cy="310896"/>
+          </a:xfrm>
+          <a:prstGeom prst="rect">
+            <a:avLst/>
+          </a:prstGeom>
+          <a:noFill/>
+          <a:ln/>
+        </p:spPr>
+        <p:txBody>
+          <a:bodyPr wrap="square" lIns="0" tIns="0" rIns="0" bIns="0" rtlCol="0" anchor="ctr">
+            <a:normAutofit/>
+          </a:bodyPr>
+          <a:lstStyle/>
+          <a:p>
+            <a:pPr algn="ctr" indent="0" marL="0">
+              <a:buNone/>
+            </a:pPr>
+            <a:r>
+              <a:rPr lang="en-US" sz="1500" b="1" dirty="0">
+                <a:solidFill>
+                  <a:srgbClr val="FFFFFF"/>
+                </a:solidFill>
+                <a:latin typeface="Aptos" pitchFamily="34" charset="0"/>
+                <a:ea typeface="Aptos" pitchFamily="34" charset="-122"/>
+                <a:cs typeface="Aptos" pitchFamily="34" charset="-120"/>
+              </a:rPr>
+              <a:t>Apply</a:t>
+            </a:r>
+            <a:endParaRPr lang="en-US" sz="1500" dirty="0"/>
+          </a:p>
+        </p:txBody>
+      </p:sp>
+      <p:sp>
+        <p:nvSpPr>
+          <p:cNvPr id="18" name="Text 16"/>
+          <p:cNvSpPr/>
+          <p:nvPr/>
+        </p:nvSpPr>
+        <p:spPr>
+          <a:xfrm>
+            <a:off x="9985248" y="3941064"/>
+            <a:ext cx="201168" cy="256032"/>
+          </a:xfrm>
+          <a:prstGeom prst="rect">
+            <a:avLst/>
+          </a:prstGeom>
+          <a:noFill/>
+          <a:ln/>
+        </p:spPr>
+        <p:txBody>
+          <a:bodyPr wrap="square" lIns="0" tIns="0" rIns="0" bIns="0" rtlCol="0" anchor="ctr"/>
+          <a:lstStyle/>
+          <a:p>
+            <a:pPr algn="ctr" indent="0" marL="0">
+              <a:buNone/>
+            </a:pPr>
+            <a:r>
+              <a:rPr lang="en-US" sz="1800" b="1" dirty="0">
+                <a:solidFill>
+                  <a:srgbClr val="0068B7"/>
+                </a:solidFill>
+                <a:latin typeface="Aptos" pitchFamily="34" charset="0"/>
+                <a:ea typeface="Aptos" pitchFamily="34" charset="-122"/>
+                <a:cs typeface="Aptos" pitchFamily="34" charset="-120"/>
+              </a:rPr>
+              <a:t>â†’</a:t>
+            </a:r>
+            <a:endParaRPr lang="en-US" sz="1800" dirty="0"/>
+          </a:p>
+        </p:txBody>
+      </p:sp>
+      <p:sp>
+        <p:nvSpPr>
+          <p:cNvPr id="19" name="Shape 17"/>
+          <p:cNvSpPr/>
+          <p:nvPr/>
+        </p:nvSpPr>
+        <p:spPr>
+          <a:xfrm>
+            <a:off x="10213848" y="3730752"/>
+            <a:ext cx="1033272" cy="749808"/>
+          </a:xfrm>
+          <a:prstGeom prst="roundRect">
+            <a:avLst>
+              <a:gd name="adj" fmla="val 14634"/>
+            </a:avLst>
+          </a:prstGeom>
+          <a:solidFill>
+            <a:srgbClr val="6A4CA3"/>
+          </a:solidFill>
+          <a:ln w="12700">
+            <a:solidFill>
+              <a:srgbClr val="6A4CA3"/>
+            </a:solidFill>
+            <a:prstDash val="solid"/>
+          </a:ln>
+        </p:spPr>
+      </p:sp>
+      <p:sp>
+        <p:nvSpPr>
+          <p:cNvPr id="20" name="Text 18"/>
+          <p:cNvSpPr/>
+          <p:nvPr/>
+        </p:nvSpPr>
+        <p:spPr>
+          <a:xfrm>
+            <a:off x="10287000" y="3922776"/>
+            <a:ext cx="886968" cy="310896"/>
+          </a:xfrm>
+          <a:prstGeom prst="rect">
+            <a:avLst/>
+          </a:prstGeom>
+          <a:noFill/>
+          <a:ln/>
+        </p:spPr>
+        <p:txBody>
+          <a:bodyPr wrap="square" lIns="0" tIns="0" rIns="0" bIns="0" rtlCol="0" anchor="ctr">
+            <a:normAutofit/>
+          </a:bodyPr>
+          <a:lstStyle/>
+          <a:p>
+            <a:pPr algn="ctr" indent="0" marL="0">
+              <a:buNone/>
+            </a:pPr>
+            <a:r>
+              <a:rPr lang="en-US" sz="1500" b="1" dirty="0">
+                <a:solidFill>
+                  <a:srgbClr val="FFFFFF"/>
+                </a:solidFill>
+                <a:latin typeface="Aptos" pitchFamily="34" charset="0"/>
+                <a:ea typeface="Aptos" pitchFamily="34" charset="-122"/>
+                <a:cs typeface="Aptos" pitchFamily="34" charset="-120"/>
+              </a:rPr>
+              <a:t>Document</a:t>
+            </a:r>
+            <a:endParaRPr lang="en-US" sz="1500" dirty="0"/>
           </a:p>
         </p:txBody>
       </p:sp>
@@ -9640,7 +10157,7 @@
                 <a:ea typeface="Aptos" pitchFamily="34" charset="-122"/>
                 <a:cs typeface="Aptos" pitchFamily="34" charset="-120"/>
               </a:rPr>
-              <a:t>© Paula Soper</a:t>
+              <a:t>Â© Paula Soper</a:t>
             </a:r>
             <a:endParaRPr lang="en-US" sz="800" dirty="0"/>
           </a:p>
@@ -9648,7 +10165,46 @@
       </p:sp>
       <p:sp>
         <p:nvSpPr>
-          <p:cNvPr id="7" name="Shape 5"/>
+          <p:cNvPr id="7" name="Text 5"/>
+          <p:cNvSpPr/>
+          <p:nvPr/>
+        </p:nvSpPr>
+        <p:spPr>
+          <a:xfrm>
+            <a:off x="11137392" y="6510528"/>
+            <a:ext cx="411480" cy="201168"/>
+          </a:xfrm>
+          <a:prstGeom prst="rect">
+            <a:avLst/>
+          </a:prstGeom>
+          <a:noFill/>
+          <a:ln/>
+        </p:spPr>
+        <p:txBody>
+          <a:bodyPr wrap="square" lIns="0" tIns="0" rIns="0" bIns="0" rtlCol="0" anchor="ctr"/>
+          <a:lstStyle/>
+          <a:p>
+            <a:pPr algn="r" indent="0" marL="0">
+              <a:buNone/>
+            </a:pPr>
+            <a:r>
+              <a:rPr lang="en-US" sz="900" dirty="0">
+                <a:solidFill>
+                  <a:srgbClr val="5F7181"/>
+                </a:solidFill>
+                <a:latin typeface="Aptos" pitchFamily="34" charset="0"/>
+                <a:ea typeface="Aptos" pitchFamily="34" charset="-122"/>
+                <a:cs typeface="Aptos" pitchFamily="34" charset="-120"/>
+              </a:rPr>
+              <a:t>20</a:t>
+            </a:r>
+            <a:endParaRPr lang="en-US" sz="900" dirty="0"/>
+          </a:p>
+        </p:txBody>
+      </p:sp>
+      <p:sp>
+        <p:nvSpPr>
+          <p:cNvPr id="8" name="Shape 6"/>
           <p:cNvSpPr/>
           <p:nvPr/>
         </p:nvSpPr>
@@ -9673,7 +10229,7 @@
       </p:sp>
       <p:sp>
         <p:nvSpPr>
-          <p:cNvPr id="8" name="Text 6"/>
+          <p:cNvPr id="9" name="Text 7"/>
           <p:cNvSpPr/>
           <p:nvPr/>
         </p:nvSpPr>
@@ -9712,14 +10268,14 @@
       </p:sp>
       <p:sp>
         <p:nvSpPr>
-          <p:cNvPr id="9" name="Text 7"/>
+          <p:cNvPr id="10" name="Text 8"/>
           <p:cNvSpPr/>
           <p:nvPr/>
         </p:nvSpPr>
         <p:spPr>
           <a:xfrm>
             <a:off x="640080" y="621792"/>
-            <a:ext cx="10881360" cy="566928"/>
+            <a:ext cx="10881360" cy="713232"/>
           </a:xfrm>
           <a:prstGeom prst="rect">
             <a:avLst/>
@@ -9737,7 +10293,7 @@
               <a:buNone/>
             </a:pPr>
             <a:r>
-              <a:rPr lang="en-US" sz="2700" b="1" dirty="0">
+              <a:rPr lang="en-US" sz="3400" b="1" dirty="0">
                 <a:solidFill>
                   <a:srgbClr val="003A63"/>
                 </a:solidFill>
@@ -9747,20 +10303,20 @@
               </a:rPr>
               <a:t>Expected Artifact or Evidence</a:t>
             </a:r>
-            <a:endParaRPr lang="en-US" sz="2700" dirty="0"/>
-          </a:p>
-        </p:txBody>
-      </p:sp>
-      <p:sp>
-        <p:nvSpPr>
-          <p:cNvPr id="10" name="Text 8"/>
-          <p:cNvSpPr/>
-          <p:nvPr/>
-        </p:nvSpPr>
-        <p:spPr>
-          <a:xfrm>
-            <a:off x="868680" y="1417320"/>
-            <a:ext cx="6675120" cy="4434840"/>
+            <a:endParaRPr lang="en-US" sz="3400" dirty="0"/>
+          </a:p>
+        </p:txBody>
+      </p:sp>
+      <p:sp>
+        <p:nvSpPr>
+          <p:cNvPr id="11" name="Text 9"/>
+          <p:cNvSpPr/>
+          <p:nvPr/>
+        </p:nvSpPr>
+        <p:spPr>
+          <a:xfrm>
+            <a:off x="868680" y="1508760"/>
+            <a:ext cx="6537960" cy="4160520"/>
           </a:xfrm>
           <a:prstGeom prst="rect">
             <a:avLst/>
@@ -9775,7 +10331,7 @@
           <a:lstStyle/>
           <a:p>
             <a:r>
-              <a:rPr lang="en-US" sz="1700" dirty="0">
+              <a:rPr lang="en-US" sz="2100" dirty="0">
                 <a:solidFill>
                   <a:srgbClr val="17364A"/>
                 </a:solidFill>
@@ -9785,11 +10341,11 @@
               </a:rPr>
               <a:t>The expected artifact is an AI-enabled workflow architecture map.</a:t>
             </a:r>
-            <a:endParaRPr lang="en-US" sz="1700" dirty="0"/>
-          </a:p>
-          <a:p>
-            <a:r>
-              <a:rPr lang="en-US" sz="1700" dirty="0">
+            <a:endParaRPr lang="en-US" sz="2100" dirty="0"/>
+          </a:p>
+          <a:p>
+            <a:r>
+              <a:rPr lang="en-US" sz="2100" dirty="0">
                 <a:solidFill>
                   <a:srgbClr val="17364A"/>
                 </a:solidFill>
@@ -9797,13 +10353,13 @@
                 <a:ea typeface="Aptos" pitchFamily="34" charset="-122"/>
                 <a:cs typeface="Aptos" pitchFamily="34" charset="-120"/>
               </a:rPr>
-              <a:t>The evidence should also include a short readiness memo that identifies technical dependencies, governance questions, human.</a:t>
-            </a:r>
-            <a:endParaRPr lang="en-US" sz="1700" dirty="0"/>
-          </a:p>
-          <a:p>
-            <a:r>
-              <a:rPr lang="en-US" sz="1700" dirty="0">
+              <a:t>The evidence should also include a short readiness memo that identifies technical dependencies,.</a:t>
+            </a:r>
+            <a:endParaRPr lang="en-US" sz="2100" dirty="0"/>
+          </a:p>
+          <a:p>
+            <a:r>
+              <a:rPr lang="en-US" sz="2100" dirty="0">
                 <a:solidFill>
                   <a:srgbClr val="17364A"/>
                 </a:solidFill>
@@ -9811,29 +10367,15 @@
                 <a:ea typeface="Aptos" pitchFamily="34" charset="-122"/>
                 <a:cs typeface="Aptos" pitchFamily="34" charset="-120"/>
               </a:rPr>
-              <a:t>A strong completion artifact should be specific enough to support governance review, implementation planning, procurement,.</a:t>
-            </a:r>
-            <a:endParaRPr lang="en-US" sz="1700" dirty="0"/>
-          </a:p>
-          <a:p>
-            <a:r>
-              <a:rPr lang="en-US" sz="1700" dirty="0">
-                <a:solidFill>
-                  <a:srgbClr val="17364A"/>
-                </a:solidFill>
-                <a:latin typeface="Aptos" pitchFamily="34" charset="0"/>
-                <a:ea typeface="Aptos" pitchFamily="34" charset="-122"/>
-                <a:cs typeface="Aptos" pitchFamily="34" charset="-120"/>
-              </a:rPr>
-              <a:t>It should not simply state that AI may be useful.</a:t>
-            </a:r>
-            <a:endParaRPr lang="en-US" sz="1700" dirty="0"/>
-          </a:p>
-        </p:txBody>
-      </p:sp>
-      <p:sp>
-        <p:nvSpPr>
-          <p:cNvPr id="11" name="Shape 9"/>
+              <a:t>A strong completion artifact should be specific enough to support governance review, implementation.</a:t>
+            </a:r>
+            <a:endParaRPr lang="en-US" sz="2100" dirty="0"/>
+          </a:p>
+        </p:txBody>
+      </p:sp>
+      <p:sp>
+        <p:nvSpPr>
+          <p:cNvPr id="12" name="Shape 10"/>
           <p:cNvSpPr/>
           <p:nvPr/>
         </p:nvSpPr>
@@ -9860,14 +10402,14 @@
       </p:sp>
       <p:sp>
         <p:nvSpPr>
-          <p:cNvPr id="12" name="Text 10"/>
+          <p:cNvPr id="13" name="Text 11"/>
           <p:cNvSpPr/>
           <p:nvPr/>
         </p:nvSpPr>
         <p:spPr>
           <a:xfrm>
             <a:off x="8074152" y="1563624"/>
-            <a:ext cx="2825496" cy="201168"/>
+            <a:ext cx="2825496" cy="256032"/>
           </a:xfrm>
           <a:prstGeom prst="rect">
             <a:avLst/>
@@ -9883,7 +10425,7 @@
               <a:buNone/>
             </a:pPr>
             <a:r>
-              <a:rPr lang="en-US" sz="950" b="1" dirty="0">
+              <a:rPr lang="en-US" sz="1300" b="1" dirty="0">
                 <a:solidFill>
                   <a:srgbClr val="0068B7"/>
                 </a:solidFill>
@@ -9893,20 +10435,20 @@
               </a:rPr>
               <a:t>Key idea</a:t>
             </a:r>
-            <a:endParaRPr lang="en-US" sz="950" dirty="0"/>
-          </a:p>
-        </p:txBody>
-      </p:sp>
-      <p:sp>
-        <p:nvSpPr>
-          <p:cNvPr id="13" name="Text 11"/>
-          <p:cNvSpPr/>
-          <p:nvPr/>
-        </p:nvSpPr>
-        <p:spPr>
-          <a:xfrm>
-            <a:off x="8074152" y="1856232"/>
-            <a:ext cx="2825496" cy="1261872"/>
+            <a:endParaRPr lang="en-US" sz="1300" dirty="0"/>
+          </a:p>
+        </p:txBody>
+      </p:sp>
+      <p:sp>
+        <p:nvSpPr>
+          <p:cNvPr id="14" name="Text 12"/>
+          <p:cNvSpPr/>
+          <p:nvPr/>
+        </p:nvSpPr>
+        <p:spPr>
+          <a:xfrm>
+            <a:off x="8074152" y="1920240"/>
+            <a:ext cx="2825496" cy="1188720"/>
           </a:xfrm>
           <a:prstGeom prst="rect">
             <a:avLst/>
@@ -9924,7 +10466,7 @@
               <a:buNone/>
             </a:pPr>
             <a:r>
-              <a:rPr lang="en-US" sz="1250" dirty="0">
+              <a:rPr lang="en-US" sz="1550" dirty="0">
                 <a:solidFill>
                   <a:srgbClr val="17364A"/>
                 </a:solidFill>
@@ -9934,13 +10476,13 @@
               </a:rPr>
               <a:t>The expected artifact is an AI-enabled workflow architecture map.</a:t>
             </a:r>
-            <a:endParaRPr lang="en-US" sz="1250" dirty="0"/>
-          </a:p>
-        </p:txBody>
-      </p:sp>
-      <p:sp>
-        <p:nvSpPr>
-          <p:cNvPr id="14" name="Shape 12"/>
+            <a:endParaRPr lang="en-US" sz="1550" dirty="0"/>
+          </a:p>
+        </p:txBody>
+      </p:sp>
+      <p:sp>
+        <p:nvSpPr>
+          <p:cNvPr id="15" name="Shape 13"/>
           <p:cNvSpPr/>
           <p:nvPr/>
         </p:nvSpPr>
@@ -9967,14 +10509,14 @@
       </p:sp>
       <p:sp>
         <p:nvSpPr>
-          <p:cNvPr id="15" name="Text 13"/>
+          <p:cNvPr id="16" name="Text 14"/>
           <p:cNvSpPr/>
           <p:nvPr/>
         </p:nvSpPr>
         <p:spPr>
           <a:xfrm>
             <a:off x="8074152" y="3666744"/>
-            <a:ext cx="2825496" cy="201168"/>
+            <a:ext cx="2825496" cy="256032"/>
           </a:xfrm>
           <a:prstGeom prst="rect">
             <a:avLst/>
@@ -9990,7 +10532,7 @@
               <a:buNone/>
             </a:pPr>
             <a:r>
-              <a:rPr lang="en-US" sz="950" b="1" dirty="0">
+              <a:rPr lang="en-US" sz="1300" b="1" dirty="0">
                 <a:solidFill>
                   <a:srgbClr val="0068B7"/>
                 </a:solidFill>
@@ -10000,20 +10542,20 @@
               </a:rPr>
               <a:t>Use this for</a:t>
             </a:r>
-            <a:endParaRPr lang="en-US" sz="950" dirty="0"/>
-          </a:p>
-        </p:txBody>
-      </p:sp>
-      <p:sp>
-        <p:nvSpPr>
-          <p:cNvPr id="16" name="Text 14"/>
-          <p:cNvSpPr/>
-          <p:nvPr/>
-        </p:nvSpPr>
-        <p:spPr>
-          <a:xfrm>
-            <a:off x="8074152" y="3959352"/>
-            <a:ext cx="2825496" cy="1170432"/>
+            <a:endParaRPr lang="en-US" sz="1300" dirty="0"/>
+          </a:p>
+        </p:txBody>
+      </p:sp>
+      <p:sp>
+        <p:nvSpPr>
+          <p:cNvPr id="17" name="Text 15"/>
+          <p:cNvSpPr/>
+          <p:nvPr/>
+        </p:nvSpPr>
+        <p:spPr>
+          <a:xfrm>
+            <a:off x="8074152" y="4023360"/>
+            <a:ext cx="2825496" cy="1097280"/>
           </a:xfrm>
           <a:prstGeom prst="rect">
             <a:avLst/>
@@ -10031,7 +10573,7 @@
               <a:buNone/>
             </a:pPr>
             <a:r>
-              <a:rPr lang="en-US" sz="1250" dirty="0">
+              <a:rPr lang="en-US" sz="1550" dirty="0">
                 <a:solidFill>
                   <a:srgbClr val="17364A"/>
                 </a:solidFill>
@@ -10041,7 +10583,7 @@
               </a:rPr>
               <a:t>Connect the concept to public health decisions, safeguards, documentation, or implementation work.</a:t>
             </a:r>
-            <a:endParaRPr lang="en-US" sz="1250" dirty="0"/>
+            <a:endParaRPr lang="en-US" sz="1550" dirty="0"/>
           </a:p>
         </p:txBody>
       </p:sp>
@@ -10238,7 +10780,7 @@
                 <a:ea typeface="Aptos" pitchFamily="34" charset="-122"/>
                 <a:cs typeface="Aptos" pitchFamily="34" charset="-120"/>
               </a:rPr>
-              <a:t>© Paula Soper</a:t>
+              <a:t>Â© Paula Soper</a:t>
             </a:r>
             <a:endParaRPr lang="en-US" sz="800" dirty="0"/>
           </a:p>
@@ -10246,7 +10788,46 @@
       </p:sp>
       <p:sp>
         <p:nvSpPr>
-          <p:cNvPr id="7" name="Shape 5"/>
+          <p:cNvPr id="7" name="Text 5"/>
+          <p:cNvSpPr/>
+          <p:nvPr/>
+        </p:nvSpPr>
+        <p:spPr>
+          <a:xfrm>
+            <a:off x="11137392" y="6510528"/>
+            <a:ext cx="411480" cy="201168"/>
+          </a:xfrm>
+          <a:prstGeom prst="rect">
+            <a:avLst/>
+          </a:prstGeom>
+          <a:noFill/>
+          <a:ln/>
+        </p:spPr>
+        <p:txBody>
+          <a:bodyPr wrap="square" lIns="0" tIns="0" rIns="0" bIns="0" rtlCol="0" anchor="ctr"/>
+          <a:lstStyle/>
+          <a:p>
+            <a:pPr algn="r" indent="0" marL="0">
+              <a:buNone/>
+            </a:pPr>
+            <a:r>
+              <a:rPr lang="en-US" sz="900" dirty="0">
+                <a:solidFill>
+                  <a:srgbClr val="5F7181"/>
+                </a:solidFill>
+                <a:latin typeface="Aptos" pitchFamily="34" charset="0"/>
+                <a:ea typeface="Aptos" pitchFamily="34" charset="-122"/>
+                <a:cs typeface="Aptos" pitchFamily="34" charset="-120"/>
+              </a:rPr>
+              <a:t>21</a:t>
+            </a:r>
+            <a:endParaRPr lang="en-US" sz="900" dirty="0"/>
+          </a:p>
+        </p:txBody>
+      </p:sp>
+      <p:sp>
+        <p:nvSpPr>
+          <p:cNvPr id="8" name="Shape 6"/>
           <p:cNvSpPr/>
           <p:nvPr/>
         </p:nvSpPr>
@@ -10271,7 +10852,7 @@
       </p:sp>
       <p:sp>
         <p:nvSpPr>
-          <p:cNvPr id="8" name="Text 6"/>
+          <p:cNvPr id="9" name="Text 7"/>
           <p:cNvSpPr/>
           <p:nvPr/>
         </p:nvSpPr>
@@ -10310,14 +10891,14 @@
       </p:sp>
       <p:sp>
         <p:nvSpPr>
-          <p:cNvPr id="9" name="Text 7"/>
+          <p:cNvPr id="10" name="Text 8"/>
           <p:cNvSpPr/>
           <p:nvPr/>
         </p:nvSpPr>
         <p:spPr>
           <a:xfrm>
             <a:off x="640080" y="621792"/>
-            <a:ext cx="10881360" cy="566928"/>
+            <a:ext cx="10881360" cy="713232"/>
           </a:xfrm>
           <a:prstGeom prst="rect">
             <a:avLst/>
@@ -10335,7 +10916,7 @@
               <a:buNone/>
             </a:pPr>
             <a:r>
-              <a:rPr lang="en-US" sz="2700" b="1" dirty="0">
+              <a:rPr lang="en-US" sz="3400" b="1" dirty="0">
                 <a:solidFill>
                   <a:srgbClr val="003A63"/>
                 </a:solidFill>
@@ -10345,20 +10926,20 @@
               </a:rPr>
               <a:t>Expected Assignment</a:t>
             </a:r>
-            <a:endParaRPr lang="en-US" sz="2700" dirty="0"/>
-          </a:p>
-        </p:txBody>
-      </p:sp>
-      <p:sp>
-        <p:nvSpPr>
-          <p:cNvPr id="10" name="Text 8"/>
-          <p:cNvSpPr/>
-          <p:nvPr/>
-        </p:nvSpPr>
-        <p:spPr>
-          <a:xfrm>
-            <a:off x="868680" y="1417320"/>
-            <a:ext cx="6675120" cy="4434840"/>
+            <a:endParaRPr lang="en-US" sz="3400" dirty="0"/>
+          </a:p>
+        </p:txBody>
+      </p:sp>
+      <p:sp>
+        <p:nvSpPr>
+          <p:cNvPr id="11" name="Text 9"/>
+          <p:cNvSpPr/>
+          <p:nvPr/>
+        </p:nvSpPr>
+        <p:spPr>
+          <a:xfrm>
+            <a:off x="868680" y="1508760"/>
+            <a:ext cx="6537960" cy="4160520"/>
           </a:xfrm>
           <a:prstGeom prst="rect">
             <a:avLst/>
@@ -10373,7 +10954,7 @@
           <a:lstStyle/>
           <a:p>
             <a:r>
-              <a:rPr lang="en-US" sz="1700" dirty="0">
+              <a:rPr lang="en-US" sz="2100" dirty="0">
                 <a:solidFill>
                   <a:srgbClr val="17364A"/>
                 </a:solidFill>
@@ -10381,13 +10962,13 @@
                 <a:ea typeface="Aptos" pitchFamily="34" charset="-122"/>
                 <a:cs typeface="Aptos" pitchFamily="34" charset="-120"/>
               </a:rPr>
-              <a:t>The expected artifact is an AI-enabled workflow architecture map. The evidence should also include a short readiness memo that.</a:t>
-            </a:r>
-            <a:endParaRPr lang="en-US" sz="1700" dirty="0"/>
-          </a:p>
-          <a:p>
-            <a:r>
-              <a:rPr lang="en-US" sz="1700" dirty="0">
+              <a:t>The expected artifact is an AI-enabled workflow architecture map. The evidence should also include a.</a:t>
+            </a:r>
+            <a:endParaRPr lang="en-US" sz="2100" dirty="0"/>
+          </a:p>
+          <a:p>
+            <a:r>
+              <a:rPr lang="en-US" sz="2100" dirty="0">
                 <a:solidFill>
                   <a:srgbClr val="17364A"/>
                 </a:solidFill>
@@ -10395,15 +10976,15 @@
                 <a:ea typeface="Aptos" pitchFamily="34" charset="-122"/>
                 <a:cs typeface="Aptos" pitchFamily="34" charset="-120"/>
               </a:rPr>
-              <a:t>A strong completion artifact should be specific enough to support governance review, implementation planning, procurement, or.</a:t>
-            </a:r>
-            <a:endParaRPr lang="en-US" sz="1700" dirty="0"/>
-          </a:p>
-        </p:txBody>
-      </p:sp>
-      <p:sp>
-        <p:nvSpPr>
-          <p:cNvPr id="11" name="Shape 9"/>
+              <a:t>A strong completion artifact should be specific enough to support governance review, implementation.</a:t>
+            </a:r>
+            <a:endParaRPr lang="en-US" sz="2100" dirty="0"/>
+          </a:p>
+        </p:txBody>
+      </p:sp>
+      <p:sp>
+        <p:nvSpPr>
+          <p:cNvPr id="12" name="Shape 10"/>
           <p:cNvSpPr/>
           <p:nvPr/>
         </p:nvSpPr>
@@ -10430,14 +11011,14 @@
       </p:sp>
       <p:sp>
         <p:nvSpPr>
-          <p:cNvPr id="12" name="Text 10"/>
+          <p:cNvPr id="13" name="Text 11"/>
           <p:cNvSpPr/>
           <p:nvPr/>
         </p:nvSpPr>
         <p:spPr>
           <a:xfrm>
             <a:off x="8074152" y="1563624"/>
-            <a:ext cx="2825496" cy="201168"/>
+            <a:ext cx="2825496" cy="256032"/>
           </a:xfrm>
           <a:prstGeom prst="rect">
             <a:avLst/>
@@ -10453,7 +11034,7 @@
               <a:buNone/>
             </a:pPr>
             <a:r>
-              <a:rPr lang="en-US" sz="950" b="1" dirty="0">
+              <a:rPr lang="en-US" sz="1300" b="1" dirty="0">
                 <a:solidFill>
                   <a:srgbClr val="0068B7"/>
                 </a:solidFill>
@@ -10463,20 +11044,20 @@
               </a:rPr>
               <a:t>Key idea</a:t>
             </a:r>
-            <a:endParaRPr lang="en-US" sz="950" dirty="0"/>
-          </a:p>
-        </p:txBody>
-      </p:sp>
-      <p:sp>
-        <p:nvSpPr>
-          <p:cNvPr id="13" name="Text 11"/>
-          <p:cNvSpPr/>
-          <p:nvPr/>
-        </p:nvSpPr>
-        <p:spPr>
-          <a:xfrm>
-            <a:off x="8074152" y="1856232"/>
-            <a:ext cx="2825496" cy="1261872"/>
+            <a:endParaRPr lang="en-US" sz="1300" dirty="0"/>
+          </a:p>
+        </p:txBody>
+      </p:sp>
+      <p:sp>
+        <p:nvSpPr>
+          <p:cNvPr id="14" name="Text 12"/>
+          <p:cNvSpPr/>
+          <p:nvPr/>
+        </p:nvSpPr>
+        <p:spPr>
+          <a:xfrm>
+            <a:off x="8074152" y="1920240"/>
+            <a:ext cx="2825496" cy="1188720"/>
           </a:xfrm>
           <a:prstGeom prst="rect">
             <a:avLst/>
@@ -10494,7 +11075,7 @@
               <a:buNone/>
             </a:pPr>
             <a:r>
-              <a:rPr lang="en-US" sz="1250" dirty="0">
+              <a:rPr lang="en-US" sz="1550" dirty="0">
                 <a:solidFill>
                   <a:srgbClr val="17364A"/>
                 </a:solidFill>
@@ -10502,15 +11083,15 @@
                 <a:ea typeface="Aptos" pitchFamily="34" charset="-122"/>
                 <a:cs typeface="Aptos" pitchFamily="34" charset="-120"/>
               </a:rPr>
-              <a:t>The expected artifact is an AI-enabled workflow architecture map. The evidence should also include a short readiness memo that.</a:t>
-            </a:r>
-            <a:endParaRPr lang="en-US" sz="1250" dirty="0"/>
-          </a:p>
-        </p:txBody>
-      </p:sp>
-      <p:sp>
-        <p:nvSpPr>
-          <p:cNvPr id="14" name="Shape 12"/>
+              <a:t>The expected artifact is an AI-enabled workflow architecture map. The evidence should also include a.</a:t>
+            </a:r>
+            <a:endParaRPr lang="en-US" sz="1550" dirty="0"/>
+          </a:p>
+        </p:txBody>
+      </p:sp>
+      <p:sp>
+        <p:nvSpPr>
+          <p:cNvPr id="15" name="Shape 13"/>
           <p:cNvSpPr/>
           <p:nvPr/>
         </p:nvSpPr>
@@ -10537,14 +11118,14 @@
       </p:sp>
       <p:sp>
         <p:nvSpPr>
-          <p:cNvPr id="15" name="Text 13"/>
+          <p:cNvPr id="16" name="Text 14"/>
           <p:cNvSpPr/>
           <p:nvPr/>
         </p:nvSpPr>
         <p:spPr>
           <a:xfrm>
             <a:off x="8074152" y="3666744"/>
-            <a:ext cx="2825496" cy="201168"/>
+            <a:ext cx="2825496" cy="256032"/>
           </a:xfrm>
           <a:prstGeom prst="rect">
             <a:avLst/>
@@ -10560,7 +11141,7 @@
               <a:buNone/>
             </a:pPr>
             <a:r>
-              <a:rPr lang="en-US" sz="950" b="1" dirty="0">
+              <a:rPr lang="en-US" sz="1300" b="1" dirty="0">
                 <a:solidFill>
                   <a:srgbClr val="0068B7"/>
                 </a:solidFill>
@@ -10570,20 +11151,20 @@
               </a:rPr>
               <a:t>Use this for</a:t>
             </a:r>
-            <a:endParaRPr lang="en-US" sz="950" dirty="0"/>
-          </a:p>
-        </p:txBody>
-      </p:sp>
-      <p:sp>
-        <p:nvSpPr>
-          <p:cNvPr id="16" name="Text 14"/>
-          <p:cNvSpPr/>
-          <p:nvPr/>
-        </p:nvSpPr>
-        <p:spPr>
-          <a:xfrm>
-            <a:off x="8074152" y="3959352"/>
-            <a:ext cx="2825496" cy="1170432"/>
+            <a:endParaRPr lang="en-US" sz="1300" dirty="0"/>
+          </a:p>
+        </p:txBody>
+      </p:sp>
+      <p:sp>
+        <p:nvSpPr>
+          <p:cNvPr id="17" name="Text 15"/>
+          <p:cNvSpPr/>
+          <p:nvPr/>
+        </p:nvSpPr>
+        <p:spPr>
+          <a:xfrm>
+            <a:off x="8074152" y="4023360"/>
+            <a:ext cx="2825496" cy="1097280"/>
           </a:xfrm>
           <a:prstGeom prst="rect">
             <a:avLst/>
@@ -10601,7 +11182,7 @@
               <a:buNone/>
             </a:pPr>
             <a:r>
-              <a:rPr lang="en-US" sz="1250" dirty="0">
+              <a:rPr lang="en-US" sz="1550" dirty="0">
                 <a:solidFill>
                   <a:srgbClr val="17364A"/>
                 </a:solidFill>
@@ -10611,7 +11192,7 @@
               </a:rPr>
               <a:t>Connect the concept to public health decisions, safeguards, documentation, or implementation work.</a:t>
             </a:r>
-            <a:endParaRPr lang="en-US" sz="1250" dirty="0"/>
+            <a:endParaRPr lang="en-US" sz="1550" dirty="0"/>
           </a:p>
         </p:txBody>
       </p:sp>
@@ -10808,7 +11389,7 @@
                 <a:ea typeface="Aptos" pitchFamily="34" charset="-122"/>
                 <a:cs typeface="Aptos" pitchFamily="34" charset="-120"/>
               </a:rPr>
-              <a:t>© Paula Soper</a:t>
+              <a:t>Â© Paula Soper</a:t>
             </a:r>
             <a:endParaRPr lang="en-US" sz="800" dirty="0"/>
           </a:p>
@@ -10816,7 +11397,46 @@
       </p:sp>
       <p:sp>
         <p:nvSpPr>
-          <p:cNvPr id="7" name="Shape 5"/>
+          <p:cNvPr id="7" name="Text 5"/>
+          <p:cNvSpPr/>
+          <p:nvPr/>
+        </p:nvSpPr>
+        <p:spPr>
+          <a:xfrm>
+            <a:off x="11137392" y="6510528"/>
+            <a:ext cx="411480" cy="201168"/>
+          </a:xfrm>
+          <a:prstGeom prst="rect">
+            <a:avLst/>
+          </a:prstGeom>
+          <a:noFill/>
+          <a:ln/>
+        </p:spPr>
+        <p:txBody>
+          <a:bodyPr wrap="square" lIns="0" tIns="0" rIns="0" bIns="0" rtlCol="0" anchor="ctr"/>
+          <a:lstStyle/>
+          <a:p>
+            <a:pPr algn="r" indent="0" marL="0">
+              <a:buNone/>
+            </a:pPr>
+            <a:r>
+              <a:rPr lang="en-US" sz="900" dirty="0">
+                <a:solidFill>
+                  <a:srgbClr val="5F7181"/>
+                </a:solidFill>
+                <a:latin typeface="Aptos" pitchFamily="34" charset="0"/>
+                <a:ea typeface="Aptos" pitchFamily="34" charset="-122"/>
+                <a:cs typeface="Aptos" pitchFamily="34" charset="-120"/>
+              </a:rPr>
+              <a:t>22</a:t>
+            </a:r>
+            <a:endParaRPr lang="en-US" sz="900" dirty="0"/>
+          </a:p>
+        </p:txBody>
+      </p:sp>
+      <p:sp>
+        <p:nvSpPr>
+          <p:cNvPr id="8" name="Shape 6"/>
           <p:cNvSpPr/>
           <p:nvPr/>
         </p:nvSpPr>
@@ -10841,7 +11461,7 @@
       </p:sp>
       <p:sp>
         <p:nvSpPr>
-          <p:cNvPr id="8" name="Text 6"/>
+          <p:cNvPr id="9" name="Text 7"/>
           <p:cNvSpPr/>
           <p:nvPr/>
         </p:nvSpPr>
@@ -10880,14 +11500,14 @@
       </p:sp>
       <p:sp>
         <p:nvSpPr>
-          <p:cNvPr id="9" name="Text 7"/>
+          <p:cNvPr id="10" name="Text 8"/>
           <p:cNvSpPr/>
           <p:nvPr/>
         </p:nvSpPr>
         <p:spPr>
           <a:xfrm>
             <a:off x="640080" y="621792"/>
-            <a:ext cx="10881360" cy="566928"/>
+            <a:ext cx="10881360" cy="713232"/>
           </a:xfrm>
           <a:prstGeom prst="rect">
             <a:avLst/>
@@ -10905,7 +11525,7 @@
               <a:buNone/>
             </a:pPr>
             <a:r>
-              <a:rPr lang="en-US" sz="2700" b="1" dirty="0">
+              <a:rPr lang="en-US" sz="3400" b="1" dirty="0">
                 <a:solidFill>
                   <a:srgbClr val="003A63"/>
                 </a:solidFill>
@@ -10915,20 +11535,20 @@
               </a:rPr>
               <a:t>Knowledge Check</a:t>
             </a:r>
-            <a:endParaRPr lang="en-US" sz="2700" dirty="0"/>
-          </a:p>
-        </p:txBody>
-      </p:sp>
-      <p:sp>
-        <p:nvSpPr>
-          <p:cNvPr id="10" name="Text 8"/>
-          <p:cNvSpPr/>
-          <p:nvPr/>
-        </p:nvSpPr>
-        <p:spPr>
-          <a:xfrm>
-            <a:off x="868680" y="1417320"/>
-            <a:ext cx="6675120" cy="4434840"/>
+            <a:endParaRPr lang="en-US" sz="3400" dirty="0"/>
+          </a:p>
+        </p:txBody>
+      </p:sp>
+      <p:sp>
+        <p:nvSpPr>
+          <p:cNvPr id="11" name="Text 9"/>
+          <p:cNvSpPr/>
+          <p:nvPr/>
+        </p:nvSpPr>
+        <p:spPr>
+          <a:xfrm>
+            <a:off x="868680" y="1508760"/>
+            <a:ext cx="6537960" cy="4160520"/>
           </a:xfrm>
           <a:prstGeom prst="rect">
             <a:avLst/>
@@ -10943,7 +11563,7 @@
           <a:lstStyle/>
           <a:p>
             <a:r>
-              <a:rPr lang="en-US" sz="1700" dirty="0">
+              <a:rPr lang="en-US" sz="2100" dirty="0">
                 <a:solidFill>
                   <a:srgbClr val="17364A"/>
                 </a:solidFill>
@@ -10953,11 +11573,11 @@
               </a:rPr>
               <a:t>1. Why should AI planning begin with architecture and workflow mapping?</a:t>
             </a:r>
-            <a:endParaRPr lang="en-US" sz="1700" dirty="0"/>
-          </a:p>
-          <a:p>
-            <a:r>
-              <a:rPr lang="en-US" sz="1700" dirty="0">
+            <a:endParaRPr lang="en-US" sz="2100" dirty="0"/>
+          </a:p>
+          <a:p>
+            <a:r>
+              <a:rPr lang="en-US" sz="2100" dirty="0">
                 <a:solidFill>
                   <a:srgbClr val="17364A"/>
                 </a:solidFill>
@@ -10967,11 +11587,11 @@
               </a:rPr>
               <a:t>2. What is the role of a system of record in an AI-supported workflow?</a:t>
             </a:r>
-            <a:endParaRPr lang="en-US" sz="1700" dirty="0"/>
-          </a:p>
-          <a:p>
-            <a:r>
-              <a:rPr lang="en-US" sz="1700" dirty="0">
+            <a:endParaRPr lang="en-US" sz="2100" dirty="0"/>
+          </a:p>
+          <a:p>
+            <a:r>
+              <a:rPr lang="en-US" sz="2100" dirty="0">
                 <a:solidFill>
                   <a:srgbClr val="17364A"/>
                 </a:solidFill>
@@ -10981,27 +11601,13 @@
               </a:rPr>
               <a:t>3. Which risk is most likely when staff cannot explain how data move through a workflow?</a:t>
             </a:r>
-            <a:endParaRPr lang="en-US" sz="1700" dirty="0"/>
-          </a:p>
-          <a:p>
-            <a:r>
-              <a:rPr lang="en-US" sz="1700" dirty="0">
-                <a:solidFill>
-                  <a:srgbClr val="17364A"/>
-                </a:solidFill>
-                <a:latin typeface="Aptos" pitchFamily="34" charset="0"/>
-                <a:ea typeface="Aptos" pitchFamily="34" charset="-122"/>
-                <a:cs typeface="Aptos" pitchFamily="34" charset="-120"/>
-              </a:rPr>
-              <a:t>4. What is an appropriate guardrail for an AI tool that can update a public health system?</a:t>
-            </a:r>
-            <a:endParaRPr lang="en-US" sz="1700" dirty="0"/>
-          </a:p>
-        </p:txBody>
-      </p:sp>
-      <p:sp>
-        <p:nvSpPr>
-          <p:cNvPr id="11" name="Shape 9"/>
+            <a:endParaRPr lang="en-US" sz="2100" dirty="0"/>
+          </a:p>
+        </p:txBody>
+      </p:sp>
+      <p:sp>
+        <p:nvSpPr>
+          <p:cNvPr id="12" name="Shape 10"/>
           <p:cNvSpPr/>
           <p:nvPr/>
         </p:nvSpPr>
@@ -11028,14 +11634,14 @@
       </p:sp>
       <p:sp>
         <p:nvSpPr>
-          <p:cNvPr id="12" name="Text 10"/>
+          <p:cNvPr id="13" name="Text 11"/>
           <p:cNvSpPr/>
           <p:nvPr/>
         </p:nvSpPr>
         <p:spPr>
           <a:xfrm>
             <a:off x="8074152" y="1563624"/>
-            <a:ext cx="2825496" cy="201168"/>
+            <a:ext cx="2825496" cy="256032"/>
           </a:xfrm>
           <a:prstGeom prst="rect">
             <a:avLst/>
@@ -11051,7 +11657,7 @@
               <a:buNone/>
             </a:pPr>
             <a:r>
-              <a:rPr lang="en-US" sz="950" b="1" dirty="0">
+              <a:rPr lang="en-US" sz="1300" b="1" dirty="0">
                 <a:solidFill>
                   <a:srgbClr val="0068B7"/>
                 </a:solidFill>
@@ -11061,20 +11667,20 @@
               </a:rPr>
               <a:t>Key idea</a:t>
             </a:r>
-            <a:endParaRPr lang="en-US" sz="950" dirty="0"/>
-          </a:p>
-        </p:txBody>
-      </p:sp>
-      <p:sp>
-        <p:nvSpPr>
-          <p:cNvPr id="13" name="Text 11"/>
-          <p:cNvSpPr/>
-          <p:nvPr/>
-        </p:nvSpPr>
-        <p:spPr>
-          <a:xfrm>
-            <a:off x="8074152" y="1856232"/>
-            <a:ext cx="2825496" cy="1261872"/>
+            <a:endParaRPr lang="en-US" sz="1300" dirty="0"/>
+          </a:p>
+        </p:txBody>
+      </p:sp>
+      <p:sp>
+        <p:nvSpPr>
+          <p:cNvPr id="14" name="Text 12"/>
+          <p:cNvSpPr/>
+          <p:nvPr/>
+        </p:nvSpPr>
+        <p:spPr>
+          <a:xfrm>
+            <a:off x="8074152" y="1920240"/>
+            <a:ext cx="2825496" cy="1188720"/>
           </a:xfrm>
           <a:prstGeom prst="rect">
             <a:avLst/>
@@ -11092,7 +11698,7 @@
               <a:buNone/>
             </a:pPr>
             <a:r>
-              <a:rPr lang="en-US" sz="1250" dirty="0">
+              <a:rPr lang="en-US" sz="1550" dirty="0">
                 <a:solidFill>
                   <a:srgbClr val="17364A"/>
                 </a:solidFill>
@@ -11102,13 +11708,13 @@
               </a:rPr>
               <a:t>1. Why should AI planning begin with architecture and workflow mapping?</a:t>
             </a:r>
-            <a:endParaRPr lang="en-US" sz="1250" dirty="0"/>
-          </a:p>
-        </p:txBody>
-      </p:sp>
-      <p:sp>
-        <p:nvSpPr>
-          <p:cNvPr id="14" name="Shape 12"/>
+            <a:endParaRPr lang="en-US" sz="1550" dirty="0"/>
+          </a:p>
+        </p:txBody>
+      </p:sp>
+      <p:sp>
+        <p:nvSpPr>
+          <p:cNvPr id="15" name="Shape 13"/>
           <p:cNvSpPr/>
           <p:nvPr/>
         </p:nvSpPr>
@@ -11135,14 +11741,14 @@
       </p:sp>
       <p:sp>
         <p:nvSpPr>
-          <p:cNvPr id="15" name="Text 13"/>
+          <p:cNvPr id="16" name="Text 14"/>
           <p:cNvSpPr/>
           <p:nvPr/>
         </p:nvSpPr>
         <p:spPr>
           <a:xfrm>
             <a:off x="8074152" y="3666744"/>
-            <a:ext cx="2825496" cy="201168"/>
+            <a:ext cx="2825496" cy="256032"/>
           </a:xfrm>
           <a:prstGeom prst="rect">
             <a:avLst/>
@@ -11158,7 +11764,7 @@
               <a:buNone/>
             </a:pPr>
             <a:r>
-              <a:rPr lang="en-US" sz="950" b="1" dirty="0">
+              <a:rPr lang="en-US" sz="1300" b="1" dirty="0">
                 <a:solidFill>
                   <a:srgbClr val="0068B7"/>
                 </a:solidFill>
@@ -11168,20 +11774,20 @@
               </a:rPr>
               <a:t>Use this for</a:t>
             </a:r>
-            <a:endParaRPr lang="en-US" sz="950" dirty="0"/>
-          </a:p>
-        </p:txBody>
-      </p:sp>
-      <p:sp>
-        <p:nvSpPr>
-          <p:cNvPr id="16" name="Text 14"/>
-          <p:cNvSpPr/>
-          <p:nvPr/>
-        </p:nvSpPr>
-        <p:spPr>
-          <a:xfrm>
-            <a:off x="8074152" y="3959352"/>
-            <a:ext cx="2825496" cy="1170432"/>
+            <a:endParaRPr lang="en-US" sz="1300" dirty="0"/>
+          </a:p>
+        </p:txBody>
+      </p:sp>
+      <p:sp>
+        <p:nvSpPr>
+          <p:cNvPr id="17" name="Text 15"/>
+          <p:cNvSpPr/>
+          <p:nvPr/>
+        </p:nvSpPr>
+        <p:spPr>
+          <a:xfrm>
+            <a:off x="8074152" y="4023360"/>
+            <a:ext cx="2825496" cy="1097280"/>
           </a:xfrm>
           <a:prstGeom prst="rect">
             <a:avLst/>
@@ -11199,7 +11805,7 @@
               <a:buNone/>
             </a:pPr>
             <a:r>
-              <a:rPr lang="en-US" sz="1250" dirty="0">
+              <a:rPr lang="en-US" sz="1550" dirty="0">
                 <a:solidFill>
                   <a:srgbClr val="17364A"/>
                 </a:solidFill>
@@ -11209,7 +11815,7 @@
               </a:rPr>
               <a:t>Connect the concept to public health decisions, safeguards, documentation, or implementation work.</a:t>
             </a:r>
-            <a:endParaRPr lang="en-US" sz="1250" dirty="0"/>
+            <a:endParaRPr lang="en-US" sz="1550" dirty="0"/>
           </a:p>
         </p:txBody>
       </p:sp>
@@ -11406,7 +12012,7 @@
                 <a:ea typeface="Aptos" pitchFamily="34" charset="-122"/>
                 <a:cs typeface="Aptos" pitchFamily="34" charset="-120"/>
               </a:rPr>
-              <a:t>© Paula Soper</a:t>
+              <a:t>Â© Paula Soper</a:t>
             </a:r>
             <a:endParaRPr lang="en-US" sz="800" dirty="0"/>
           </a:p>
@@ -11414,7 +12020,46 @@
       </p:sp>
       <p:sp>
         <p:nvSpPr>
-          <p:cNvPr id="7" name="Shape 5"/>
+          <p:cNvPr id="7" name="Text 5"/>
+          <p:cNvSpPr/>
+          <p:nvPr/>
+        </p:nvSpPr>
+        <p:spPr>
+          <a:xfrm>
+            <a:off x="11137392" y="6510528"/>
+            <a:ext cx="411480" cy="201168"/>
+          </a:xfrm>
+          <a:prstGeom prst="rect">
+            <a:avLst/>
+          </a:prstGeom>
+          <a:noFill/>
+          <a:ln/>
+        </p:spPr>
+        <p:txBody>
+          <a:bodyPr wrap="square" lIns="0" tIns="0" rIns="0" bIns="0" rtlCol="0" anchor="ctr"/>
+          <a:lstStyle/>
+          <a:p>
+            <a:pPr algn="r" indent="0" marL="0">
+              <a:buNone/>
+            </a:pPr>
+            <a:r>
+              <a:rPr lang="en-US" sz="900" dirty="0">
+                <a:solidFill>
+                  <a:srgbClr val="5F7181"/>
+                </a:solidFill>
+                <a:latin typeface="Aptos" pitchFamily="34" charset="0"/>
+                <a:ea typeface="Aptos" pitchFamily="34" charset="-122"/>
+                <a:cs typeface="Aptos" pitchFamily="34" charset="-120"/>
+              </a:rPr>
+              <a:t>23</a:t>
+            </a:r>
+            <a:endParaRPr lang="en-US" sz="900" dirty="0"/>
+          </a:p>
+        </p:txBody>
+      </p:sp>
+      <p:sp>
+        <p:nvSpPr>
+          <p:cNvPr id="8" name="Shape 6"/>
           <p:cNvSpPr/>
           <p:nvPr/>
         </p:nvSpPr>
@@ -11439,7 +12084,7 @@
       </p:sp>
       <p:sp>
         <p:nvSpPr>
-          <p:cNvPr id="8" name="Text 6"/>
+          <p:cNvPr id="9" name="Text 7"/>
           <p:cNvSpPr/>
           <p:nvPr/>
         </p:nvSpPr>
@@ -11478,14 +12123,14 @@
       </p:sp>
       <p:sp>
         <p:nvSpPr>
-          <p:cNvPr id="9" name="Text 7"/>
+          <p:cNvPr id="10" name="Text 8"/>
           <p:cNvSpPr/>
           <p:nvPr/>
         </p:nvSpPr>
         <p:spPr>
           <a:xfrm>
             <a:off x="640080" y="621792"/>
-            <a:ext cx="10881360" cy="566928"/>
+            <a:ext cx="10881360" cy="713232"/>
           </a:xfrm>
           <a:prstGeom prst="rect">
             <a:avLst/>
@@ -11503,7 +12148,7 @@
               <a:buNone/>
             </a:pPr>
             <a:r>
-              <a:rPr lang="en-US" sz="2700" b="1" dirty="0">
+              <a:rPr lang="en-US" sz="3400" b="1" dirty="0">
                 <a:solidFill>
                   <a:srgbClr val="003A63"/>
                 </a:solidFill>
@@ -11513,20 +12158,20 @@
               </a:rPr>
               <a:t>References and Resources</a:t>
             </a:r>
-            <a:endParaRPr lang="en-US" sz="2700" dirty="0"/>
-          </a:p>
-        </p:txBody>
-      </p:sp>
-      <p:sp>
-        <p:nvSpPr>
-          <p:cNvPr id="10" name="Text 8"/>
-          <p:cNvSpPr/>
-          <p:nvPr/>
-        </p:nvSpPr>
-        <p:spPr>
-          <a:xfrm>
-            <a:off x="868680" y="1417320"/>
-            <a:ext cx="6675120" cy="4434840"/>
+            <a:endParaRPr lang="en-US" sz="3400" dirty="0"/>
+          </a:p>
+        </p:txBody>
+      </p:sp>
+      <p:sp>
+        <p:nvSpPr>
+          <p:cNvPr id="11" name="Text 9"/>
+          <p:cNvSpPr/>
+          <p:nvPr/>
+        </p:nvSpPr>
+        <p:spPr>
+          <a:xfrm>
+            <a:off x="868680" y="1508760"/>
+            <a:ext cx="6537960" cy="4160520"/>
           </a:xfrm>
           <a:prstGeom prst="rect">
             <a:avLst/>
@@ -11541,7 +12186,7 @@
           <a:lstStyle/>
           <a:p>
             <a:r>
-              <a:rPr lang="en-US" sz="1700" dirty="0">
+              <a:rPr lang="en-US" sz="2100" dirty="0">
                 <a:solidFill>
                   <a:srgbClr val="17364A"/>
                 </a:solidFill>
@@ -11551,11 +12196,11 @@
               </a:rPr>
               <a:t>CDC Public Health Data Strategy: https://www.cdc.gov/public-health-data-strategy/php/about/index.html</a:t>
             </a:r>
-            <a:endParaRPr lang="en-US" sz="1700" dirty="0"/>
-          </a:p>
-          <a:p>
-            <a:r>
-              <a:rPr lang="en-US" sz="1700" dirty="0">
+            <a:endParaRPr lang="en-US" sz="2100" dirty="0"/>
+          </a:p>
+          <a:p>
+            <a:r>
+              <a:rPr lang="en-US" sz="2100" dirty="0">
                 <a:solidFill>
                   <a:srgbClr val="17364A"/>
                 </a:solidFill>
@@ -11565,11 +12210,11 @@
               </a:rPr>
               <a:t>CDC Data Modernization Initiative materials: https://www.cdc.gov/data-modernization/php/index.html</a:t>
             </a:r>
-            <a:endParaRPr lang="en-US" sz="1700" dirty="0"/>
-          </a:p>
-          <a:p>
-            <a:r>
-              <a:rPr lang="en-US" sz="1700" dirty="0">
+            <a:endParaRPr lang="en-US" sz="2100" dirty="0"/>
+          </a:p>
+          <a:p>
+            <a:r>
+              <a:rPr lang="en-US" sz="2100" dirty="0">
                 <a:solidFill>
                   <a:srgbClr val="17364A"/>
                 </a:solidFill>
@@ -11579,27 +12224,13 @@
               </a:rPr>
               <a:t>NIST AI Risk Management Framework: https://www.nist.gov/itl/ai-risk-management-framework</a:t>
             </a:r>
-            <a:endParaRPr lang="en-US" sz="1700" dirty="0"/>
-          </a:p>
-          <a:p>
-            <a:r>
-              <a:rPr lang="en-US" sz="1700" dirty="0">
-                <a:solidFill>
-                  <a:srgbClr val="17364A"/>
-                </a:solidFill>
-                <a:latin typeface="Aptos" pitchFamily="34" charset="0"/>
-                <a:ea typeface="Aptos" pitchFamily="34" charset="-122"/>
-                <a:cs typeface="Aptos" pitchFamily="34" charset="-120"/>
-              </a:rPr>
-              <a:t>NIST Generative AI Profile:.</a:t>
-            </a:r>
-            <a:endParaRPr lang="en-US" sz="1700" dirty="0"/>
-          </a:p>
-        </p:txBody>
-      </p:sp>
-      <p:sp>
-        <p:nvSpPr>
-          <p:cNvPr id="11" name="Shape 9"/>
+            <a:endParaRPr lang="en-US" sz="2100" dirty="0"/>
+          </a:p>
+        </p:txBody>
+      </p:sp>
+      <p:sp>
+        <p:nvSpPr>
+          <p:cNvPr id="12" name="Shape 10"/>
           <p:cNvSpPr/>
           <p:nvPr/>
         </p:nvSpPr>
@@ -11626,14 +12257,14 @@
       </p:sp>
       <p:sp>
         <p:nvSpPr>
-          <p:cNvPr id="12" name="Text 10"/>
+          <p:cNvPr id="13" name="Text 11"/>
           <p:cNvSpPr/>
           <p:nvPr/>
         </p:nvSpPr>
         <p:spPr>
           <a:xfrm>
             <a:off x="8074152" y="1563624"/>
-            <a:ext cx="2825496" cy="201168"/>
+            <a:ext cx="2825496" cy="256032"/>
           </a:xfrm>
           <a:prstGeom prst="rect">
             <a:avLst/>
@@ -11649,7 +12280,7 @@
               <a:buNone/>
             </a:pPr>
             <a:r>
-              <a:rPr lang="en-US" sz="950" b="1" dirty="0">
+              <a:rPr lang="en-US" sz="1300" b="1" dirty="0">
                 <a:solidFill>
                   <a:srgbClr val="0068B7"/>
                 </a:solidFill>
@@ -11659,20 +12290,20 @@
               </a:rPr>
               <a:t>Key idea</a:t>
             </a:r>
-            <a:endParaRPr lang="en-US" sz="950" dirty="0"/>
-          </a:p>
-        </p:txBody>
-      </p:sp>
-      <p:sp>
-        <p:nvSpPr>
-          <p:cNvPr id="13" name="Text 11"/>
-          <p:cNvSpPr/>
-          <p:nvPr/>
-        </p:nvSpPr>
-        <p:spPr>
-          <a:xfrm>
-            <a:off x="8074152" y="1856232"/>
-            <a:ext cx="2825496" cy="1261872"/>
+            <a:endParaRPr lang="en-US" sz="1300" dirty="0"/>
+          </a:p>
+        </p:txBody>
+      </p:sp>
+      <p:sp>
+        <p:nvSpPr>
+          <p:cNvPr id="14" name="Text 12"/>
+          <p:cNvSpPr/>
+          <p:nvPr/>
+        </p:nvSpPr>
+        <p:spPr>
+          <a:xfrm>
+            <a:off x="8074152" y="1920240"/>
+            <a:ext cx="2825496" cy="1188720"/>
           </a:xfrm>
           <a:prstGeom prst="rect">
             <a:avLst/>
@@ -11690,7 +12321,7 @@
               <a:buNone/>
             </a:pPr>
             <a:r>
-              <a:rPr lang="en-US" sz="1250" dirty="0">
+              <a:rPr lang="en-US" sz="1550" dirty="0">
                 <a:solidFill>
                   <a:srgbClr val="17364A"/>
                 </a:solidFill>
@@ -11700,13 +12331,13 @@
               </a:rPr>
               <a:t>CDC Public Health Data Strategy: https://www.cdc.gov/public-health-data-strategy/php/about/index.html</a:t>
             </a:r>
-            <a:endParaRPr lang="en-US" sz="1250" dirty="0"/>
-          </a:p>
-        </p:txBody>
-      </p:sp>
-      <p:sp>
-        <p:nvSpPr>
-          <p:cNvPr id="14" name="Shape 12"/>
+            <a:endParaRPr lang="en-US" sz="1550" dirty="0"/>
+          </a:p>
+        </p:txBody>
+      </p:sp>
+      <p:sp>
+        <p:nvSpPr>
+          <p:cNvPr id="15" name="Shape 13"/>
           <p:cNvSpPr/>
           <p:nvPr/>
         </p:nvSpPr>
@@ -11733,14 +12364,14 @@
       </p:sp>
       <p:sp>
         <p:nvSpPr>
-          <p:cNvPr id="15" name="Text 13"/>
+          <p:cNvPr id="16" name="Text 14"/>
           <p:cNvSpPr/>
           <p:nvPr/>
         </p:nvSpPr>
         <p:spPr>
           <a:xfrm>
             <a:off x="8074152" y="3666744"/>
-            <a:ext cx="2825496" cy="201168"/>
+            <a:ext cx="2825496" cy="256032"/>
           </a:xfrm>
           <a:prstGeom prst="rect">
             <a:avLst/>
@@ -11756,7 +12387,7 @@
               <a:buNone/>
             </a:pPr>
             <a:r>
-              <a:rPr lang="en-US" sz="950" b="1" dirty="0">
+              <a:rPr lang="en-US" sz="1300" b="1" dirty="0">
                 <a:solidFill>
                   <a:srgbClr val="0068B7"/>
                 </a:solidFill>
@@ -11766,20 +12397,20 @@
               </a:rPr>
               <a:t>Use this for</a:t>
             </a:r>
-            <a:endParaRPr lang="en-US" sz="950" dirty="0"/>
-          </a:p>
-        </p:txBody>
-      </p:sp>
-      <p:sp>
-        <p:nvSpPr>
-          <p:cNvPr id="16" name="Text 14"/>
-          <p:cNvSpPr/>
-          <p:nvPr/>
-        </p:nvSpPr>
-        <p:spPr>
-          <a:xfrm>
-            <a:off x="8074152" y="3959352"/>
-            <a:ext cx="2825496" cy="1170432"/>
+            <a:endParaRPr lang="en-US" sz="1300" dirty="0"/>
+          </a:p>
+        </p:txBody>
+      </p:sp>
+      <p:sp>
+        <p:nvSpPr>
+          <p:cNvPr id="17" name="Text 15"/>
+          <p:cNvSpPr/>
+          <p:nvPr/>
+        </p:nvSpPr>
+        <p:spPr>
+          <a:xfrm>
+            <a:off x="8074152" y="4023360"/>
+            <a:ext cx="2825496" cy="1097280"/>
           </a:xfrm>
           <a:prstGeom prst="rect">
             <a:avLst/>
@@ -11797,7 +12428,7 @@
               <a:buNone/>
             </a:pPr>
             <a:r>
-              <a:rPr lang="en-US" sz="1250" dirty="0">
+              <a:rPr lang="en-US" sz="1550" dirty="0">
                 <a:solidFill>
                   <a:srgbClr val="17364A"/>
                 </a:solidFill>
@@ -11807,7 +12438,7 @@
               </a:rPr>
               <a:t>Connect the concept to public health decisions, safeguards, documentation, or implementation work.</a:t>
             </a:r>
-            <a:endParaRPr lang="en-US" sz="1250" dirty="0"/>
+            <a:endParaRPr lang="en-US" sz="1550" dirty="0"/>
           </a:p>
         </p:txBody>
       </p:sp>
@@ -12004,7 +12635,7 @@
                 <a:ea typeface="Aptos" pitchFamily="34" charset="-122"/>
                 <a:cs typeface="Aptos" pitchFamily="34" charset="-120"/>
               </a:rPr>
-              <a:t>© Paula Soper</a:t>
+              <a:t>Â© Paula Soper</a:t>
             </a:r>
             <a:endParaRPr lang="en-US" sz="800" dirty="0"/>
           </a:p>
@@ -12018,8 +12649,47 @@
         </p:nvSpPr>
         <p:spPr>
           <a:xfrm>
+            <a:off x="11137392" y="6510528"/>
+            <a:ext cx="411480" cy="201168"/>
+          </a:xfrm>
+          <a:prstGeom prst="rect">
+            <a:avLst/>
+          </a:prstGeom>
+          <a:noFill/>
+          <a:ln/>
+        </p:spPr>
+        <p:txBody>
+          <a:bodyPr wrap="square" lIns="0" tIns="0" rIns="0" bIns="0" rtlCol="0" anchor="ctr"/>
+          <a:lstStyle/>
+          <a:p>
+            <a:pPr algn="r" indent="0" marL="0">
+              <a:buNone/>
+            </a:pPr>
+            <a:r>
+              <a:rPr lang="en-US" sz="900" dirty="0">
+                <a:solidFill>
+                  <a:srgbClr val="5F7181"/>
+                </a:solidFill>
+                <a:latin typeface="Aptos" pitchFamily="34" charset="0"/>
+                <a:ea typeface="Aptos" pitchFamily="34" charset="-122"/>
+                <a:cs typeface="Aptos" pitchFamily="34" charset="-120"/>
+              </a:rPr>
+              <a:t>24</a:t>
+            </a:r>
+            <a:endParaRPr lang="en-US" sz="900" dirty="0"/>
+          </a:p>
+        </p:txBody>
+      </p:sp>
+      <p:sp>
+        <p:nvSpPr>
+          <p:cNvPr id="8" name="Text 6"/>
+          <p:cNvSpPr/>
+          <p:nvPr/>
+        </p:nvSpPr>
+        <p:spPr>
+          <a:xfrm>
             <a:off x="640080" y="658368"/>
-            <a:ext cx="10881360" cy="566928"/>
+            <a:ext cx="10881360" cy="713232"/>
           </a:xfrm>
           <a:prstGeom prst="rect">
             <a:avLst/>
@@ -12037,7 +12707,7 @@
               <a:buNone/>
             </a:pPr>
             <a:r>
-              <a:rPr lang="en-US" sz="2700" b="1" dirty="0">
+              <a:rPr lang="en-US" sz="3400" b="1" dirty="0">
                 <a:solidFill>
                   <a:srgbClr val="003A63"/>
                 </a:solidFill>
@@ -12047,20 +12717,20 @@
               </a:rPr>
               <a:t>References and Resources Continued</a:t>
             </a:r>
-            <a:endParaRPr lang="en-US" sz="2700" dirty="0"/>
-          </a:p>
-        </p:txBody>
-      </p:sp>
-      <p:sp>
-        <p:nvSpPr>
-          <p:cNvPr id="8" name="Text 6"/>
-          <p:cNvSpPr/>
-          <p:nvPr/>
-        </p:nvSpPr>
-        <p:spPr>
-          <a:xfrm>
-            <a:off x="868680" y="1417320"/>
-            <a:ext cx="6675120" cy="4434840"/>
+            <a:endParaRPr lang="en-US" sz="3400" dirty="0"/>
+          </a:p>
+        </p:txBody>
+      </p:sp>
+      <p:sp>
+        <p:nvSpPr>
+          <p:cNvPr id="9" name="Text 7"/>
+          <p:cNvSpPr/>
+          <p:nvPr/>
+        </p:nvSpPr>
+        <p:spPr>
+          <a:xfrm>
+            <a:off x="868680" y="1508760"/>
+            <a:ext cx="6537960" cy="4160520"/>
           </a:xfrm>
           <a:prstGeom prst="rect">
             <a:avLst/>
@@ -12075,7 +12745,7 @@
           <a:lstStyle/>
           <a:p>
             <a:r>
-              <a:rPr lang="en-US" sz="1700" dirty="0">
+              <a:rPr lang="en-US" sz="2100" dirty="0">
                 <a:solidFill>
                   <a:srgbClr val="17364A"/>
                 </a:solidFill>
@@ -12085,13 +12755,13 @@
               </a:rPr>
               <a:t>Agency data governance, privacy, cybersecurity, and enterprise architecture documentation</a:t>
             </a:r>
-            <a:endParaRPr lang="en-US" sz="1700" dirty="0"/>
-          </a:p>
-        </p:txBody>
-      </p:sp>
-      <p:sp>
-        <p:nvSpPr>
-          <p:cNvPr id="9" name="Shape 7"/>
+            <a:endParaRPr lang="en-US" sz="2100" dirty="0"/>
+          </a:p>
+        </p:txBody>
+      </p:sp>
+      <p:sp>
+        <p:nvSpPr>
+          <p:cNvPr id="10" name="Shape 8"/>
           <p:cNvSpPr/>
           <p:nvPr/>
         </p:nvSpPr>
@@ -12118,14 +12788,14 @@
       </p:sp>
       <p:sp>
         <p:nvSpPr>
-          <p:cNvPr id="10" name="Text 8"/>
+          <p:cNvPr id="11" name="Text 9"/>
           <p:cNvSpPr/>
           <p:nvPr/>
         </p:nvSpPr>
         <p:spPr>
           <a:xfrm>
             <a:off x="8074152" y="1563624"/>
-            <a:ext cx="2825496" cy="201168"/>
+            <a:ext cx="2825496" cy="256032"/>
           </a:xfrm>
           <a:prstGeom prst="rect">
             <a:avLst/>
@@ -12141,7 +12811,7 @@
               <a:buNone/>
             </a:pPr>
             <a:r>
-              <a:rPr lang="en-US" sz="950" b="1" dirty="0">
+              <a:rPr lang="en-US" sz="1300" b="1" dirty="0">
                 <a:solidFill>
                   <a:srgbClr val="0068B7"/>
                 </a:solidFill>
@@ -12151,20 +12821,20 @@
               </a:rPr>
               <a:t>Key idea</a:t>
             </a:r>
-            <a:endParaRPr lang="en-US" sz="950" dirty="0"/>
-          </a:p>
-        </p:txBody>
-      </p:sp>
-      <p:sp>
-        <p:nvSpPr>
-          <p:cNvPr id="11" name="Text 9"/>
-          <p:cNvSpPr/>
-          <p:nvPr/>
-        </p:nvSpPr>
-        <p:spPr>
-          <a:xfrm>
-            <a:off x="8074152" y="1856232"/>
-            <a:ext cx="2825496" cy="1261872"/>
+            <a:endParaRPr lang="en-US" sz="1300" dirty="0"/>
+          </a:p>
+        </p:txBody>
+      </p:sp>
+      <p:sp>
+        <p:nvSpPr>
+          <p:cNvPr id="12" name="Text 10"/>
+          <p:cNvSpPr/>
+          <p:nvPr/>
+        </p:nvSpPr>
+        <p:spPr>
+          <a:xfrm>
+            <a:off x="8074152" y="1920240"/>
+            <a:ext cx="2825496" cy="1188720"/>
           </a:xfrm>
           <a:prstGeom prst="rect">
             <a:avLst/>
@@ -12182,7 +12852,7 @@
               <a:buNone/>
             </a:pPr>
             <a:r>
-              <a:rPr lang="en-US" sz="1250" dirty="0">
+              <a:rPr lang="en-US" sz="1550" dirty="0">
                 <a:solidFill>
                   <a:srgbClr val="17364A"/>
                 </a:solidFill>
@@ -12192,13 +12862,13 @@
               </a:rPr>
               <a:t>Agency data governance, privacy, cybersecurity, and enterprise architecture documentation</a:t>
             </a:r>
-            <a:endParaRPr lang="en-US" sz="1250" dirty="0"/>
-          </a:p>
-        </p:txBody>
-      </p:sp>
-      <p:sp>
-        <p:nvSpPr>
-          <p:cNvPr id="12" name="Shape 10"/>
+            <a:endParaRPr lang="en-US" sz="1550" dirty="0"/>
+          </a:p>
+        </p:txBody>
+      </p:sp>
+      <p:sp>
+        <p:nvSpPr>
+          <p:cNvPr id="13" name="Shape 11"/>
           <p:cNvSpPr/>
           <p:nvPr/>
         </p:nvSpPr>
@@ -12225,14 +12895,14 @@
       </p:sp>
       <p:sp>
         <p:nvSpPr>
-          <p:cNvPr id="13" name="Text 11"/>
+          <p:cNvPr id="14" name="Text 12"/>
           <p:cNvSpPr/>
           <p:nvPr/>
         </p:nvSpPr>
         <p:spPr>
           <a:xfrm>
             <a:off x="8074152" y="3666744"/>
-            <a:ext cx="2825496" cy="201168"/>
+            <a:ext cx="2825496" cy="256032"/>
           </a:xfrm>
           <a:prstGeom prst="rect">
             <a:avLst/>
@@ -12248,7 +12918,7 @@
               <a:buNone/>
             </a:pPr>
             <a:r>
-              <a:rPr lang="en-US" sz="950" b="1" dirty="0">
+              <a:rPr lang="en-US" sz="1300" b="1" dirty="0">
                 <a:solidFill>
                   <a:srgbClr val="0068B7"/>
                 </a:solidFill>
@@ -12258,20 +12928,20 @@
               </a:rPr>
               <a:t>Use this for</a:t>
             </a:r>
-            <a:endParaRPr lang="en-US" sz="950" dirty="0"/>
-          </a:p>
-        </p:txBody>
-      </p:sp>
-      <p:sp>
-        <p:nvSpPr>
-          <p:cNvPr id="14" name="Text 12"/>
-          <p:cNvSpPr/>
-          <p:nvPr/>
-        </p:nvSpPr>
-        <p:spPr>
-          <a:xfrm>
-            <a:off x="8074152" y="3959352"/>
-            <a:ext cx="2825496" cy="1170432"/>
+            <a:endParaRPr lang="en-US" sz="1300" dirty="0"/>
+          </a:p>
+        </p:txBody>
+      </p:sp>
+      <p:sp>
+        <p:nvSpPr>
+          <p:cNvPr id="15" name="Text 13"/>
+          <p:cNvSpPr/>
+          <p:nvPr/>
+        </p:nvSpPr>
+        <p:spPr>
+          <a:xfrm>
+            <a:off x="8074152" y="4023360"/>
+            <a:ext cx="2825496" cy="1097280"/>
           </a:xfrm>
           <a:prstGeom prst="rect">
             <a:avLst/>
@@ -12289,7 +12959,7 @@
               <a:buNone/>
             </a:pPr>
             <a:r>
-              <a:rPr lang="en-US" sz="1250" dirty="0">
+              <a:rPr lang="en-US" sz="1550" dirty="0">
                 <a:solidFill>
                   <a:srgbClr val="17364A"/>
                 </a:solidFill>
@@ -12299,7 +12969,7 @@
               </a:rPr>
               <a:t>Connect the concept to public health decisions, safeguards, documentation, or implementation work.</a:t>
             </a:r>
-            <a:endParaRPr lang="en-US" sz="1250" dirty="0"/>
+            <a:endParaRPr lang="en-US" sz="1550" dirty="0"/>
           </a:p>
         </p:txBody>
       </p:sp>
@@ -12496,7 +13166,7 @@
                 <a:ea typeface="Aptos" pitchFamily="34" charset="-122"/>
                 <a:cs typeface="Aptos" pitchFamily="34" charset="-120"/>
               </a:rPr>
-              <a:t>© Paula Soper</a:t>
+              <a:t>Â© Paula Soper</a:t>
             </a:r>
             <a:endParaRPr lang="en-US" sz="800" dirty="0"/>
           </a:p>
@@ -12510,8 +13180,47 @@
         </p:nvSpPr>
         <p:spPr>
           <a:xfrm>
+            <a:off x="11137392" y="6510528"/>
+            <a:ext cx="411480" cy="201168"/>
+          </a:xfrm>
+          <a:prstGeom prst="rect">
+            <a:avLst/>
+          </a:prstGeom>
+          <a:noFill/>
+          <a:ln/>
+        </p:spPr>
+        <p:txBody>
+          <a:bodyPr wrap="square" lIns="0" tIns="0" rIns="0" bIns="0" rtlCol="0" anchor="ctr"/>
+          <a:lstStyle/>
+          <a:p>
+            <a:pPr algn="r" indent="0" marL="0">
+              <a:buNone/>
+            </a:pPr>
+            <a:r>
+              <a:rPr lang="en-US" sz="900" dirty="0">
+                <a:solidFill>
+                  <a:srgbClr val="5F7181"/>
+                </a:solidFill>
+                <a:latin typeface="Aptos" pitchFamily="34" charset="0"/>
+                <a:ea typeface="Aptos" pitchFamily="34" charset="-122"/>
+                <a:cs typeface="Aptos" pitchFamily="34" charset="-120"/>
+              </a:rPr>
+              <a:t>3</a:t>
+            </a:r>
+            <a:endParaRPr lang="en-US" sz="900" dirty="0"/>
+          </a:p>
+        </p:txBody>
+      </p:sp>
+      <p:sp>
+        <p:nvSpPr>
+          <p:cNvPr id="8" name="Text 6"/>
+          <p:cNvSpPr/>
+          <p:nvPr/>
+        </p:nvSpPr>
+        <p:spPr>
+          <a:xfrm>
             <a:off x="640080" y="658368"/>
-            <a:ext cx="10881360" cy="566928"/>
+            <a:ext cx="10881360" cy="713232"/>
           </a:xfrm>
           <a:prstGeom prst="rect">
             <a:avLst/>
@@ -12529,7 +13238,7 @@
               <a:buNone/>
             </a:pPr>
             <a:r>
-              <a:rPr lang="en-US" sz="2700" b="1" dirty="0">
+              <a:rPr lang="en-US" sz="3400" b="1" dirty="0">
                 <a:solidFill>
                   <a:srgbClr val="003A63"/>
                 </a:solidFill>
@@ -12539,20 +13248,20 @@
               </a:rPr>
               <a:t>How this module connects to the playbook</a:t>
             </a:r>
-            <a:endParaRPr lang="en-US" sz="2700" dirty="0"/>
-          </a:p>
-        </p:txBody>
-      </p:sp>
-      <p:sp>
-        <p:nvSpPr>
-          <p:cNvPr id="8" name="Text 6"/>
-          <p:cNvSpPr/>
-          <p:nvPr/>
-        </p:nvSpPr>
-        <p:spPr>
-          <a:xfrm>
-            <a:off x="868680" y="1417320"/>
-            <a:ext cx="6903720" cy="4480560"/>
+            <a:endParaRPr lang="en-US" sz="3400" dirty="0"/>
+          </a:p>
+        </p:txBody>
+      </p:sp>
+      <p:sp>
+        <p:nvSpPr>
+          <p:cNvPr id="9" name="Text 7"/>
+          <p:cNvSpPr/>
+          <p:nvPr/>
+        </p:nvSpPr>
+        <p:spPr>
+          <a:xfrm>
+            <a:off x="868680" y="1508760"/>
+            <a:ext cx="6812280" cy="3977640"/>
           </a:xfrm>
           <a:prstGeom prst="rect">
             <a:avLst/>
@@ -12567,7 +13276,7 @@
           <a:lstStyle/>
           <a:p>
             <a:r>
-              <a:rPr lang="en-US" sz="1540" dirty="0">
+              <a:rPr lang="en-US" sz="1900" dirty="0">
                 <a:solidFill>
                   <a:srgbClr val="17364A"/>
                 </a:solidFill>
@@ -12575,13 +13284,13 @@
                 <a:ea typeface="Aptos" pitchFamily="34" charset="-122"/>
                 <a:cs typeface="Aptos" pitchFamily="34" charset="-120"/>
               </a:rPr>
-              <a:t>Play 11: Build and Deploy AI Solutions - This lesson informs Play 11 by helping learners connect the lesson topic to build and deploy.</a:t>
-            </a:r>
-            <a:endParaRPr lang="en-US" sz="1540" dirty="0"/>
-          </a:p>
-          <a:p>
-            <a:r>
-              <a:rPr lang="en-US" sz="1540" dirty="0">
+              <a:t>Play 11: Build and Deploy AI Solutions - This lesson informs Play 11 by helping learners connect the lesson.</a:t>
+            </a:r>
+            <a:endParaRPr lang="en-US" sz="1900" dirty="0"/>
+          </a:p>
+          <a:p>
+            <a:r>
+              <a:rPr lang="en-US" sz="1900" dirty="0">
                 <a:solidFill>
                   <a:srgbClr val="17364A"/>
                 </a:solidFill>
@@ -12589,13 +13298,13 @@
                 <a:ea typeface="Aptos" pitchFamily="34" charset="-122"/>
                 <a:cs typeface="Aptos" pitchFamily="34" charset="-120"/>
               </a:rPr>
-              <a:t>Play 2: Readiness Assessment - This lesson informs Play 2 by helping learners connect the lesson topic to readiness assessment work.</a:t>
-            </a:r>
-            <a:endParaRPr lang="en-US" sz="1540" dirty="0"/>
-          </a:p>
-          <a:p>
-            <a:r>
-              <a:rPr lang="en-US" sz="1540" dirty="0">
+              <a:t>Play 2: Readiness Assessment - This lesson informs Play 2 by helping learners connect the lesson topic to.</a:t>
+            </a:r>
+            <a:endParaRPr lang="en-US" sz="1900" dirty="0"/>
+          </a:p>
+          <a:p>
+            <a:r>
+              <a:rPr lang="en-US" sz="1900" dirty="0">
                 <a:solidFill>
                   <a:srgbClr val="17364A"/>
                 </a:solidFill>
@@ -12603,13 +13312,13 @@
                 <a:ea typeface="Aptos" pitchFamily="34" charset="-122"/>
                 <a:cs typeface="Aptos" pitchFamily="34" charset="-120"/>
               </a:rPr>
-              <a:t>Play 3: Establish AI Governance - This lesson informs Play 3 by helping learners connect the lesson topic to establish ai governance.</a:t>
-            </a:r>
-            <a:endParaRPr lang="en-US" sz="1540" dirty="0"/>
-          </a:p>
-          <a:p>
-            <a:r>
-              <a:rPr lang="en-US" sz="1540" dirty="0">
+              <a:t>Play 3: Establish AI Governance - This lesson informs Play 3 by helping learners connect the lesson topic to.</a:t>
+            </a:r>
+            <a:endParaRPr lang="en-US" sz="1900" dirty="0"/>
+          </a:p>
+          <a:p>
+            <a:r>
+              <a:rPr lang="en-US" sz="1900" dirty="0">
                 <a:solidFill>
                   <a:srgbClr val="17364A"/>
                 </a:solidFill>
@@ -12617,15 +13326,15 @@
                 <a:ea typeface="Aptos" pitchFamily="34" charset="-122"/>
                 <a:cs typeface="Aptos" pitchFamily="34" charset="-120"/>
               </a:rPr>
-              <a:t>Play 7: Prioritize Use Cases - This lesson informs Play 7 by helping learners connect the lesson topic to prioritize use cases work.</a:t>
-            </a:r>
-            <a:endParaRPr lang="en-US" sz="1540" dirty="0"/>
-          </a:p>
-        </p:txBody>
-      </p:sp>
-      <p:sp>
-        <p:nvSpPr>
-          <p:cNvPr id="9" name="Shape 7"/>
+              <a:t>Play 7: Prioritize Use Cases - This lesson informs Play 7 by helping learners connect the lesson topic to.</a:t>
+            </a:r>
+            <a:endParaRPr lang="en-US" sz="1900" dirty="0"/>
+          </a:p>
+        </p:txBody>
+      </p:sp>
+      <p:sp>
+        <p:nvSpPr>
+          <p:cNvPr id="10" name="Shape 8"/>
           <p:cNvSpPr/>
           <p:nvPr/>
         </p:nvSpPr>
@@ -12652,14 +13361,14 @@
       </p:sp>
       <p:sp>
         <p:nvSpPr>
-          <p:cNvPr id="10" name="Text 8"/>
+          <p:cNvPr id="11" name="Text 9"/>
           <p:cNvSpPr/>
           <p:nvPr/>
         </p:nvSpPr>
         <p:spPr>
           <a:xfrm>
             <a:off x="8211312" y="1563624"/>
-            <a:ext cx="2734056" cy="201168"/>
+            <a:ext cx="2734056" cy="256032"/>
           </a:xfrm>
           <a:prstGeom prst="rect">
             <a:avLst/>
@@ -12675,7 +13384,7 @@
               <a:buNone/>
             </a:pPr>
             <a:r>
-              <a:rPr lang="en-US" sz="950" b="1" dirty="0">
+              <a:rPr lang="en-US" sz="1300" b="1" dirty="0">
                 <a:solidFill>
                   <a:srgbClr val="0068B7"/>
                 </a:solidFill>
@@ -12685,20 +13394,20 @@
               </a:rPr>
               <a:t>Apply the lesson</a:t>
             </a:r>
-            <a:endParaRPr lang="en-US" sz="950" dirty="0"/>
-          </a:p>
-        </p:txBody>
-      </p:sp>
-      <p:sp>
-        <p:nvSpPr>
-          <p:cNvPr id="11" name="Text 9"/>
-          <p:cNvSpPr/>
-          <p:nvPr/>
-        </p:nvSpPr>
-        <p:spPr>
-          <a:xfrm>
-            <a:off x="8211312" y="1856232"/>
-            <a:ext cx="2734056" cy="1536192"/>
+            <a:endParaRPr lang="en-US" sz="1300" dirty="0"/>
+          </a:p>
+        </p:txBody>
+      </p:sp>
+      <p:sp>
+        <p:nvSpPr>
+          <p:cNvPr id="12" name="Text 10"/>
+          <p:cNvSpPr/>
+          <p:nvPr/>
+        </p:nvSpPr>
+        <p:spPr>
+          <a:xfrm>
+            <a:off x="8211312" y="1920240"/>
+            <a:ext cx="2734056" cy="1463040"/>
           </a:xfrm>
           <a:prstGeom prst="rect">
             <a:avLst/>
@@ -12716,7 +13425,7 @@
               <a:buNone/>
             </a:pPr>
             <a:r>
-              <a:rPr lang="en-US" sz="1250" dirty="0">
+              <a:rPr lang="en-US" sz="1550" dirty="0">
                 <a:solidFill>
                   <a:srgbClr val="17364A"/>
                 </a:solidFill>
@@ -12726,32 +13435,32 @@
               </a:rPr>
               <a:t>Use the related plays to identify decisions, participants, timing, approvals, and documentation needed for responsible implementation.</a:t>
             </a:r>
-            <a:endParaRPr lang="en-US" sz="1250" dirty="0"/>
-          </a:p>
-        </p:txBody>
-      </p:sp>
-      <p:sp>
-        <p:nvSpPr>
-          <p:cNvPr id="12" name="Shape 10"/>
-          <p:cNvSpPr/>
-          <p:nvPr/>
-        </p:nvSpPr>
-        <p:spPr>
-          <a:xfrm>
-            <a:off x="8046720" y="3794760"/>
-            <a:ext cx="3063240" cy="1508760"/>
+            <a:endParaRPr lang="en-US" sz="1550" dirty="0"/>
+          </a:p>
+        </p:txBody>
+      </p:sp>
+      <p:sp>
+        <p:nvSpPr>
+          <p:cNvPr id="13" name="Shape 11"/>
+          <p:cNvSpPr/>
+          <p:nvPr/>
+        </p:nvSpPr>
+        <p:spPr>
+          <a:xfrm>
+            <a:off x="7818120" y="3977640"/>
+            <a:ext cx="972312" cy="749808"/>
           </a:xfrm>
           <a:prstGeom prst="roundRect">
             <a:avLst>
-              <a:gd name="adj" fmla="val 7273"/>
+              <a:gd name="adj" fmla="val 14634"/>
             </a:avLst>
           </a:prstGeom>
           <a:solidFill>
-            <a:srgbClr val="FFF4D9"/>
+            <a:srgbClr val="0068B7"/>
           </a:solidFill>
           <a:ln w="12700">
             <a:solidFill>
-              <a:srgbClr val="B9D7E6"/>
+              <a:srgbClr val="0068B7"/>
             </a:solidFill>
             <a:prstDash val="solid"/>
           </a:ln>
@@ -12759,81 +13468,256 @@
       </p:sp>
       <p:sp>
         <p:nvSpPr>
-          <p:cNvPr id="13" name="Text 11"/>
-          <p:cNvSpPr/>
-          <p:nvPr/>
-        </p:nvSpPr>
-        <p:spPr>
-          <a:xfrm>
-            <a:off x="8211312" y="3941064"/>
-            <a:ext cx="2734056" cy="201168"/>
-          </a:xfrm>
-          <a:prstGeom prst="rect">
-            <a:avLst/>
-          </a:prstGeom>
-          <a:noFill/>
-          <a:ln/>
-        </p:spPr>
-        <p:txBody>
-          <a:bodyPr wrap="square" lIns="0" tIns="0" rIns="0" bIns="0" rtlCol="0" anchor="ctr"/>
-          <a:lstStyle/>
-          <a:p>
-            <a:pPr indent="0" marL="0">
-              <a:buNone/>
-            </a:pPr>
-            <a:r>
-              <a:rPr lang="en-US" sz="950" b="1" dirty="0">
-                <a:solidFill>
-                  <a:srgbClr val="0068B7"/>
-                </a:solidFill>
-                <a:latin typeface="Aptos" pitchFamily="34" charset="0"/>
-                <a:ea typeface="Aptos" pitchFamily="34" charset="-122"/>
-                <a:cs typeface="Aptos" pitchFamily="34" charset="-120"/>
-              </a:rPr>
-              <a:t>Keep in mind</a:t>
-            </a:r>
-            <a:endParaRPr lang="en-US" sz="950" dirty="0"/>
-          </a:p>
-        </p:txBody>
-      </p:sp>
-      <p:sp>
-        <p:nvSpPr>
           <p:cNvPr id="14" name="Text 12"/>
           <p:cNvSpPr/>
           <p:nvPr/>
         </p:nvSpPr>
         <p:spPr>
           <a:xfrm>
-            <a:off x="8211312" y="4233672"/>
-            <a:ext cx="2734056" cy="941832"/>
-          </a:xfrm>
-          <a:prstGeom prst="rect">
-            <a:avLst/>
-          </a:prstGeom>
-          <a:noFill/>
-          <a:ln/>
-        </p:spPr>
-        <p:txBody>
-          <a:bodyPr wrap="square" lIns="0" tIns="0" rIns="0" bIns="0" rtlCol="0" anchor="t">
+            <a:off x="7891272" y="4169664"/>
+            <a:ext cx="826008" cy="310896"/>
+          </a:xfrm>
+          <a:prstGeom prst="rect">
+            <a:avLst/>
+          </a:prstGeom>
+          <a:noFill/>
+          <a:ln/>
+        </p:spPr>
+        <p:txBody>
+          <a:bodyPr wrap="square" lIns="0" tIns="0" rIns="0" bIns="0" rtlCol="0" anchor="ctr">
             <a:normAutofit/>
           </a:bodyPr>
           <a:lstStyle/>
           <a:p>
-            <a:pPr indent="0" marL="0">
-              <a:buNone/>
-            </a:pPr>
-            <a:r>
-              <a:rPr lang="en-US" sz="1250" dirty="0">
-                <a:solidFill>
-                  <a:srgbClr val="17364A"/>
-                </a:solidFill>
-                <a:latin typeface="Aptos" pitchFamily="34" charset="0"/>
-                <a:ea typeface="Aptos" pitchFamily="34" charset="-122"/>
-                <a:cs typeface="Aptos" pitchFamily="34" charset="-120"/>
-              </a:rPr>
-              <a:t>The playbook connection helps turn training into agency work, not just individual knowledge.</a:t>
-            </a:r>
-            <a:endParaRPr lang="en-US" sz="1250" dirty="0"/>
+            <a:pPr algn="ctr" indent="0" marL="0">
+              <a:buNone/>
+            </a:pPr>
+            <a:r>
+              <a:rPr lang="en-US" sz="1500" b="1" dirty="0">
+                <a:solidFill>
+                  <a:srgbClr val="FFFFFF"/>
+                </a:solidFill>
+                <a:latin typeface="Aptos" pitchFamily="34" charset="0"/>
+                <a:ea typeface="Aptos" pitchFamily="34" charset="-122"/>
+                <a:cs typeface="Aptos" pitchFamily="34" charset="-120"/>
+              </a:rPr>
+              <a:t>Lesson</a:t>
+            </a:r>
+            <a:endParaRPr lang="en-US" sz="1500" dirty="0"/>
+          </a:p>
+        </p:txBody>
+      </p:sp>
+      <p:sp>
+        <p:nvSpPr>
+          <p:cNvPr id="15" name="Text 13"/>
+          <p:cNvSpPr/>
+          <p:nvPr/>
+        </p:nvSpPr>
+        <p:spPr>
+          <a:xfrm>
+            <a:off x="8817864" y="4187952"/>
+            <a:ext cx="201168" cy="256032"/>
+          </a:xfrm>
+          <a:prstGeom prst="rect">
+            <a:avLst/>
+          </a:prstGeom>
+          <a:noFill/>
+          <a:ln/>
+        </p:spPr>
+        <p:txBody>
+          <a:bodyPr wrap="square" lIns="0" tIns="0" rIns="0" bIns="0" rtlCol="0" anchor="ctr"/>
+          <a:lstStyle/>
+          <a:p>
+            <a:pPr algn="ctr" indent="0" marL="0">
+              <a:buNone/>
+            </a:pPr>
+            <a:r>
+              <a:rPr lang="en-US" sz="1800" b="1" dirty="0">
+                <a:solidFill>
+                  <a:srgbClr val="0068B7"/>
+                </a:solidFill>
+                <a:latin typeface="Aptos" pitchFamily="34" charset="0"/>
+                <a:ea typeface="Aptos" pitchFamily="34" charset="-122"/>
+                <a:cs typeface="Aptos" pitchFamily="34" charset="-120"/>
+              </a:rPr>
+              <a:t>â†’</a:t>
+            </a:r>
+            <a:endParaRPr lang="en-US" sz="1800" dirty="0"/>
+          </a:p>
+        </p:txBody>
+      </p:sp>
+      <p:sp>
+        <p:nvSpPr>
+          <p:cNvPr id="16" name="Shape 14"/>
+          <p:cNvSpPr/>
+          <p:nvPr/>
+        </p:nvSpPr>
+        <p:spPr>
+          <a:xfrm>
+            <a:off x="9046464" y="3977640"/>
+            <a:ext cx="972312" cy="749808"/>
+          </a:xfrm>
+          <a:prstGeom prst="roundRect">
+            <a:avLst>
+              <a:gd name="adj" fmla="val 14634"/>
+            </a:avLst>
+          </a:prstGeom>
+          <a:solidFill>
+            <a:srgbClr val="2F8A28"/>
+          </a:solidFill>
+          <a:ln w="12700">
+            <a:solidFill>
+              <a:srgbClr val="2F8A28"/>
+            </a:solidFill>
+            <a:prstDash val="solid"/>
+          </a:ln>
+        </p:spPr>
+      </p:sp>
+      <p:sp>
+        <p:nvSpPr>
+          <p:cNvPr id="17" name="Text 15"/>
+          <p:cNvSpPr/>
+          <p:nvPr/>
+        </p:nvSpPr>
+        <p:spPr>
+          <a:xfrm>
+            <a:off x="9119616" y="4169664"/>
+            <a:ext cx="826008" cy="310896"/>
+          </a:xfrm>
+          <a:prstGeom prst="rect">
+            <a:avLst/>
+          </a:prstGeom>
+          <a:noFill/>
+          <a:ln/>
+        </p:spPr>
+        <p:txBody>
+          <a:bodyPr wrap="square" lIns="0" tIns="0" rIns="0" bIns="0" rtlCol="0" anchor="ctr">
+            <a:normAutofit/>
+          </a:bodyPr>
+          <a:lstStyle/>
+          <a:p>
+            <a:pPr algn="ctr" indent="0" marL="0">
+              <a:buNone/>
+            </a:pPr>
+            <a:r>
+              <a:rPr lang="en-US" sz="1500" b="1" dirty="0">
+                <a:solidFill>
+                  <a:srgbClr val="FFFFFF"/>
+                </a:solidFill>
+                <a:latin typeface="Aptos" pitchFamily="34" charset="0"/>
+                <a:ea typeface="Aptos" pitchFamily="34" charset="-122"/>
+                <a:cs typeface="Aptos" pitchFamily="34" charset="-120"/>
+              </a:rPr>
+              <a:t>Plays</a:t>
+            </a:r>
+            <a:endParaRPr lang="en-US" sz="1500" dirty="0"/>
+          </a:p>
+        </p:txBody>
+      </p:sp>
+      <p:sp>
+        <p:nvSpPr>
+          <p:cNvPr id="18" name="Text 16"/>
+          <p:cNvSpPr/>
+          <p:nvPr/>
+        </p:nvSpPr>
+        <p:spPr>
+          <a:xfrm>
+            <a:off x="10046208" y="4187952"/>
+            <a:ext cx="201168" cy="256032"/>
+          </a:xfrm>
+          <a:prstGeom prst="rect">
+            <a:avLst/>
+          </a:prstGeom>
+          <a:noFill/>
+          <a:ln/>
+        </p:spPr>
+        <p:txBody>
+          <a:bodyPr wrap="square" lIns="0" tIns="0" rIns="0" bIns="0" rtlCol="0" anchor="ctr"/>
+          <a:lstStyle/>
+          <a:p>
+            <a:pPr algn="ctr" indent="0" marL="0">
+              <a:buNone/>
+            </a:pPr>
+            <a:r>
+              <a:rPr lang="en-US" sz="1800" b="1" dirty="0">
+                <a:solidFill>
+                  <a:srgbClr val="0068B7"/>
+                </a:solidFill>
+                <a:latin typeface="Aptos" pitchFamily="34" charset="0"/>
+                <a:ea typeface="Aptos" pitchFamily="34" charset="-122"/>
+                <a:cs typeface="Aptos" pitchFamily="34" charset="-120"/>
+              </a:rPr>
+              <a:t>â†’</a:t>
+            </a:r>
+            <a:endParaRPr lang="en-US" sz="1800" dirty="0"/>
+          </a:p>
+        </p:txBody>
+      </p:sp>
+      <p:sp>
+        <p:nvSpPr>
+          <p:cNvPr id="19" name="Shape 17"/>
+          <p:cNvSpPr/>
+          <p:nvPr/>
+        </p:nvSpPr>
+        <p:spPr>
+          <a:xfrm>
+            <a:off x="10274808" y="3977640"/>
+            <a:ext cx="972312" cy="749808"/>
+          </a:xfrm>
+          <a:prstGeom prst="roundRect">
+            <a:avLst>
+              <a:gd name="adj" fmla="val 14634"/>
+            </a:avLst>
+          </a:prstGeom>
+          <a:solidFill>
+            <a:srgbClr val="6A4CA3"/>
+          </a:solidFill>
+          <a:ln w="12700">
+            <a:solidFill>
+              <a:srgbClr val="6A4CA3"/>
+            </a:solidFill>
+            <a:prstDash val="solid"/>
+          </a:ln>
+        </p:spPr>
+      </p:sp>
+      <p:sp>
+        <p:nvSpPr>
+          <p:cNvPr id="20" name="Text 18"/>
+          <p:cNvSpPr/>
+          <p:nvPr/>
+        </p:nvSpPr>
+        <p:spPr>
+          <a:xfrm>
+            <a:off x="10347960" y="4169664"/>
+            <a:ext cx="826008" cy="310896"/>
+          </a:xfrm>
+          <a:prstGeom prst="rect">
+            <a:avLst/>
+          </a:prstGeom>
+          <a:noFill/>
+          <a:ln/>
+        </p:spPr>
+        <p:txBody>
+          <a:bodyPr wrap="square" lIns="0" tIns="0" rIns="0" bIns="0" rtlCol="0" anchor="ctr">
+            <a:normAutofit/>
+          </a:bodyPr>
+          <a:lstStyle/>
+          <a:p>
+            <a:pPr algn="ctr" indent="0" marL="0">
+              <a:buNone/>
+            </a:pPr>
+            <a:r>
+              <a:rPr lang="en-US" sz="1500" b="1" dirty="0">
+                <a:solidFill>
+                  <a:srgbClr val="FFFFFF"/>
+                </a:solidFill>
+                <a:latin typeface="Aptos" pitchFamily="34" charset="0"/>
+                <a:ea typeface="Aptos" pitchFamily="34" charset="-122"/>
+                <a:cs typeface="Aptos" pitchFamily="34" charset="-120"/>
+              </a:rPr>
+              <a:t>Action</a:t>
+            </a:r>
+            <a:endParaRPr lang="en-US" sz="1500" dirty="0"/>
           </a:p>
         </p:txBody>
       </p:sp>
@@ -13030,7 +13914,7 @@
                 <a:ea typeface="Aptos" pitchFamily="34" charset="-122"/>
                 <a:cs typeface="Aptos" pitchFamily="34" charset="-120"/>
               </a:rPr>
-              <a:t>© Paula Soper</a:t>
+              <a:t>Â© Paula Soper</a:t>
             </a:r>
             <a:endParaRPr lang="en-US" sz="800" dirty="0"/>
           </a:p>
@@ -13044,8 +13928,47 @@
         </p:nvSpPr>
         <p:spPr>
           <a:xfrm>
+            <a:off x="11137392" y="6510528"/>
+            <a:ext cx="411480" cy="201168"/>
+          </a:xfrm>
+          <a:prstGeom prst="rect">
+            <a:avLst/>
+          </a:prstGeom>
+          <a:noFill/>
+          <a:ln/>
+        </p:spPr>
+        <p:txBody>
+          <a:bodyPr wrap="square" lIns="0" tIns="0" rIns="0" bIns="0" rtlCol="0" anchor="ctr"/>
+          <a:lstStyle/>
+          <a:p>
+            <a:pPr algn="r" indent="0" marL="0">
+              <a:buNone/>
+            </a:pPr>
+            <a:r>
+              <a:rPr lang="en-US" sz="900" dirty="0">
+                <a:solidFill>
+                  <a:srgbClr val="5F7181"/>
+                </a:solidFill>
+                <a:latin typeface="Aptos" pitchFamily="34" charset="0"/>
+                <a:ea typeface="Aptos" pitchFamily="34" charset="-122"/>
+                <a:cs typeface="Aptos" pitchFamily="34" charset="-120"/>
+              </a:rPr>
+              <a:t>4</a:t>
+            </a:r>
+            <a:endParaRPr lang="en-US" sz="900" dirty="0"/>
+          </a:p>
+        </p:txBody>
+      </p:sp>
+      <p:sp>
+        <p:nvSpPr>
+          <p:cNvPr id="8" name="Text 6"/>
+          <p:cNvSpPr/>
+          <p:nvPr/>
+        </p:nvSpPr>
+        <p:spPr>
+          <a:xfrm>
             <a:off x="640080" y="658368"/>
-            <a:ext cx="10881360" cy="566928"/>
+            <a:ext cx="10881360" cy="713232"/>
           </a:xfrm>
           <a:prstGeom prst="rect">
             <a:avLst/>
@@ -13063,7 +13986,7 @@
               <a:buNone/>
             </a:pPr>
             <a:r>
-              <a:rPr lang="en-US" sz="2700" b="1" dirty="0">
+              <a:rPr lang="en-US" sz="3400" b="1" dirty="0">
                 <a:solidFill>
                   <a:srgbClr val="003A63"/>
                 </a:solidFill>
@@ -13073,20 +13996,20 @@
               </a:rPr>
               <a:t>Related toolkit resources</a:t>
             </a:r>
-            <a:endParaRPr lang="en-US" sz="2700" dirty="0"/>
-          </a:p>
-        </p:txBody>
-      </p:sp>
-      <p:sp>
-        <p:nvSpPr>
-          <p:cNvPr id="8" name="Text 6"/>
-          <p:cNvSpPr/>
-          <p:nvPr/>
-        </p:nvSpPr>
-        <p:spPr>
-          <a:xfrm>
-            <a:off x="868680" y="1417320"/>
-            <a:ext cx="6903720" cy="4480560"/>
+            <a:endParaRPr lang="en-US" sz="3400" dirty="0"/>
+          </a:p>
+        </p:txBody>
+      </p:sp>
+      <p:sp>
+        <p:nvSpPr>
+          <p:cNvPr id="9" name="Text 7"/>
+          <p:cNvSpPr/>
+          <p:nvPr/>
+        </p:nvSpPr>
+        <p:spPr>
+          <a:xfrm>
+            <a:off x="868680" y="1508760"/>
+            <a:ext cx="6812280" cy="3977640"/>
           </a:xfrm>
           <a:prstGeom prst="rect">
             <a:avLst/>
@@ -13101,7 +14024,7 @@
           <a:lstStyle/>
           <a:p>
             <a:r>
-              <a:rPr lang="en-US" sz="1460" dirty="0">
+              <a:rPr lang="en-US" sz="1850" dirty="0">
                 <a:solidFill>
                   <a:srgbClr val="17364A"/>
                 </a:solidFill>
@@ -13109,13 +14032,13 @@
                 <a:ea typeface="Aptos" pitchFamily="34" charset="-122"/>
                 <a:cs typeface="Aptos" pitchFamily="34" charset="-120"/>
               </a:rPr>
-              <a:t>Tool 4: AI Policy Landscape Scan (Worksheet) - Use AI Policy Landscape Scan to translate this lesson into a documented public health.</a:t>
-            </a:r>
-            <a:endParaRPr lang="en-US" sz="1460" dirty="0"/>
-          </a:p>
-          <a:p>
-            <a:r>
-              <a:rPr lang="en-US" sz="1460" dirty="0">
+              <a:t>Tool 4: AI Policy Landscape Scan (Worksheet) - Use AI Policy Landscape Scan to translate this lesson into a.</a:t>
+            </a:r>
+            <a:endParaRPr lang="en-US" sz="1850" dirty="0"/>
+          </a:p>
+          <a:p>
+            <a:r>
+              <a:rPr lang="en-US" sz="1850" dirty="0">
                 <a:solidFill>
                   <a:srgbClr val="17364A"/>
                 </a:solidFill>
@@ -13123,13 +14046,13 @@
                 <a:ea typeface="Aptos" pitchFamily="34" charset="-122"/>
                 <a:cs typeface="Aptos" pitchFamily="34" charset="-120"/>
               </a:rPr>
-              <a:t>Tool 5: AI Environmental and Resource Impact Review (Checklist) - Use AI Environmental and Resource Impact Review to translate this.</a:t>
-            </a:r>
-            <a:endParaRPr lang="en-US" sz="1460" dirty="0"/>
-          </a:p>
-          <a:p>
-            <a:r>
-              <a:rPr lang="en-US" sz="1460" dirty="0">
+              <a:t>Tool 5: AI Environmental and Resource Impact Review (Checklist) - Use AI Environmental and Resource Impact.</a:t>
+            </a:r>
+            <a:endParaRPr lang="en-US" sz="1850" dirty="0"/>
+          </a:p>
+          <a:p>
+            <a:r>
+              <a:rPr lang="en-US" sz="1850" dirty="0">
                 <a:solidFill>
                   <a:srgbClr val="17364A"/>
                 </a:solidFill>
@@ -13137,13 +14060,13 @@
                 <a:ea typeface="Aptos" pitchFamily="34" charset="-122"/>
                 <a:cs typeface="Aptos" pitchFamily="34" charset="-120"/>
               </a:rPr>
-              <a:t>Tool 6: Human-Centered AI Decision Rule Checklist (Checklist) - Use Human-Centered AI Decision Rule Checklist to translate this.</a:t>
-            </a:r>
-            <a:endParaRPr lang="en-US" sz="1460" dirty="0"/>
-          </a:p>
-          <a:p>
-            <a:r>
-              <a:rPr lang="en-US" sz="1460" dirty="0">
+              <a:t>Tool 6: Human-Centered AI Decision Rule Checklist (Checklist) - Use Human-Centered AI Decision Rule.</a:t>
+            </a:r>
+            <a:endParaRPr lang="en-US" sz="1850" dirty="0"/>
+          </a:p>
+          <a:p>
+            <a:r>
+              <a:rPr lang="en-US" sz="1850" dirty="0">
                 <a:solidFill>
                   <a:srgbClr val="17364A"/>
                 </a:solidFill>
@@ -13151,29 +14074,15 @@
                 <a:ea typeface="Aptos" pitchFamily="34" charset="-122"/>
                 <a:cs typeface="Aptos" pitchFamily="34" charset="-120"/>
               </a:rPr>
-              <a:t>Tool 8: AI Project Charter (Planning) - Use AI Project Charter to translate this lesson into a documented public health AI planning,.</a:t>
-            </a:r>
-            <a:endParaRPr lang="en-US" sz="1460" dirty="0"/>
-          </a:p>
-          <a:p>
-            <a:r>
-              <a:rPr lang="en-US" sz="1460" dirty="0">
-                <a:solidFill>
-                  <a:srgbClr val="17364A"/>
-                </a:solidFill>
-                <a:latin typeface="Aptos" pitchFamily="34" charset="0"/>
-                <a:ea typeface="Aptos" pitchFamily="34" charset="-122"/>
-                <a:cs typeface="Aptos" pitchFamily="34" charset="-120"/>
-              </a:rPr>
-              <a:t>Tool 9: Data Quality Assessment Checklist (Checklist) - Use this tool to complete or strengthen the practical exercise for the module.</a:t>
-            </a:r>
-            <a:endParaRPr lang="en-US" sz="1460" dirty="0"/>
-          </a:p>
-        </p:txBody>
-      </p:sp>
-      <p:sp>
-        <p:nvSpPr>
-          <p:cNvPr id="9" name="Shape 7"/>
+              <a:t>Tool 8: AI Project Charter (Planning) - Use AI Project Charter to translate this lesson into a documented.</a:t>
+            </a:r>
+            <a:endParaRPr lang="en-US" sz="1850" dirty="0"/>
+          </a:p>
+        </p:txBody>
+      </p:sp>
+      <p:sp>
+        <p:nvSpPr>
+          <p:cNvPr id="10" name="Shape 8"/>
           <p:cNvSpPr/>
           <p:nvPr/>
         </p:nvSpPr>
@@ -13200,14 +14109,14 @@
       </p:sp>
       <p:sp>
         <p:nvSpPr>
-          <p:cNvPr id="10" name="Text 8"/>
+          <p:cNvPr id="11" name="Text 9"/>
           <p:cNvSpPr/>
           <p:nvPr/>
         </p:nvSpPr>
         <p:spPr>
           <a:xfrm>
             <a:off x="8211312" y="1563624"/>
-            <a:ext cx="2734056" cy="201168"/>
+            <a:ext cx="2734056" cy="256032"/>
           </a:xfrm>
           <a:prstGeom prst="rect">
             <a:avLst/>
@@ -13223,7 +14132,7 @@
               <a:buNone/>
             </a:pPr>
             <a:r>
-              <a:rPr lang="en-US" sz="950" b="1" dirty="0">
+              <a:rPr lang="en-US" sz="1300" b="1" dirty="0">
                 <a:solidFill>
                   <a:srgbClr val="0068B7"/>
                 </a:solidFill>
@@ -13233,20 +14142,20 @@
               </a:rPr>
               <a:t>Use the tools</a:t>
             </a:r>
-            <a:endParaRPr lang="en-US" sz="950" dirty="0"/>
-          </a:p>
-        </p:txBody>
-      </p:sp>
-      <p:sp>
-        <p:nvSpPr>
-          <p:cNvPr id="11" name="Text 9"/>
-          <p:cNvSpPr/>
-          <p:nvPr/>
-        </p:nvSpPr>
-        <p:spPr>
-          <a:xfrm>
-            <a:off x="8211312" y="1856232"/>
-            <a:ext cx="2734056" cy="1536192"/>
+            <a:endParaRPr lang="en-US" sz="1300" dirty="0"/>
+          </a:p>
+        </p:txBody>
+      </p:sp>
+      <p:sp>
+        <p:nvSpPr>
+          <p:cNvPr id="12" name="Text 10"/>
+          <p:cNvSpPr/>
+          <p:nvPr/>
+        </p:nvSpPr>
+        <p:spPr>
+          <a:xfrm>
+            <a:off x="8211312" y="1920240"/>
+            <a:ext cx="2734056" cy="1463040"/>
           </a:xfrm>
           <a:prstGeom prst="rect">
             <a:avLst/>
@@ -13264,7 +14173,7 @@
               <a:buNone/>
             </a:pPr>
             <a:r>
-              <a:rPr lang="en-US" sz="1250" dirty="0">
+              <a:rPr lang="en-US" sz="1550" dirty="0">
                 <a:solidFill>
                   <a:srgbClr val="17364A"/>
                 </a:solidFill>
@@ -13274,32 +14183,32 @@
               </a:rPr>
               <a:t>Use linked tools when your department needs a structured worksheet, template, checklist, review process, or documentation artifact.</a:t>
             </a:r>
-            <a:endParaRPr lang="en-US" sz="1250" dirty="0"/>
-          </a:p>
-        </p:txBody>
-      </p:sp>
-      <p:sp>
-        <p:nvSpPr>
-          <p:cNvPr id="12" name="Shape 10"/>
-          <p:cNvSpPr/>
-          <p:nvPr/>
-        </p:nvSpPr>
-        <p:spPr>
-          <a:xfrm>
-            <a:off x="8046720" y="3794760"/>
-            <a:ext cx="3063240" cy="1508760"/>
+            <a:endParaRPr lang="en-US" sz="1550" dirty="0"/>
+          </a:p>
+        </p:txBody>
+      </p:sp>
+      <p:sp>
+        <p:nvSpPr>
+          <p:cNvPr id="13" name="Shape 11"/>
+          <p:cNvSpPr/>
+          <p:nvPr/>
+        </p:nvSpPr>
+        <p:spPr>
+          <a:xfrm>
+            <a:off x="7818120" y="3977640"/>
+            <a:ext cx="972312" cy="749808"/>
           </a:xfrm>
           <a:prstGeom prst="roundRect">
             <a:avLst>
-              <a:gd name="adj" fmla="val 7273"/>
+              <a:gd name="adj" fmla="val 14634"/>
             </a:avLst>
           </a:prstGeom>
           <a:solidFill>
-            <a:srgbClr val="EEF8ED"/>
+            <a:srgbClr val="0068B7"/>
           </a:solidFill>
           <a:ln w="12700">
             <a:solidFill>
-              <a:srgbClr val="B9D7E6"/>
+              <a:srgbClr val="0068B7"/>
             </a:solidFill>
             <a:prstDash val="solid"/>
           </a:ln>
@@ -13307,81 +14216,256 @@
       </p:sp>
       <p:sp>
         <p:nvSpPr>
-          <p:cNvPr id="13" name="Text 11"/>
-          <p:cNvSpPr/>
-          <p:nvPr/>
-        </p:nvSpPr>
-        <p:spPr>
-          <a:xfrm>
-            <a:off x="8211312" y="3941064"/>
-            <a:ext cx="2734056" cy="201168"/>
-          </a:xfrm>
-          <a:prstGeom prst="rect">
-            <a:avLst/>
-          </a:prstGeom>
-          <a:noFill/>
-          <a:ln/>
-        </p:spPr>
-        <p:txBody>
-          <a:bodyPr wrap="square" lIns="0" tIns="0" rIns="0" bIns="0" rtlCol="0" anchor="ctr"/>
-          <a:lstStyle/>
-          <a:p>
-            <a:pPr indent="0" marL="0">
-              <a:buNone/>
-            </a:pPr>
-            <a:r>
-              <a:rPr lang="en-US" sz="950" b="1" dirty="0">
-                <a:solidFill>
-                  <a:srgbClr val="0068B7"/>
-                </a:solidFill>
-                <a:latin typeface="Aptos" pitchFamily="34" charset="0"/>
-                <a:ea typeface="Aptos" pitchFamily="34" charset="-122"/>
-                <a:cs typeface="Aptos" pitchFamily="34" charset="-120"/>
-              </a:rPr>
-              <a:t>Avoid duplication</a:t>
-            </a:r>
-            <a:endParaRPr lang="en-US" sz="950" dirty="0"/>
-          </a:p>
-        </p:txBody>
-      </p:sp>
-      <p:sp>
-        <p:nvSpPr>
           <p:cNvPr id="14" name="Text 12"/>
           <p:cNvSpPr/>
           <p:nvPr/>
         </p:nvSpPr>
         <p:spPr>
           <a:xfrm>
-            <a:off x="8211312" y="4233672"/>
-            <a:ext cx="2734056" cy="941832"/>
-          </a:xfrm>
-          <a:prstGeom prst="rect">
-            <a:avLst/>
-          </a:prstGeom>
-          <a:noFill/>
-          <a:ln/>
-        </p:spPr>
-        <p:txBody>
-          <a:bodyPr wrap="square" lIns="0" tIns="0" rIns="0" bIns="0" rtlCol="0" anchor="t">
+            <a:off x="7891272" y="4169664"/>
+            <a:ext cx="826008" cy="310896"/>
+          </a:xfrm>
+          <a:prstGeom prst="rect">
+            <a:avLst/>
+          </a:prstGeom>
+          <a:noFill/>
+          <a:ln/>
+        </p:spPr>
+        <p:txBody>
+          <a:bodyPr wrap="square" lIns="0" tIns="0" rIns="0" bIns="0" rtlCol="0" anchor="ctr">
             <a:normAutofit/>
           </a:bodyPr>
           <a:lstStyle/>
           <a:p>
-            <a:pPr indent="0" marL="0">
-              <a:buNone/>
-            </a:pPr>
-            <a:r>
-              <a:rPr lang="en-US" sz="1250" dirty="0">
-                <a:solidFill>
-                  <a:srgbClr val="17364A"/>
-                </a:solidFill>
-                <a:latin typeface="Aptos" pitchFamily="34" charset="0"/>
-                <a:ea typeface="Aptos" pitchFamily="34" charset="-122"/>
-                <a:cs typeface="Aptos" pitchFamily="34" charset="-120"/>
-              </a:rPr>
-              <a:t>If your department already has a strong equivalent tool, adapt or use the existing process instead of recreating it.</a:t>
-            </a:r>
-            <a:endParaRPr lang="en-US" sz="1250" dirty="0"/>
+            <a:pPr algn="ctr" indent="0" marL="0">
+              <a:buNone/>
+            </a:pPr>
+            <a:r>
+              <a:rPr lang="en-US" sz="1500" b="1" dirty="0">
+                <a:solidFill>
+                  <a:srgbClr val="FFFFFF"/>
+                </a:solidFill>
+                <a:latin typeface="Aptos" pitchFamily="34" charset="0"/>
+                <a:ea typeface="Aptos" pitchFamily="34" charset="-122"/>
+                <a:cs typeface="Aptos" pitchFamily="34" charset="-120"/>
+              </a:rPr>
+              <a:t>Concept</a:t>
+            </a:r>
+            <a:endParaRPr lang="en-US" sz="1500" dirty="0"/>
+          </a:p>
+        </p:txBody>
+      </p:sp>
+      <p:sp>
+        <p:nvSpPr>
+          <p:cNvPr id="15" name="Text 13"/>
+          <p:cNvSpPr/>
+          <p:nvPr/>
+        </p:nvSpPr>
+        <p:spPr>
+          <a:xfrm>
+            <a:off x="8817864" y="4187952"/>
+            <a:ext cx="201168" cy="256032"/>
+          </a:xfrm>
+          <a:prstGeom prst="rect">
+            <a:avLst/>
+          </a:prstGeom>
+          <a:noFill/>
+          <a:ln/>
+        </p:spPr>
+        <p:txBody>
+          <a:bodyPr wrap="square" lIns="0" tIns="0" rIns="0" bIns="0" rtlCol="0" anchor="ctr"/>
+          <a:lstStyle/>
+          <a:p>
+            <a:pPr algn="ctr" indent="0" marL="0">
+              <a:buNone/>
+            </a:pPr>
+            <a:r>
+              <a:rPr lang="en-US" sz="1800" b="1" dirty="0">
+                <a:solidFill>
+                  <a:srgbClr val="0068B7"/>
+                </a:solidFill>
+                <a:latin typeface="Aptos" pitchFamily="34" charset="0"/>
+                <a:ea typeface="Aptos" pitchFamily="34" charset="-122"/>
+                <a:cs typeface="Aptos" pitchFamily="34" charset="-120"/>
+              </a:rPr>
+              <a:t>â†’</a:t>
+            </a:r>
+            <a:endParaRPr lang="en-US" sz="1800" dirty="0"/>
+          </a:p>
+        </p:txBody>
+      </p:sp>
+      <p:sp>
+        <p:nvSpPr>
+          <p:cNvPr id="16" name="Shape 14"/>
+          <p:cNvSpPr/>
+          <p:nvPr/>
+        </p:nvSpPr>
+        <p:spPr>
+          <a:xfrm>
+            <a:off x="9046464" y="3977640"/>
+            <a:ext cx="972312" cy="749808"/>
+          </a:xfrm>
+          <a:prstGeom prst="roundRect">
+            <a:avLst>
+              <a:gd name="adj" fmla="val 14634"/>
+            </a:avLst>
+          </a:prstGeom>
+          <a:solidFill>
+            <a:srgbClr val="2F8A28"/>
+          </a:solidFill>
+          <a:ln w="12700">
+            <a:solidFill>
+              <a:srgbClr val="2F8A28"/>
+            </a:solidFill>
+            <a:prstDash val="solid"/>
+          </a:ln>
+        </p:spPr>
+      </p:sp>
+      <p:sp>
+        <p:nvSpPr>
+          <p:cNvPr id="17" name="Text 15"/>
+          <p:cNvSpPr/>
+          <p:nvPr/>
+        </p:nvSpPr>
+        <p:spPr>
+          <a:xfrm>
+            <a:off x="9119616" y="4169664"/>
+            <a:ext cx="826008" cy="310896"/>
+          </a:xfrm>
+          <a:prstGeom prst="rect">
+            <a:avLst/>
+          </a:prstGeom>
+          <a:noFill/>
+          <a:ln/>
+        </p:spPr>
+        <p:txBody>
+          <a:bodyPr wrap="square" lIns="0" tIns="0" rIns="0" bIns="0" rtlCol="0" anchor="ctr">
+            <a:normAutofit/>
+          </a:bodyPr>
+          <a:lstStyle/>
+          <a:p>
+            <a:pPr algn="ctr" indent="0" marL="0">
+              <a:buNone/>
+            </a:pPr>
+            <a:r>
+              <a:rPr lang="en-US" sz="1500" b="1" dirty="0">
+                <a:solidFill>
+                  <a:srgbClr val="FFFFFF"/>
+                </a:solidFill>
+                <a:latin typeface="Aptos" pitchFamily="34" charset="0"/>
+                <a:ea typeface="Aptos" pitchFamily="34" charset="-122"/>
+                <a:cs typeface="Aptos" pitchFamily="34" charset="-120"/>
+              </a:rPr>
+              <a:t>Tool</a:t>
+            </a:r>
+            <a:endParaRPr lang="en-US" sz="1500" dirty="0"/>
+          </a:p>
+        </p:txBody>
+      </p:sp>
+      <p:sp>
+        <p:nvSpPr>
+          <p:cNvPr id="18" name="Text 16"/>
+          <p:cNvSpPr/>
+          <p:nvPr/>
+        </p:nvSpPr>
+        <p:spPr>
+          <a:xfrm>
+            <a:off x="10046208" y="4187952"/>
+            <a:ext cx="201168" cy="256032"/>
+          </a:xfrm>
+          <a:prstGeom prst="rect">
+            <a:avLst/>
+          </a:prstGeom>
+          <a:noFill/>
+          <a:ln/>
+        </p:spPr>
+        <p:txBody>
+          <a:bodyPr wrap="square" lIns="0" tIns="0" rIns="0" bIns="0" rtlCol="0" anchor="ctr"/>
+          <a:lstStyle/>
+          <a:p>
+            <a:pPr algn="ctr" indent="0" marL="0">
+              <a:buNone/>
+            </a:pPr>
+            <a:r>
+              <a:rPr lang="en-US" sz="1800" b="1" dirty="0">
+                <a:solidFill>
+                  <a:srgbClr val="0068B7"/>
+                </a:solidFill>
+                <a:latin typeface="Aptos" pitchFamily="34" charset="0"/>
+                <a:ea typeface="Aptos" pitchFamily="34" charset="-122"/>
+                <a:cs typeface="Aptos" pitchFamily="34" charset="-120"/>
+              </a:rPr>
+              <a:t>â†’</a:t>
+            </a:r>
+            <a:endParaRPr lang="en-US" sz="1800" dirty="0"/>
+          </a:p>
+        </p:txBody>
+      </p:sp>
+      <p:sp>
+        <p:nvSpPr>
+          <p:cNvPr id="19" name="Shape 17"/>
+          <p:cNvSpPr/>
+          <p:nvPr/>
+        </p:nvSpPr>
+        <p:spPr>
+          <a:xfrm>
+            <a:off x="10274808" y="3977640"/>
+            <a:ext cx="972312" cy="749808"/>
+          </a:xfrm>
+          <a:prstGeom prst="roundRect">
+            <a:avLst>
+              <a:gd name="adj" fmla="val 14634"/>
+            </a:avLst>
+          </a:prstGeom>
+          <a:solidFill>
+            <a:srgbClr val="D69A2D"/>
+          </a:solidFill>
+          <a:ln w="12700">
+            <a:solidFill>
+              <a:srgbClr val="D69A2D"/>
+            </a:solidFill>
+            <a:prstDash val="solid"/>
+          </a:ln>
+        </p:spPr>
+      </p:sp>
+      <p:sp>
+        <p:nvSpPr>
+          <p:cNvPr id="20" name="Text 18"/>
+          <p:cNvSpPr/>
+          <p:nvPr/>
+        </p:nvSpPr>
+        <p:spPr>
+          <a:xfrm>
+            <a:off x="10347960" y="4169664"/>
+            <a:ext cx="826008" cy="310896"/>
+          </a:xfrm>
+          <a:prstGeom prst="rect">
+            <a:avLst/>
+          </a:prstGeom>
+          <a:noFill/>
+          <a:ln/>
+        </p:spPr>
+        <p:txBody>
+          <a:bodyPr wrap="square" lIns="0" tIns="0" rIns="0" bIns="0" rtlCol="0" anchor="ctr">
+            <a:normAutofit/>
+          </a:bodyPr>
+          <a:lstStyle/>
+          <a:p>
+            <a:pPr algn="ctr" indent="0" marL="0">
+              <a:buNone/>
+            </a:pPr>
+            <a:r>
+              <a:rPr lang="en-US" sz="1500" b="1" dirty="0">
+                <a:solidFill>
+                  <a:srgbClr val="FFFFFF"/>
+                </a:solidFill>
+                <a:latin typeface="Aptos" pitchFamily="34" charset="0"/>
+                <a:ea typeface="Aptos" pitchFamily="34" charset="-122"/>
+                <a:cs typeface="Aptos" pitchFamily="34" charset="-120"/>
+              </a:rPr>
+              <a:t>Artifact</a:t>
+            </a:r>
+            <a:endParaRPr lang="en-US" sz="1500" dirty="0"/>
           </a:p>
         </p:txBody>
       </p:sp>
@@ -13578,7 +14662,7 @@
                 <a:ea typeface="Aptos" pitchFamily="34" charset="-122"/>
                 <a:cs typeface="Aptos" pitchFamily="34" charset="-120"/>
               </a:rPr>
-              <a:t>© Paula Soper</a:t>
+              <a:t>Â© Paula Soper</a:t>
             </a:r>
             <a:endParaRPr lang="en-US" sz="800" dirty="0"/>
           </a:p>
@@ -13586,7 +14670,46 @@
       </p:sp>
       <p:sp>
         <p:nvSpPr>
-          <p:cNvPr id="7" name="Shape 5"/>
+          <p:cNvPr id="7" name="Text 5"/>
+          <p:cNvSpPr/>
+          <p:nvPr/>
+        </p:nvSpPr>
+        <p:spPr>
+          <a:xfrm>
+            <a:off x="11137392" y="6510528"/>
+            <a:ext cx="411480" cy="201168"/>
+          </a:xfrm>
+          <a:prstGeom prst="rect">
+            <a:avLst/>
+          </a:prstGeom>
+          <a:noFill/>
+          <a:ln/>
+        </p:spPr>
+        <p:txBody>
+          <a:bodyPr wrap="square" lIns="0" tIns="0" rIns="0" bIns="0" rtlCol="0" anchor="ctr"/>
+          <a:lstStyle/>
+          <a:p>
+            <a:pPr algn="r" indent="0" marL="0">
+              <a:buNone/>
+            </a:pPr>
+            <a:r>
+              <a:rPr lang="en-US" sz="900" dirty="0">
+                <a:solidFill>
+                  <a:srgbClr val="5F7181"/>
+                </a:solidFill>
+                <a:latin typeface="Aptos" pitchFamily="34" charset="0"/>
+                <a:ea typeface="Aptos" pitchFamily="34" charset="-122"/>
+                <a:cs typeface="Aptos" pitchFamily="34" charset="-120"/>
+              </a:rPr>
+              <a:t>5</a:t>
+            </a:r>
+            <a:endParaRPr lang="en-US" sz="900" dirty="0"/>
+          </a:p>
+        </p:txBody>
+      </p:sp>
+      <p:sp>
+        <p:nvSpPr>
+          <p:cNvPr id="8" name="Shape 6"/>
           <p:cNvSpPr/>
           <p:nvPr/>
         </p:nvSpPr>
@@ -13611,7 +14734,7 @@
       </p:sp>
       <p:sp>
         <p:nvSpPr>
-          <p:cNvPr id="8" name="Text 6"/>
+          <p:cNvPr id="9" name="Text 7"/>
           <p:cNvSpPr/>
           <p:nvPr/>
         </p:nvSpPr>
@@ -13650,14 +14773,14 @@
       </p:sp>
       <p:sp>
         <p:nvSpPr>
-          <p:cNvPr id="9" name="Text 7"/>
+          <p:cNvPr id="10" name="Text 8"/>
           <p:cNvSpPr/>
           <p:nvPr/>
         </p:nvSpPr>
         <p:spPr>
           <a:xfrm>
             <a:off x="640080" y="621792"/>
-            <a:ext cx="10881360" cy="566928"/>
+            <a:ext cx="10881360" cy="713232"/>
           </a:xfrm>
           <a:prstGeom prst="rect">
             <a:avLst/>
@@ -13675,7 +14798,7 @@
               <a:buNone/>
             </a:pPr>
             <a:r>
-              <a:rPr lang="en-US" sz="2700" b="1" dirty="0">
+              <a:rPr lang="en-US" sz="3400" b="1" dirty="0">
                 <a:solidFill>
                   <a:srgbClr val="003A63"/>
                 </a:solidFill>
@@ -13685,20 +14808,20 @@
               </a:rPr>
               <a:t>Learning Objectives</a:t>
             </a:r>
-            <a:endParaRPr lang="en-US" sz="2700" dirty="0"/>
-          </a:p>
-        </p:txBody>
-      </p:sp>
-      <p:sp>
-        <p:nvSpPr>
-          <p:cNvPr id="10" name="Text 8"/>
-          <p:cNvSpPr/>
-          <p:nvPr/>
-        </p:nvSpPr>
-        <p:spPr>
-          <a:xfrm>
-            <a:off x="868680" y="1417320"/>
-            <a:ext cx="6675120" cy="4434840"/>
+            <a:endParaRPr lang="en-US" sz="3400" dirty="0"/>
+          </a:p>
+        </p:txBody>
+      </p:sp>
+      <p:sp>
+        <p:nvSpPr>
+          <p:cNvPr id="11" name="Text 9"/>
+          <p:cNvSpPr/>
+          <p:nvPr/>
+        </p:nvSpPr>
+        <p:spPr>
+          <a:xfrm>
+            <a:off x="868680" y="1508760"/>
+            <a:ext cx="6537960" cy="4160520"/>
           </a:xfrm>
           <a:prstGeom prst="rect">
             <a:avLst/>
@@ -13713,7 +14836,7 @@
           <a:lstStyle/>
           <a:p>
             <a:r>
-              <a:rPr lang="en-US" sz="1700" dirty="0">
+              <a:rPr lang="en-US" sz="2100" dirty="0">
                 <a:solidFill>
                   <a:srgbClr val="17364A"/>
                 </a:solidFill>
@@ -13723,11 +14846,11 @@
               </a:rPr>
               <a:t>Explain why AI readiness depends on public health data modernization, not only on access to an AI tool.</a:t>
             </a:r>
-            <a:endParaRPr lang="en-US" sz="1700" dirty="0"/>
-          </a:p>
-          <a:p>
-            <a:r>
-              <a:rPr lang="en-US" sz="1700" dirty="0">
+            <a:endParaRPr lang="en-US" sz="2100" dirty="0"/>
+          </a:p>
+          <a:p>
+            <a:r>
+              <a:rPr lang="en-US" sz="2100" dirty="0">
                 <a:solidFill>
                   <a:srgbClr val="17364A"/>
                 </a:solidFill>
@@ -13735,13 +14858,13 @@
                 <a:ea typeface="Aptos" pitchFamily="34" charset="-122"/>
                 <a:cs typeface="Aptos" pitchFamily="34" charset="-120"/>
               </a:rPr>
-              <a:t>Describe the major components of an AI-enabled public health architecture, including source systems, data exchange, data.</a:t>
-            </a:r>
-            <a:endParaRPr lang="en-US" sz="1700" dirty="0"/>
-          </a:p>
-          <a:p>
-            <a:r>
-              <a:rPr lang="en-US" sz="1700" dirty="0">
+              <a:t>Describe the major components of an AI-enabled public health architecture, including source systems,.</a:t>
+            </a:r>
+            <a:endParaRPr lang="en-US" sz="2100" dirty="0"/>
+          </a:p>
+          <a:p>
+            <a:r>
+              <a:rPr lang="en-US" sz="2100" dirty="0">
                 <a:solidFill>
                   <a:srgbClr val="17364A"/>
                 </a:solidFill>
@@ -13749,29 +14872,15 @@
                 <a:ea typeface="Aptos" pitchFamily="34" charset="-122"/>
                 <a:cs typeface="Aptos" pitchFamily="34" charset="-120"/>
               </a:rPr>
-              <a:t>Identify the systems of record, source systems, data flows, and human decision points in a public health workflow.</a:t>
-            </a:r>
-            <a:endParaRPr lang="en-US" sz="1700" dirty="0"/>
-          </a:p>
-          <a:p>
-            <a:r>
-              <a:rPr lang="en-US" sz="1700" dirty="0">
-                <a:solidFill>
-                  <a:srgbClr val="17364A"/>
-                </a:solidFill>
-                <a:latin typeface="Aptos" pitchFamily="34" charset="0"/>
-                <a:ea typeface="Aptos" pitchFamily="34" charset="-122"/>
-                <a:cs typeface="Aptos" pitchFamily="34" charset="-120"/>
-              </a:rPr>
-              <a:t>Assess where AI could support a workflow and where human review, legal authority, epidemiologic judgment, or community context.</a:t>
-            </a:r>
-            <a:endParaRPr lang="en-US" sz="1700" dirty="0"/>
-          </a:p>
-        </p:txBody>
-      </p:sp>
-      <p:sp>
-        <p:nvSpPr>
-          <p:cNvPr id="11" name="Shape 9"/>
+              <a:t>Identify the systems of record, source systems, data flows, and human decision points in a public.</a:t>
+            </a:r>
+            <a:endParaRPr lang="en-US" sz="2100" dirty="0"/>
+          </a:p>
+        </p:txBody>
+      </p:sp>
+      <p:sp>
+        <p:nvSpPr>
+          <p:cNvPr id="12" name="Shape 10"/>
           <p:cNvSpPr/>
           <p:nvPr/>
         </p:nvSpPr>
@@ -13798,14 +14907,14 @@
       </p:sp>
       <p:sp>
         <p:nvSpPr>
-          <p:cNvPr id="12" name="Text 10"/>
+          <p:cNvPr id="13" name="Text 11"/>
           <p:cNvSpPr/>
           <p:nvPr/>
         </p:nvSpPr>
         <p:spPr>
           <a:xfrm>
             <a:off x="8074152" y="1563624"/>
-            <a:ext cx="2825496" cy="201168"/>
+            <a:ext cx="2825496" cy="256032"/>
           </a:xfrm>
           <a:prstGeom prst="rect">
             <a:avLst/>
@@ -13821,7 +14930,7 @@
               <a:buNone/>
             </a:pPr>
             <a:r>
-              <a:rPr lang="en-US" sz="950" b="1" dirty="0">
+              <a:rPr lang="en-US" sz="1300" b="1" dirty="0">
                 <a:solidFill>
                   <a:srgbClr val="0068B7"/>
                 </a:solidFill>
@@ -13831,20 +14940,20 @@
               </a:rPr>
               <a:t>Key idea</a:t>
             </a:r>
-            <a:endParaRPr lang="en-US" sz="950" dirty="0"/>
-          </a:p>
-        </p:txBody>
-      </p:sp>
-      <p:sp>
-        <p:nvSpPr>
-          <p:cNvPr id="13" name="Text 11"/>
-          <p:cNvSpPr/>
-          <p:nvPr/>
-        </p:nvSpPr>
-        <p:spPr>
-          <a:xfrm>
-            <a:off x="8074152" y="1856232"/>
-            <a:ext cx="2825496" cy="1261872"/>
+            <a:endParaRPr lang="en-US" sz="1300" dirty="0"/>
+          </a:p>
+        </p:txBody>
+      </p:sp>
+      <p:sp>
+        <p:nvSpPr>
+          <p:cNvPr id="14" name="Text 12"/>
+          <p:cNvSpPr/>
+          <p:nvPr/>
+        </p:nvSpPr>
+        <p:spPr>
+          <a:xfrm>
+            <a:off x="8074152" y="1920240"/>
+            <a:ext cx="2825496" cy="1188720"/>
           </a:xfrm>
           <a:prstGeom prst="rect">
             <a:avLst/>
@@ -13862,7 +14971,7 @@
               <a:buNone/>
             </a:pPr>
             <a:r>
-              <a:rPr lang="en-US" sz="1250" dirty="0">
+              <a:rPr lang="en-US" sz="1550" dirty="0">
                 <a:solidFill>
                   <a:srgbClr val="17364A"/>
                 </a:solidFill>
@@ -13872,13 +14981,13 @@
               </a:rPr>
               <a:t>Explain why AI readiness depends on public health data modernization, not only on access to an AI tool.</a:t>
             </a:r>
-            <a:endParaRPr lang="en-US" sz="1250" dirty="0"/>
-          </a:p>
-        </p:txBody>
-      </p:sp>
-      <p:sp>
-        <p:nvSpPr>
-          <p:cNvPr id="14" name="Shape 12"/>
+            <a:endParaRPr lang="en-US" sz="1550" dirty="0"/>
+          </a:p>
+        </p:txBody>
+      </p:sp>
+      <p:sp>
+        <p:nvSpPr>
+          <p:cNvPr id="15" name="Shape 13"/>
           <p:cNvSpPr/>
           <p:nvPr/>
         </p:nvSpPr>
@@ -13905,14 +15014,14 @@
       </p:sp>
       <p:sp>
         <p:nvSpPr>
-          <p:cNvPr id="15" name="Text 13"/>
+          <p:cNvPr id="16" name="Text 14"/>
           <p:cNvSpPr/>
           <p:nvPr/>
         </p:nvSpPr>
         <p:spPr>
           <a:xfrm>
             <a:off x="8074152" y="3666744"/>
-            <a:ext cx="2825496" cy="201168"/>
+            <a:ext cx="2825496" cy="256032"/>
           </a:xfrm>
           <a:prstGeom prst="rect">
             <a:avLst/>
@@ -13928,7 +15037,7 @@
               <a:buNone/>
             </a:pPr>
             <a:r>
-              <a:rPr lang="en-US" sz="950" b="1" dirty="0">
+              <a:rPr lang="en-US" sz="1300" b="1" dirty="0">
                 <a:solidFill>
                   <a:srgbClr val="0068B7"/>
                 </a:solidFill>
@@ -13938,20 +15047,20 @@
               </a:rPr>
               <a:t>Use this for</a:t>
             </a:r>
-            <a:endParaRPr lang="en-US" sz="950" dirty="0"/>
-          </a:p>
-        </p:txBody>
-      </p:sp>
-      <p:sp>
-        <p:nvSpPr>
-          <p:cNvPr id="16" name="Text 14"/>
-          <p:cNvSpPr/>
-          <p:nvPr/>
-        </p:nvSpPr>
-        <p:spPr>
-          <a:xfrm>
-            <a:off x="8074152" y="3959352"/>
-            <a:ext cx="2825496" cy="1170432"/>
+            <a:endParaRPr lang="en-US" sz="1300" dirty="0"/>
+          </a:p>
+        </p:txBody>
+      </p:sp>
+      <p:sp>
+        <p:nvSpPr>
+          <p:cNvPr id="17" name="Text 15"/>
+          <p:cNvSpPr/>
+          <p:nvPr/>
+        </p:nvSpPr>
+        <p:spPr>
+          <a:xfrm>
+            <a:off x="8074152" y="4023360"/>
+            <a:ext cx="2825496" cy="1097280"/>
           </a:xfrm>
           <a:prstGeom prst="rect">
             <a:avLst/>
@@ -13969,7 +15078,7 @@
               <a:buNone/>
             </a:pPr>
             <a:r>
-              <a:rPr lang="en-US" sz="1250" dirty="0">
+              <a:rPr lang="en-US" sz="1550" dirty="0">
                 <a:solidFill>
                   <a:srgbClr val="17364A"/>
                 </a:solidFill>
@@ -13979,7 +15088,7 @@
               </a:rPr>
               <a:t>Connect the concept to public health decisions, safeguards, documentation, or implementation work.</a:t>
             </a:r>
-            <a:endParaRPr lang="en-US" sz="1250" dirty="0"/>
+            <a:endParaRPr lang="en-US" sz="1550" dirty="0"/>
           </a:p>
         </p:txBody>
       </p:sp>
@@ -14176,7 +15285,7 @@
                 <a:ea typeface="Aptos" pitchFamily="34" charset="-122"/>
                 <a:cs typeface="Aptos" pitchFamily="34" charset="-120"/>
               </a:rPr>
-              <a:t>© Paula Soper</a:t>
+              <a:t>Â© Paula Soper</a:t>
             </a:r>
             <a:endParaRPr lang="en-US" sz="800" dirty="0"/>
           </a:p>
@@ -14190,8 +15299,47 @@
         </p:nvSpPr>
         <p:spPr>
           <a:xfrm>
+            <a:off x="11137392" y="6510528"/>
+            <a:ext cx="411480" cy="201168"/>
+          </a:xfrm>
+          <a:prstGeom prst="rect">
+            <a:avLst/>
+          </a:prstGeom>
+          <a:noFill/>
+          <a:ln/>
+        </p:spPr>
+        <p:txBody>
+          <a:bodyPr wrap="square" lIns="0" tIns="0" rIns="0" bIns="0" rtlCol="0" anchor="ctr"/>
+          <a:lstStyle/>
+          <a:p>
+            <a:pPr algn="r" indent="0" marL="0">
+              <a:buNone/>
+            </a:pPr>
+            <a:r>
+              <a:rPr lang="en-US" sz="900" dirty="0">
+                <a:solidFill>
+                  <a:srgbClr val="5F7181"/>
+                </a:solidFill>
+                <a:latin typeface="Aptos" pitchFamily="34" charset="0"/>
+                <a:ea typeface="Aptos" pitchFamily="34" charset="-122"/>
+                <a:cs typeface="Aptos" pitchFamily="34" charset="-120"/>
+              </a:rPr>
+              <a:t>6</a:t>
+            </a:r>
+            <a:endParaRPr lang="en-US" sz="900" dirty="0"/>
+          </a:p>
+        </p:txBody>
+      </p:sp>
+      <p:sp>
+        <p:nvSpPr>
+          <p:cNvPr id="8" name="Text 6"/>
+          <p:cNvSpPr/>
+          <p:nvPr/>
+        </p:nvSpPr>
+        <p:spPr>
+          <a:xfrm>
             <a:off x="640080" y="658368"/>
-            <a:ext cx="10881360" cy="566928"/>
+            <a:ext cx="10881360" cy="713232"/>
           </a:xfrm>
           <a:prstGeom prst="rect">
             <a:avLst/>
@@ -14209,7 +15357,7 @@
               <a:buNone/>
             </a:pPr>
             <a:r>
-              <a:rPr lang="en-US" sz="2700" b="1" dirty="0">
+              <a:rPr lang="en-US" sz="3400" b="1" dirty="0">
                 <a:solidFill>
                   <a:srgbClr val="003A63"/>
                 </a:solidFill>
@@ -14219,20 +15367,20 @@
               </a:rPr>
               <a:t>Learning Objectives Continued</a:t>
             </a:r>
-            <a:endParaRPr lang="en-US" sz="2700" dirty="0"/>
-          </a:p>
-        </p:txBody>
-      </p:sp>
-      <p:sp>
-        <p:nvSpPr>
-          <p:cNvPr id="8" name="Text 6"/>
-          <p:cNvSpPr/>
-          <p:nvPr/>
-        </p:nvSpPr>
-        <p:spPr>
-          <a:xfrm>
-            <a:off x="868680" y="1417320"/>
-            <a:ext cx="6675120" cy="4434840"/>
+            <a:endParaRPr lang="en-US" sz="3400" dirty="0"/>
+          </a:p>
+        </p:txBody>
+      </p:sp>
+      <p:sp>
+        <p:nvSpPr>
+          <p:cNvPr id="9" name="Text 7"/>
+          <p:cNvSpPr/>
+          <p:nvPr/>
+        </p:nvSpPr>
+        <p:spPr>
+          <a:xfrm>
+            <a:off x="868680" y="1508760"/>
+            <a:ext cx="6537960" cy="4160520"/>
           </a:xfrm>
           <a:prstGeom prst="rect">
             <a:avLst/>
@@ -14247,7 +15395,7 @@
           <a:lstStyle/>
           <a:p>
             <a:r>
-              <a:rPr lang="en-US" sz="1700" dirty="0">
+              <a:rPr lang="en-US" sz="2100" dirty="0">
                 <a:solidFill>
                   <a:srgbClr val="17364A"/>
                 </a:solidFill>
@@ -14255,15 +15403,15 @@
                 <a:ea typeface="Aptos" pitchFamily="34" charset="-122"/>
                 <a:cs typeface="Aptos" pitchFamily="34" charset="-120"/>
               </a:rPr>
-              <a:t>Produce an AI-enabled workflow architecture map and readiness memo that can support governance review, implementation.</a:t>
-            </a:r>
-            <a:endParaRPr lang="en-US" sz="1700" dirty="0"/>
-          </a:p>
-        </p:txBody>
-      </p:sp>
-      <p:sp>
-        <p:nvSpPr>
-          <p:cNvPr id="9" name="Shape 7"/>
+              <a:t>Produce an AI-enabled workflow architecture map and readiness memo that can support governance review,.</a:t>
+            </a:r>
+            <a:endParaRPr lang="en-US" sz="2100" dirty="0"/>
+          </a:p>
+        </p:txBody>
+      </p:sp>
+      <p:sp>
+        <p:nvSpPr>
+          <p:cNvPr id="10" name="Shape 8"/>
           <p:cNvSpPr/>
           <p:nvPr/>
         </p:nvSpPr>
@@ -14290,14 +15438,14 @@
       </p:sp>
       <p:sp>
         <p:nvSpPr>
-          <p:cNvPr id="10" name="Text 8"/>
+          <p:cNvPr id="11" name="Text 9"/>
           <p:cNvSpPr/>
           <p:nvPr/>
         </p:nvSpPr>
         <p:spPr>
           <a:xfrm>
             <a:off x="8074152" y="1563624"/>
-            <a:ext cx="2825496" cy="201168"/>
+            <a:ext cx="2825496" cy="256032"/>
           </a:xfrm>
           <a:prstGeom prst="rect">
             <a:avLst/>
@@ -14313,7 +15461,7 @@
               <a:buNone/>
             </a:pPr>
             <a:r>
-              <a:rPr lang="en-US" sz="950" b="1" dirty="0">
+              <a:rPr lang="en-US" sz="1300" b="1" dirty="0">
                 <a:solidFill>
                   <a:srgbClr val="0068B7"/>
                 </a:solidFill>
@@ -14323,20 +15471,20 @@
               </a:rPr>
               <a:t>Key idea</a:t>
             </a:r>
-            <a:endParaRPr lang="en-US" sz="950" dirty="0"/>
-          </a:p>
-        </p:txBody>
-      </p:sp>
-      <p:sp>
-        <p:nvSpPr>
-          <p:cNvPr id="11" name="Text 9"/>
-          <p:cNvSpPr/>
-          <p:nvPr/>
-        </p:nvSpPr>
-        <p:spPr>
-          <a:xfrm>
-            <a:off x="8074152" y="1856232"/>
-            <a:ext cx="2825496" cy="1261872"/>
+            <a:endParaRPr lang="en-US" sz="1300" dirty="0"/>
+          </a:p>
+        </p:txBody>
+      </p:sp>
+      <p:sp>
+        <p:nvSpPr>
+          <p:cNvPr id="12" name="Text 10"/>
+          <p:cNvSpPr/>
+          <p:nvPr/>
+        </p:nvSpPr>
+        <p:spPr>
+          <a:xfrm>
+            <a:off x="8074152" y="1920240"/>
+            <a:ext cx="2825496" cy="1188720"/>
           </a:xfrm>
           <a:prstGeom prst="rect">
             <a:avLst/>
@@ -14354,7 +15502,7 @@
               <a:buNone/>
             </a:pPr>
             <a:r>
-              <a:rPr lang="en-US" sz="1250" dirty="0">
+              <a:rPr lang="en-US" sz="1550" dirty="0">
                 <a:solidFill>
                   <a:srgbClr val="17364A"/>
                 </a:solidFill>
@@ -14362,15 +15510,15 @@
                 <a:ea typeface="Aptos" pitchFamily="34" charset="-122"/>
                 <a:cs typeface="Aptos" pitchFamily="34" charset="-120"/>
               </a:rPr>
-              <a:t>Produce an AI-enabled workflow architecture map and readiness memo that can support governance review, implementation.</a:t>
-            </a:r>
-            <a:endParaRPr lang="en-US" sz="1250" dirty="0"/>
-          </a:p>
-        </p:txBody>
-      </p:sp>
-      <p:sp>
-        <p:nvSpPr>
-          <p:cNvPr id="12" name="Shape 10"/>
+              <a:t>Produce an AI-enabled workflow architecture map and readiness memo that can support governance review,.</a:t>
+            </a:r>
+            <a:endParaRPr lang="en-US" sz="1550" dirty="0"/>
+          </a:p>
+        </p:txBody>
+      </p:sp>
+      <p:sp>
+        <p:nvSpPr>
+          <p:cNvPr id="13" name="Shape 11"/>
           <p:cNvSpPr/>
           <p:nvPr/>
         </p:nvSpPr>
@@ -14397,14 +15545,14 @@
       </p:sp>
       <p:sp>
         <p:nvSpPr>
-          <p:cNvPr id="13" name="Text 11"/>
+          <p:cNvPr id="14" name="Text 12"/>
           <p:cNvSpPr/>
           <p:nvPr/>
         </p:nvSpPr>
         <p:spPr>
           <a:xfrm>
             <a:off x="8074152" y="3666744"/>
-            <a:ext cx="2825496" cy="201168"/>
+            <a:ext cx="2825496" cy="256032"/>
           </a:xfrm>
           <a:prstGeom prst="rect">
             <a:avLst/>
@@ -14420,7 +15568,7 @@
               <a:buNone/>
             </a:pPr>
             <a:r>
-              <a:rPr lang="en-US" sz="950" b="1" dirty="0">
+              <a:rPr lang="en-US" sz="1300" b="1" dirty="0">
                 <a:solidFill>
                   <a:srgbClr val="0068B7"/>
                 </a:solidFill>
@@ -14430,20 +15578,20 @@
               </a:rPr>
               <a:t>Use this for</a:t>
             </a:r>
-            <a:endParaRPr lang="en-US" sz="950" dirty="0"/>
-          </a:p>
-        </p:txBody>
-      </p:sp>
-      <p:sp>
-        <p:nvSpPr>
-          <p:cNvPr id="14" name="Text 12"/>
-          <p:cNvSpPr/>
-          <p:nvPr/>
-        </p:nvSpPr>
-        <p:spPr>
-          <a:xfrm>
-            <a:off x="8074152" y="3959352"/>
-            <a:ext cx="2825496" cy="1170432"/>
+            <a:endParaRPr lang="en-US" sz="1300" dirty="0"/>
+          </a:p>
+        </p:txBody>
+      </p:sp>
+      <p:sp>
+        <p:nvSpPr>
+          <p:cNvPr id="15" name="Text 13"/>
+          <p:cNvSpPr/>
+          <p:nvPr/>
+        </p:nvSpPr>
+        <p:spPr>
+          <a:xfrm>
+            <a:off x="8074152" y="4023360"/>
+            <a:ext cx="2825496" cy="1097280"/>
           </a:xfrm>
           <a:prstGeom prst="rect">
             <a:avLst/>
@@ -14461,7 +15609,7 @@
               <a:buNone/>
             </a:pPr>
             <a:r>
-              <a:rPr lang="en-US" sz="1250" dirty="0">
+              <a:rPr lang="en-US" sz="1550" dirty="0">
                 <a:solidFill>
                   <a:srgbClr val="17364A"/>
                 </a:solidFill>
@@ -14471,7 +15619,7 @@
               </a:rPr>
               <a:t>Connect the concept to public health decisions, safeguards, documentation, or implementation work.</a:t>
             </a:r>
-            <a:endParaRPr lang="en-US" sz="1250" dirty="0"/>
+            <a:endParaRPr lang="en-US" sz="1550" dirty="0"/>
           </a:p>
         </p:txBody>
       </p:sp>
@@ -14668,7 +15816,7 @@
                 <a:ea typeface="Aptos" pitchFamily="34" charset="-122"/>
                 <a:cs typeface="Aptos" pitchFamily="34" charset="-120"/>
               </a:rPr>
-              <a:t>© Paula Soper</a:t>
+              <a:t>Â© Paula Soper</a:t>
             </a:r>
             <a:endParaRPr lang="en-US" sz="800" dirty="0"/>
           </a:p>
@@ -14676,7 +15824,46 @@
       </p:sp>
       <p:sp>
         <p:nvSpPr>
-          <p:cNvPr id="7" name="Shape 5"/>
+          <p:cNvPr id="7" name="Text 5"/>
+          <p:cNvSpPr/>
+          <p:nvPr/>
+        </p:nvSpPr>
+        <p:spPr>
+          <a:xfrm>
+            <a:off x="11137392" y="6510528"/>
+            <a:ext cx="411480" cy="201168"/>
+          </a:xfrm>
+          <a:prstGeom prst="rect">
+            <a:avLst/>
+          </a:prstGeom>
+          <a:noFill/>
+          <a:ln/>
+        </p:spPr>
+        <p:txBody>
+          <a:bodyPr wrap="square" lIns="0" tIns="0" rIns="0" bIns="0" rtlCol="0" anchor="ctr"/>
+          <a:lstStyle/>
+          <a:p>
+            <a:pPr algn="r" indent="0" marL="0">
+              <a:buNone/>
+            </a:pPr>
+            <a:r>
+              <a:rPr lang="en-US" sz="900" dirty="0">
+                <a:solidFill>
+                  <a:srgbClr val="5F7181"/>
+                </a:solidFill>
+                <a:latin typeface="Aptos" pitchFamily="34" charset="0"/>
+                <a:ea typeface="Aptos" pitchFamily="34" charset="-122"/>
+                <a:cs typeface="Aptos" pitchFamily="34" charset="-120"/>
+              </a:rPr>
+              <a:t>7</a:t>
+            </a:r>
+            <a:endParaRPr lang="en-US" sz="900" dirty="0"/>
+          </a:p>
+        </p:txBody>
+      </p:sp>
+      <p:sp>
+        <p:nvSpPr>
+          <p:cNvPr id="8" name="Shape 6"/>
           <p:cNvSpPr/>
           <p:nvPr/>
         </p:nvSpPr>
@@ -14701,7 +15888,7 @@
       </p:sp>
       <p:sp>
         <p:nvSpPr>
-          <p:cNvPr id="8" name="Text 6"/>
+          <p:cNvPr id="9" name="Text 7"/>
           <p:cNvSpPr/>
           <p:nvPr/>
         </p:nvSpPr>
@@ -14740,14 +15927,14 @@
       </p:sp>
       <p:sp>
         <p:nvSpPr>
-          <p:cNvPr id="9" name="Text 7"/>
+          <p:cNvPr id="10" name="Text 8"/>
           <p:cNvSpPr/>
           <p:nvPr/>
         </p:nvSpPr>
         <p:spPr>
           <a:xfrm>
             <a:off x="640080" y="621792"/>
-            <a:ext cx="10881360" cy="566928"/>
+            <a:ext cx="10881360" cy="713232"/>
           </a:xfrm>
           <a:prstGeom prst="rect">
             <a:avLst/>
@@ -14765,7 +15952,7 @@
               <a:buNone/>
             </a:pPr>
             <a:r>
-              <a:rPr lang="en-US" sz="2700" b="1" dirty="0">
+              <a:rPr lang="en-US" sz="3400" b="1" dirty="0">
                 <a:solidFill>
                   <a:srgbClr val="003A63"/>
                 </a:solidFill>
@@ -14775,20 +15962,20 @@
               </a:rPr>
               <a:t>Module Overview</a:t>
             </a:r>
-            <a:endParaRPr lang="en-US" sz="2700" dirty="0"/>
-          </a:p>
-        </p:txBody>
-      </p:sp>
-      <p:sp>
-        <p:nvSpPr>
-          <p:cNvPr id="10" name="Text 8"/>
-          <p:cNvSpPr/>
-          <p:nvPr/>
-        </p:nvSpPr>
-        <p:spPr>
-          <a:xfrm>
-            <a:off x="868680" y="1417320"/>
-            <a:ext cx="6675120" cy="4434840"/>
+            <a:endParaRPr lang="en-US" sz="3400" dirty="0"/>
+          </a:p>
+        </p:txBody>
+      </p:sp>
+      <p:sp>
+        <p:nvSpPr>
+          <p:cNvPr id="11" name="Text 9"/>
+          <p:cNvSpPr/>
+          <p:nvPr/>
+        </p:nvSpPr>
+        <p:spPr>
+          <a:xfrm>
+            <a:off x="868680" y="1508760"/>
+            <a:ext cx="6537960" cy="4160520"/>
           </a:xfrm>
           <a:prstGeom prst="rect">
             <a:avLst/>
@@ -14803,7 +15990,7 @@
           <a:lstStyle/>
           <a:p>
             <a:r>
-              <a:rPr lang="en-US" sz="1700" dirty="0">
+              <a:rPr lang="en-US" sz="2100" dirty="0">
                 <a:solidFill>
                   <a:srgbClr val="17364A"/>
                 </a:solidFill>
@@ -14813,11 +16000,11 @@
               </a:rPr>
               <a:t>Artificial intelligence does not operate separately from the public health data environment.</a:t>
             </a:r>
-            <a:endParaRPr lang="en-US" sz="1700" dirty="0"/>
-          </a:p>
-          <a:p>
-            <a:r>
-              <a:rPr lang="en-US" sz="1700" dirty="0">
+            <a:endParaRPr lang="en-US" sz="2100" dirty="0"/>
+          </a:p>
+          <a:p>
+            <a:r>
+              <a:rPr lang="en-US" sz="2100" dirty="0">
                 <a:solidFill>
                   <a:srgbClr val="17364A"/>
                 </a:solidFill>
@@ -14825,13 +16012,13 @@
                 <a:ea typeface="Aptos" pitchFamily="34" charset="-122"/>
                 <a:cs typeface="Aptos" pitchFamily="34" charset="-120"/>
               </a:rPr>
-              <a:t>Every AI-supported workflow depends on the quality, structure, timeliness, governance, and security of the systems that.</a:t>
-            </a:r>
-            <a:endParaRPr lang="en-US" sz="1700" dirty="0"/>
-          </a:p>
-          <a:p>
-            <a:r>
-              <a:rPr lang="en-US" sz="1700" dirty="0">
+              <a:t>Every AI-supported workflow depends on the quality, structure, timeliness, governance, and security of.</a:t>
+            </a:r>
+            <a:endParaRPr lang="en-US" sz="2100" dirty="0"/>
+          </a:p>
+          <a:p>
+            <a:r>
+              <a:rPr lang="en-US" sz="2100" dirty="0">
                 <a:solidFill>
                   <a:srgbClr val="17364A"/>
                 </a:solidFill>
@@ -14841,27 +16028,13 @@
               </a:rPr>
               <a:t>For public health agencies, this means that AI readiness is inseparable from data modernization.</a:t>
             </a:r>
-            <a:endParaRPr lang="en-US" sz="1700" dirty="0"/>
-          </a:p>
-          <a:p>
-            <a:r>
-              <a:rPr lang="en-US" sz="1700" dirty="0">
-                <a:solidFill>
-                  <a:srgbClr val="17364A"/>
-                </a:solidFill>
-                <a:latin typeface="Aptos" pitchFamily="34" charset="0"/>
-                <a:ea typeface="Aptos" pitchFamily="34" charset="-122"/>
-                <a:cs typeface="Aptos" pitchFamily="34" charset="-120"/>
-              </a:rPr>
-              <a:t>A department cannot responsibly deploy AI for surveillance, case investigation, forecasting, summarization, resource.</a:t>
-            </a:r>
-            <a:endParaRPr lang="en-US" sz="1700" dirty="0"/>
-          </a:p>
-        </p:txBody>
-      </p:sp>
-      <p:sp>
-        <p:nvSpPr>
-          <p:cNvPr id="11" name="Shape 9"/>
+            <a:endParaRPr lang="en-US" sz="2100" dirty="0"/>
+          </a:p>
+        </p:txBody>
+      </p:sp>
+      <p:sp>
+        <p:nvSpPr>
+          <p:cNvPr id="12" name="Shape 10"/>
           <p:cNvSpPr/>
           <p:nvPr/>
         </p:nvSpPr>
@@ -14888,14 +16061,14 @@
       </p:sp>
       <p:sp>
         <p:nvSpPr>
-          <p:cNvPr id="12" name="Text 10"/>
+          <p:cNvPr id="13" name="Text 11"/>
           <p:cNvSpPr/>
           <p:nvPr/>
         </p:nvSpPr>
         <p:spPr>
           <a:xfrm>
             <a:off x="8074152" y="1563624"/>
-            <a:ext cx="2825496" cy="201168"/>
+            <a:ext cx="2825496" cy="256032"/>
           </a:xfrm>
           <a:prstGeom prst="rect">
             <a:avLst/>
@@ -14911,7 +16084,7 @@
               <a:buNone/>
             </a:pPr>
             <a:r>
-              <a:rPr lang="en-US" sz="950" b="1" dirty="0">
+              <a:rPr lang="en-US" sz="1300" b="1" dirty="0">
                 <a:solidFill>
                   <a:srgbClr val="0068B7"/>
                 </a:solidFill>
@@ -14921,20 +16094,20 @@
               </a:rPr>
               <a:t>Key idea</a:t>
             </a:r>
-            <a:endParaRPr lang="en-US" sz="950" dirty="0"/>
-          </a:p>
-        </p:txBody>
-      </p:sp>
-      <p:sp>
-        <p:nvSpPr>
-          <p:cNvPr id="13" name="Text 11"/>
-          <p:cNvSpPr/>
-          <p:nvPr/>
-        </p:nvSpPr>
-        <p:spPr>
-          <a:xfrm>
-            <a:off x="8074152" y="1856232"/>
-            <a:ext cx="2825496" cy="1261872"/>
+            <a:endParaRPr lang="en-US" sz="1300" dirty="0"/>
+          </a:p>
+        </p:txBody>
+      </p:sp>
+      <p:sp>
+        <p:nvSpPr>
+          <p:cNvPr id="14" name="Text 12"/>
+          <p:cNvSpPr/>
+          <p:nvPr/>
+        </p:nvSpPr>
+        <p:spPr>
+          <a:xfrm>
+            <a:off x="8074152" y="1920240"/>
+            <a:ext cx="2825496" cy="1188720"/>
           </a:xfrm>
           <a:prstGeom prst="rect">
             <a:avLst/>
@@ -14952,7 +16125,7 @@
               <a:buNone/>
             </a:pPr>
             <a:r>
-              <a:rPr lang="en-US" sz="1250" dirty="0">
+              <a:rPr lang="en-US" sz="1550" dirty="0">
                 <a:solidFill>
                   <a:srgbClr val="17364A"/>
                 </a:solidFill>
@@ -14962,13 +16135,13 @@
               </a:rPr>
               <a:t>Artificial intelligence does not operate separately from the public health data environment.</a:t>
             </a:r>
-            <a:endParaRPr lang="en-US" sz="1250" dirty="0"/>
-          </a:p>
-        </p:txBody>
-      </p:sp>
-      <p:sp>
-        <p:nvSpPr>
-          <p:cNvPr id="14" name="Shape 12"/>
+            <a:endParaRPr lang="en-US" sz="1550" dirty="0"/>
+          </a:p>
+        </p:txBody>
+      </p:sp>
+      <p:sp>
+        <p:nvSpPr>
+          <p:cNvPr id="15" name="Shape 13"/>
           <p:cNvSpPr/>
           <p:nvPr/>
         </p:nvSpPr>
@@ -14995,14 +16168,14 @@
       </p:sp>
       <p:sp>
         <p:nvSpPr>
-          <p:cNvPr id="15" name="Text 13"/>
+          <p:cNvPr id="16" name="Text 14"/>
           <p:cNvSpPr/>
           <p:nvPr/>
         </p:nvSpPr>
         <p:spPr>
           <a:xfrm>
             <a:off x="8074152" y="3666744"/>
-            <a:ext cx="2825496" cy="201168"/>
+            <a:ext cx="2825496" cy="256032"/>
           </a:xfrm>
           <a:prstGeom prst="rect">
             <a:avLst/>
@@ -15018,7 +16191,7 @@
               <a:buNone/>
             </a:pPr>
             <a:r>
-              <a:rPr lang="en-US" sz="950" b="1" dirty="0">
+              <a:rPr lang="en-US" sz="1300" b="1" dirty="0">
                 <a:solidFill>
                   <a:srgbClr val="0068B7"/>
                 </a:solidFill>
@@ -15028,20 +16201,20 @@
               </a:rPr>
               <a:t>Use this for</a:t>
             </a:r>
-            <a:endParaRPr lang="en-US" sz="950" dirty="0"/>
-          </a:p>
-        </p:txBody>
-      </p:sp>
-      <p:sp>
-        <p:nvSpPr>
-          <p:cNvPr id="16" name="Text 14"/>
-          <p:cNvSpPr/>
-          <p:nvPr/>
-        </p:nvSpPr>
-        <p:spPr>
-          <a:xfrm>
-            <a:off x="8074152" y="3959352"/>
-            <a:ext cx="2825496" cy="1170432"/>
+            <a:endParaRPr lang="en-US" sz="1300" dirty="0"/>
+          </a:p>
+        </p:txBody>
+      </p:sp>
+      <p:sp>
+        <p:nvSpPr>
+          <p:cNvPr id="17" name="Text 15"/>
+          <p:cNvSpPr/>
+          <p:nvPr/>
+        </p:nvSpPr>
+        <p:spPr>
+          <a:xfrm>
+            <a:off x="8074152" y="4023360"/>
+            <a:ext cx="2825496" cy="1097280"/>
           </a:xfrm>
           <a:prstGeom prst="rect">
             <a:avLst/>
@@ -15059,7 +16232,7 @@
               <a:buNone/>
             </a:pPr>
             <a:r>
-              <a:rPr lang="en-US" sz="1250" dirty="0">
+              <a:rPr lang="en-US" sz="1550" dirty="0">
                 <a:solidFill>
                   <a:srgbClr val="17364A"/>
                 </a:solidFill>
@@ -15069,7 +16242,7 @@
               </a:rPr>
               <a:t>Connect the concept to public health decisions, safeguards, documentation, or implementation work.</a:t>
             </a:r>
-            <a:endParaRPr lang="en-US" sz="1250" dirty="0"/>
+            <a:endParaRPr lang="en-US" sz="1550" dirty="0"/>
           </a:p>
         </p:txBody>
       </p:sp>
@@ -15266,7 +16439,7 @@
                 <a:ea typeface="Aptos" pitchFamily="34" charset="-122"/>
                 <a:cs typeface="Aptos" pitchFamily="34" charset="-120"/>
               </a:rPr>
-              <a:t>© Paula Soper</a:t>
+              <a:t>Â© Paula Soper</a:t>
             </a:r>
             <a:endParaRPr lang="en-US" sz="800" dirty="0"/>
           </a:p>
@@ -15274,7 +16447,46 @@
       </p:sp>
       <p:sp>
         <p:nvSpPr>
-          <p:cNvPr id="7" name="Shape 5"/>
+          <p:cNvPr id="7" name="Text 5"/>
+          <p:cNvSpPr/>
+          <p:nvPr/>
+        </p:nvSpPr>
+        <p:spPr>
+          <a:xfrm>
+            <a:off x="11137392" y="6510528"/>
+            <a:ext cx="411480" cy="201168"/>
+          </a:xfrm>
+          <a:prstGeom prst="rect">
+            <a:avLst/>
+          </a:prstGeom>
+          <a:noFill/>
+          <a:ln/>
+        </p:spPr>
+        <p:txBody>
+          <a:bodyPr wrap="square" lIns="0" tIns="0" rIns="0" bIns="0" rtlCol="0" anchor="ctr"/>
+          <a:lstStyle/>
+          <a:p>
+            <a:pPr algn="r" indent="0" marL="0">
+              <a:buNone/>
+            </a:pPr>
+            <a:r>
+              <a:rPr lang="en-US" sz="900" dirty="0">
+                <a:solidFill>
+                  <a:srgbClr val="5F7181"/>
+                </a:solidFill>
+                <a:latin typeface="Aptos" pitchFamily="34" charset="0"/>
+                <a:ea typeface="Aptos" pitchFamily="34" charset="-122"/>
+                <a:cs typeface="Aptos" pitchFamily="34" charset="-120"/>
+              </a:rPr>
+              <a:t>8</a:t>
+            </a:r>
+            <a:endParaRPr lang="en-US" sz="900" dirty="0"/>
+          </a:p>
+        </p:txBody>
+      </p:sp>
+      <p:sp>
+        <p:nvSpPr>
+          <p:cNvPr id="8" name="Shape 6"/>
           <p:cNvSpPr/>
           <p:nvPr/>
         </p:nvSpPr>
@@ -15299,7 +16511,7 @@
       </p:sp>
       <p:sp>
         <p:nvSpPr>
-          <p:cNvPr id="8" name="Text 6"/>
+          <p:cNvPr id="9" name="Text 7"/>
           <p:cNvSpPr/>
           <p:nvPr/>
         </p:nvSpPr>
@@ -15338,14 +16550,14 @@
       </p:sp>
       <p:sp>
         <p:nvSpPr>
-          <p:cNvPr id="9" name="Text 7"/>
+          <p:cNvPr id="10" name="Text 8"/>
           <p:cNvSpPr/>
           <p:nvPr/>
         </p:nvSpPr>
         <p:spPr>
           <a:xfrm>
             <a:off x="640080" y="621792"/>
-            <a:ext cx="10881360" cy="566928"/>
+            <a:ext cx="10881360" cy="713232"/>
           </a:xfrm>
           <a:prstGeom prst="rect">
             <a:avLst/>
@@ -15363,7 +16575,7 @@
               <a:buNone/>
             </a:pPr>
             <a:r>
-              <a:rPr lang="en-US" sz="2700" b="1" dirty="0">
+              <a:rPr lang="en-US" sz="3400" b="1" dirty="0">
                 <a:solidFill>
                   <a:srgbClr val="003A63"/>
                 </a:solidFill>
@@ -15373,20 +16585,20 @@
               </a:rPr>
               <a:t>Why This Topic Matters for Public Health AI</a:t>
             </a:r>
-            <a:endParaRPr lang="en-US" sz="2700" dirty="0"/>
-          </a:p>
-        </p:txBody>
-      </p:sp>
-      <p:sp>
-        <p:nvSpPr>
-          <p:cNvPr id="10" name="Text 8"/>
-          <p:cNvSpPr/>
-          <p:nvPr/>
-        </p:nvSpPr>
-        <p:spPr>
-          <a:xfrm>
-            <a:off x="868680" y="1417320"/>
-            <a:ext cx="6675120" cy="4434840"/>
+            <a:endParaRPr lang="en-US" sz="3400" dirty="0"/>
+          </a:p>
+        </p:txBody>
+      </p:sp>
+      <p:sp>
+        <p:nvSpPr>
+          <p:cNvPr id="11" name="Text 9"/>
+          <p:cNvSpPr/>
+          <p:nvPr/>
+        </p:nvSpPr>
+        <p:spPr>
+          <a:xfrm>
+            <a:off x="868680" y="1508760"/>
+            <a:ext cx="6537960" cy="4160520"/>
           </a:xfrm>
           <a:prstGeom prst="rect">
             <a:avLst/>
@@ -15401,7 +16613,7 @@
           <a:lstStyle/>
           <a:p>
             <a:r>
-              <a:rPr lang="en-US" sz="1700" dirty="0">
+              <a:rPr lang="en-US" sz="2100" dirty="0">
                 <a:solidFill>
                   <a:srgbClr val="17364A"/>
                 </a:solidFill>
@@ -15409,13 +16621,13 @@
                 <a:ea typeface="Aptos" pitchFamily="34" charset="-122"/>
                 <a:cs typeface="Aptos" pitchFamily="34" charset="-120"/>
               </a:rPr>
-              <a:t>Public health agencies often feel pressure to adopt AI tools quickly, especially when staff are overwhelmed, reporting.</a:t>
-            </a:r>
-            <a:endParaRPr lang="en-US" sz="1700" dirty="0"/>
-          </a:p>
-          <a:p>
-            <a:r>
-              <a:rPr lang="en-US" sz="1700" dirty="0">
+              <a:t>Public health agencies often feel pressure to adopt AI tools quickly, especially when staff are.</a:t>
+            </a:r>
+            <a:endParaRPr lang="en-US" sz="2100" dirty="0"/>
+          </a:p>
+          <a:p>
+            <a:r>
+              <a:rPr lang="en-US" sz="2100" dirty="0">
                 <a:solidFill>
                   <a:srgbClr val="17364A"/>
                 </a:solidFill>
@@ -15423,13 +16635,13 @@
                 <a:ea typeface="Aptos" pitchFamily="34" charset="-122"/>
                 <a:cs typeface="Aptos" pitchFamily="34" charset="-120"/>
               </a:rPr>
-              <a:t>AI tools may appear to offer immediate relief by summarizing records, drafting communications, classifying incoming.</a:t>
-            </a:r>
-            <a:endParaRPr lang="en-US" sz="1700" dirty="0"/>
-          </a:p>
-          <a:p>
-            <a:r>
-              <a:rPr lang="en-US" sz="1700" dirty="0">
+              <a:t>AI tools may appear to offer immediate relief by summarizing records, drafting communications,.</a:t>
+            </a:r>
+            <a:endParaRPr lang="en-US" sz="2100" dirty="0"/>
+          </a:p>
+          <a:p>
+            <a:r>
+              <a:rPr lang="en-US" sz="2100" dirty="0">
                 <a:solidFill>
                   <a:srgbClr val="17364A"/>
                 </a:solidFill>
@@ -15439,27 +16651,13 @@
               </a:rPr>
               <a:t>However, AI can create new risks when it is layered on top of fragmented or poorly understood systems.</a:t>
             </a:r>
-            <a:endParaRPr lang="en-US" sz="1700" dirty="0"/>
-          </a:p>
-          <a:p>
-            <a:r>
-              <a:rPr lang="en-US" sz="1700" dirty="0">
-                <a:solidFill>
-                  <a:srgbClr val="17364A"/>
-                </a:solidFill>
-                <a:latin typeface="Aptos" pitchFamily="34" charset="0"/>
-                <a:ea typeface="Aptos" pitchFamily="34" charset="-122"/>
-                <a:cs typeface="Aptos" pitchFamily="34" charset="-120"/>
-              </a:rPr>
-              <a:t>A model that summarizes case reports may produce incomplete summaries if the source data are missing key fields.</a:t>
-            </a:r>
-            <a:endParaRPr lang="en-US" sz="1700" dirty="0"/>
-          </a:p>
-        </p:txBody>
-      </p:sp>
-      <p:sp>
-        <p:nvSpPr>
-          <p:cNvPr id="11" name="Shape 9"/>
+            <a:endParaRPr lang="en-US" sz="2100" dirty="0"/>
+          </a:p>
+        </p:txBody>
+      </p:sp>
+      <p:sp>
+        <p:nvSpPr>
+          <p:cNvPr id="12" name="Shape 10"/>
           <p:cNvSpPr/>
           <p:nvPr/>
         </p:nvSpPr>
@@ -15486,14 +16684,14 @@
       </p:sp>
       <p:sp>
         <p:nvSpPr>
-          <p:cNvPr id="12" name="Text 10"/>
+          <p:cNvPr id="13" name="Text 11"/>
           <p:cNvSpPr/>
           <p:nvPr/>
         </p:nvSpPr>
         <p:spPr>
           <a:xfrm>
             <a:off x="8074152" y="1563624"/>
-            <a:ext cx="2825496" cy="201168"/>
+            <a:ext cx="2825496" cy="256032"/>
           </a:xfrm>
           <a:prstGeom prst="rect">
             <a:avLst/>
@@ -15509,7 +16707,7 @@
               <a:buNone/>
             </a:pPr>
             <a:r>
-              <a:rPr lang="en-US" sz="950" b="1" dirty="0">
+              <a:rPr lang="en-US" sz="1300" b="1" dirty="0">
                 <a:solidFill>
                   <a:srgbClr val="0068B7"/>
                 </a:solidFill>
@@ -15519,20 +16717,20 @@
               </a:rPr>
               <a:t>Key idea</a:t>
             </a:r>
-            <a:endParaRPr lang="en-US" sz="950" dirty="0"/>
-          </a:p>
-        </p:txBody>
-      </p:sp>
-      <p:sp>
-        <p:nvSpPr>
-          <p:cNvPr id="13" name="Text 11"/>
-          <p:cNvSpPr/>
-          <p:nvPr/>
-        </p:nvSpPr>
-        <p:spPr>
-          <a:xfrm>
-            <a:off x="8074152" y="1856232"/>
-            <a:ext cx="2825496" cy="1261872"/>
+            <a:endParaRPr lang="en-US" sz="1300" dirty="0"/>
+          </a:p>
+        </p:txBody>
+      </p:sp>
+      <p:sp>
+        <p:nvSpPr>
+          <p:cNvPr id="14" name="Text 12"/>
+          <p:cNvSpPr/>
+          <p:nvPr/>
+        </p:nvSpPr>
+        <p:spPr>
+          <a:xfrm>
+            <a:off x="8074152" y="1920240"/>
+            <a:ext cx="2825496" cy="1188720"/>
           </a:xfrm>
           <a:prstGeom prst="rect">
             <a:avLst/>
@@ -15550,7 +16748,7 @@
               <a:buNone/>
             </a:pPr>
             <a:r>
-              <a:rPr lang="en-US" sz="1250" dirty="0">
+              <a:rPr lang="en-US" sz="1550" dirty="0">
                 <a:solidFill>
                   <a:srgbClr val="17364A"/>
                 </a:solidFill>
@@ -15558,15 +16756,15 @@
                 <a:ea typeface="Aptos" pitchFamily="34" charset="-122"/>
                 <a:cs typeface="Aptos" pitchFamily="34" charset="-120"/>
               </a:rPr>
-              <a:t>Public health agencies often feel pressure to adopt AI tools quickly, especially when staff are overwhelmed, reporting.</a:t>
-            </a:r>
-            <a:endParaRPr lang="en-US" sz="1250" dirty="0"/>
-          </a:p>
-        </p:txBody>
-      </p:sp>
-      <p:sp>
-        <p:nvSpPr>
-          <p:cNvPr id="14" name="Shape 12"/>
+              <a:t>Public health agencies often feel pressure to adopt AI tools quickly, especially when staff are.</a:t>
+            </a:r>
+            <a:endParaRPr lang="en-US" sz="1550" dirty="0"/>
+          </a:p>
+        </p:txBody>
+      </p:sp>
+      <p:sp>
+        <p:nvSpPr>
+          <p:cNvPr id="15" name="Shape 13"/>
           <p:cNvSpPr/>
           <p:nvPr/>
         </p:nvSpPr>
@@ -15593,14 +16791,14 @@
       </p:sp>
       <p:sp>
         <p:nvSpPr>
-          <p:cNvPr id="15" name="Text 13"/>
+          <p:cNvPr id="16" name="Text 14"/>
           <p:cNvSpPr/>
           <p:nvPr/>
         </p:nvSpPr>
         <p:spPr>
           <a:xfrm>
             <a:off x="8074152" y="3666744"/>
-            <a:ext cx="2825496" cy="201168"/>
+            <a:ext cx="2825496" cy="256032"/>
           </a:xfrm>
           <a:prstGeom prst="rect">
             <a:avLst/>
@@ -15616,7 +16814,7 @@
               <a:buNone/>
             </a:pPr>
             <a:r>
-              <a:rPr lang="en-US" sz="950" b="1" dirty="0">
+              <a:rPr lang="en-US" sz="1300" b="1" dirty="0">
                 <a:solidFill>
                   <a:srgbClr val="0068B7"/>
                 </a:solidFill>
@@ -15626,20 +16824,20 @@
               </a:rPr>
               <a:t>Use this for</a:t>
             </a:r>
-            <a:endParaRPr lang="en-US" sz="950" dirty="0"/>
-          </a:p>
-        </p:txBody>
-      </p:sp>
-      <p:sp>
-        <p:nvSpPr>
-          <p:cNvPr id="16" name="Text 14"/>
-          <p:cNvSpPr/>
-          <p:nvPr/>
-        </p:nvSpPr>
-        <p:spPr>
-          <a:xfrm>
-            <a:off x="8074152" y="3959352"/>
-            <a:ext cx="2825496" cy="1170432"/>
+            <a:endParaRPr lang="en-US" sz="1300" dirty="0"/>
+          </a:p>
+        </p:txBody>
+      </p:sp>
+      <p:sp>
+        <p:nvSpPr>
+          <p:cNvPr id="17" name="Text 15"/>
+          <p:cNvSpPr/>
+          <p:nvPr/>
+        </p:nvSpPr>
+        <p:spPr>
+          <a:xfrm>
+            <a:off x="8074152" y="4023360"/>
+            <a:ext cx="2825496" cy="1097280"/>
           </a:xfrm>
           <a:prstGeom prst="rect">
             <a:avLst/>
@@ -15657,7 +16855,7 @@
               <a:buNone/>
             </a:pPr>
             <a:r>
-              <a:rPr lang="en-US" sz="1250" dirty="0">
+              <a:rPr lang="en-US" sz="1550" dirty="0">
                 <a:solidFill>
                   <a:srgbClr val="17364A"/>
                 </a:solidFill>
@@ -15667,7 +16865,7 @@
               </a:rPr>
               <a:t>Connect the concept to public health decisions, safeguards, documentation, or implementation work.</a:t>
             </a:r>
-            <a:endParaRPr lang="en-US" sz="1250" dirty="0"/>
+            <a:endParaRPr lang="en-US" sz="1550" dirty="0"/>
           </a:p>
         </p:txBody>
       </p:sp>
@@ -15864,7 +17062,7 @@
                 <a:ea typeface="Aptos" pitchFamily="34" charset="-122"/>
                 <a:cs typeface="Aptos" pitchFamily="34" charset="-120"/>
               </a:rPr>
-              <a:t>© Paula Soper</a:t>
+              <a:t>Â© Paula Soper</a:t>
             </a:r>
             <a:endParaRPr lang="en-US" sz="800" dirty="0"/>
           </a:p>
@@ -15872,7 +17070,46 @@
       </p:sp>
       <p:sp>
         <p:nvSpPr>
-          <p:cNvPr id="7" name="Shape 5"/>
+          <p:cNvPr id="7" name="Text 5"/>
+          <p:cNvSpPr/>
+          <p:nvPr/>
+        </p:nvSpPr>
+        <p:spPr>
+          <a:xfrm>
+            <a:off x="11137392" y="6510528"/>
+            <a:ext cx="411480" cy="201168"/>
+          </a:xfrm>
+          <a:prstGeom prst="rect">
+            <a:avLst/>
+          </a:prstGeom>
+          <a:noFill/>
+          <a:ln/>
+        </p:spPr>
+        <p:txBody>
+          <a:bodyPr wrap="square" lIns="0" tIns="0" rIns="0" bIns="0" rtlCol="0" anchor="ctr"/>
+          <a:lstStyle/>
+          <a:p>
+            <a:pPr algn="r" indent="0" marL="0">
+              <a:buNone/>
+            </a:pPr>
+            <a:r>
+              <a:rPr lang="en-US" sz="900" dirty="0">
+                <a:solidFill>
+                  <a:srgbClr val="5F7181"/>
+                </a:solidFill>
+                <a:latin typeface="Aptos" pitchFamily="34" charset="0"/>
+                <a:ea typeface="Aptos" pitchFamily="34" charset="-122"/>
+                <a:cs typeface="Aptos" pitchFamily="34" charset="-120"/>
+              </a:rPr>
+              <a:t>9</a:t>
+            </a:r>
+            <a:endParaRPr lang="en-US" sz="900" dirty="0"/>
+          </a:p>
+        </p:txBody>
+      </p:sp>
+      <p:sp>
+        <p:nvSpPr>
+          <p:cNvPr id="8" name="Shape 6"/>
           <p:cNvSpPr/>
           <p:nvPr/>
         </p:nvSpPr>
@@ -15897,7 +17134,7 @@
       </p:sp>
       <p:sp>
         <p:nvSpPr>
-          <p:cNvPr id="8" name="Text 6"/>
+          <p:cNvPr id="9" name="Text 7"/>
           <p:cNvSpPr/>
           <p:nvPr/>
         </p:nvSpPr>
@@ -15936,14 +17173,14 @@
       </p:sp>
       <p:sp>
         <p:nvSpPr>
-          <p:cNvPr id="9" name="Text 7"/>
+          <p:cNvPr id="10" name="Text 8"/>
           <p:cNvSpPr/>
           <p:nvPr/>
         </p:nvSpPr>
         <p:spPr>
           <a:xfrm>
             <a:off x="640080" y="621792"/>
-            <a:ext cx="10881360" cy="566928"/>
+            <a:ext cx="10881360" cy="713232"/>
           </a:xfrm>
           <a:prstGeom prst="rect">
             <a:avLst/>
@@ -15961,7 +17198,7 @@
               <a:buNone/>
             </a:pPr>
             <a:r>
-              <a:rPr lang="en-US" sz="2700" b="1" dirty="0">
+              <a:rPr lang="en-US" sz="3400" b="1" dirty="0">
                 <a:solidFill>
                   <a:srgbClr val="003A63"/>
                 </a:solidFill>
@@ -15971,20 +17208,20 @@
               </a:rPr>
               <a:t>Core Concepts</a:t>
             </a:r>
-            <a:endParaRPr lang="en-US" sz="2700" dirty="0"/>
-          </a:p>
-        </p:txBody>
-      </p:sp>
-      <p:sp>
-        <p:nvSpPr>
-          <p:cNvPr id="10" name="Text 8"/>
-          <p:cNvSpPr/>
-          <p:nvPr/>
-        </p:nvSpPr>
-        <p:spPr>
-          <a:xfrm>
-            <a:off x="868680" y="1417320"/>
-            <a:ext cx="6675120" cy="4434840"/>
+            <a:endParaRPr lang="en-US" sz="3400" dirty="0"/>
+          </a:p>
+        </p:txBody>
+      </p:sp>
+      <p:sp>
+        <p:nvSpPr>
+          <p:cNvPr id="11" name="Text 9"/>
+          <p:cNvSpPr/>
+          <p:nvPr/>
+        </p:nvSpPr>
+        <p:spPr>
+          <a:xfrm>
+            <a:off x="868680" y="1508760"/>
+            <a:ext cx="6537960" cy="4160520"/>
           </a:xfrm>
           <a:prstGeom prst="rect">
             <a:avLst/>
@@ -15999,7 +17236,7 @@
           <a:lstStyle/>
           <a:p>
             <a:r>
-              <a:rPr lang="en-US" sz="1700" dirty="0">
+              <a:rPr lang="en-US" sz="2100" dirty="0">
                 <a:solidFill>
                   <a:srgbClr val="17364A"/>
                 </a:solidFill>
@@ -16009,11 +17246,11 @@
               </a:rPr>
               <a:t>Public health data modernization.</a:t>
             </a:r>
-            <a:endParaRPr lang="en-US" sz="1700" dirty="0"/>
-          </a:p>
-          <a:p>
-            <a:r>
-              <a:rPr lang="en-US" sz="1700" dirty="0">
+            <a:endParaRPr lang="en-US" sz="2100" dirty="0"/>
+          </a:p>
+          <a:p>
+            <a:r>
+              <a:rPr lang="en-US" sz="2100" dirty="0">
                 <a:solidFill>
                   <a:srgbClr val="17364A"/>
                 </a:solidFill>
@@ -16021,13 +17258,13 @@
                 <a:ea typeface="Aptos" pitchFamily="34" charset="-122"/>
                 <a:cs typeface="Aptos" pitchFamily="34" charset="-120"/>
               </a:rPr>
-              <a:t>Public health data modernization is the process of improving the systems, standards, infrastructure, governance, and.</a:t>
-            </a:r>
-            <a:endParaRPr lang="en-US" sz="1700" dirty="0"/>
-          </a:p>
-          <a:p>
-            <a:r>
-              <a:rPr lang="en-US" sz="1700" dirty="0">
+              <a:t>Public health data modernization is the process of improving the systems, standards, infrastructure,.</a:t>
+            </a:r>
+            <a:endParaRPr lang="en-US" sz="2100" dirty="0"/>
+          </a:p>
+          <a:p>
+            <a:r>
+              <a:rPr lang="en-US" sz="2100" dirty="0">
                 <a:solidFill>
                   <a:srgbClr val="17364A"/>
                 </a:solidFill>
@@ -16035,29 +17272,15 @@
                 <a:ea typeface="Aptos" pitchFamily="34" charset="-122"/>
                 <a:cs typeface="Aptos" pitchFamily="34" charset="-120"/>
               </a:rPr>
-              <a:t>Modernization includes technical components such as APIs, cloud platforms, data warehouses, terminology services, analytics.</a:t>
-            </a:r>
-            <a:endParaRPr lang="en-US" sz="1700" dirty="0"/>
-          </a:p>
-          <a:p>
-            <a:r>
-              <a:rPr lang="en-US" sz="1700" dirty="0">
-                <a:solidFill>
-                  <a:srgbClr val="17364A"/>
-                </a:solidFill>
-                <a:latin typeface="Aptos" pitchFamily="34" charset="0"/>
-                <a:ea typeface="Aptos" pitchFamily="34" charset="-122"/>
-                <a:cs typeface="Aptos" pitchFamily="34" charset="-120"/>
-              </a:rPr>
-              <a:t>It also includes operational components such as data stewardship, governance review, privacy controls, workforce training,.</a:t>
-            </a:r>
-            <a:endParaRPr lang="en-US" sz="1700" dirty="0"/>
-          </a:p>
-        </p:txBody>
-      </p:sp>
-      <p:sp>
-        <p:nvSpPr>
-          <p:cNvPr id="11" name="Shape 9"/>
+              <a:t>Modernization includes technical components such as APIs, cloud platforms, data warehouses, terminology.</a:t>
+            </a:r>
+            <a:endParaRPr lang="en-US" sz="2100" dirty="0"/>
+          </a:p>
+        </p:txBody>
+      </p:sp>
+      <p:sp>
+        <p:nvSpPr>
+          <p:cNvPr id="12" name="Shape 10"/>
           <p:cNvSpPr/>
           <p:nvPr/>
         </p:nvSpPr>
@@ -16084,14 +17307,14 @@
       </p:sp>
       <p:sp>
         <p:nvSpPr>
-          <p:cNvPr id="12" name="Text 10"/>
+          <p:cNvPr id="13" name="Text 11"/>
           <p:cNvSpPr/>
           <p:nvPr/>
         </p:nvSpPr>
         <p:spPr>
           <a:xfrm>
             <a:off x="8074152" y="1563624"/>
-            <a:ext cx="2825496" cy="201168"/>
+            <a:ext cx="2825496" cy="256032"/>
           </a:xfrm>
           <a:prstGeom prst="rect">
             <a:avLst/>
@@ -16107,7 +17330,7 @@
               <a:buNone/>
             </a:pPr>
             <a:r>
-              <a:rPr lang="en-US" sz="950" b="1" dirty="0">
+              <a:rPr lang="en-US" sz="1300" b="1" dirty="0">
                 <a:solidFill>
                   <a:srgbClr val="0068B7"/>
                 </a:solidFill>
@@ -16117,20 +17340,20 @@
               </a:rPr>
               <a:t>Key idea</a:t>
             </a:r>
-            <a:endParaRPr lang="en-US" sz="950" dirty="0"/>
-          </a:p>
-        </p:txBody>
-      </p:sp>
-      <p:sp>
-        <p:nvSpPr>
-          <p:cNvPr id="13" name="Text 11"/>
-          <p:cNvSpPr/>
-          <p:nvPr/>
-        </p:nvSpPr>
-        <p:spPr>
-          <a:xfrm>
-            <a:off x="8074152" y="1856232"/>
-            <a:ext cx="2825496" cy="1261872"/>
+            <a:endParaRPr lang="en-US" sz="1300" dirty="0"/>
+          </a:p>
+        </p:txBody>
+      </p:sp>
+      <p:sp>
+        <p:nvSpPr>
+          <p:cNvPr id="14" name="Text 12"/>
+          <p:cNvSpPr/>
+          <p:nvPr/>
+        </p:nvSpPr>
+        <p:spPr>
+          <a:xfrm>
+            <a:off x="8074152" y="1920240"/>
+            <a:ext cx="2825496" cy="1188720"/>
           </a:xfrm>
           <a:prstGeom prst="rect">
             <a:avLst/>
@@ -16148,7 +17371,7 @@
               <a:buNone/>
             </a:pPr>
             <a:r>
-              <a:rPr lang="en-US" sz="1250" dirty="0">
+              <a:rPr lang="en-US" sz="1550" dirty="0">
                 <a:solidFill>
                   <a:srgbClr val="17364A"/>
                 </a:solidFill>
@@ -16158,13 +17381,13 @@
               </a:rPr>
               <a:t>Public health data modernization.</a:t>
             </a:r>
-            <a:endParaRPr lang="en-US" sz="1250" dirty="0"/>
-          </a:p>
-        </p:txBody>
-      </p:sp>
-      <p:sp>
-        <p:nvSpPr>
-          <p:cNvPr id="14" name="Shape 12"/>
+            <a:endParaRPr lang="en-US" sz="1550" dirty="0"/>
+          </a:p>
+        </p:txBody>
+      </p:sp>
+      <p:sp>
+        <p:nvSpPr>
+          <p:cNvPr id="15" name="Shape 13"/>
           <p:cNvSpPr/>
           <p:nvPr/>
         </p:nvSpPr>
@@ -16191,14 +17414,14 @@
       </p:sp>
       <p:sp>
         <p:nvSpPr>
-          <p:cNvPr id="15" name="Text 13"/>
+          <p:cNvPr id="16" name="Text 14"/>
           <p:cNvSpPr/>
           <p:nvPr/>
         </p:nvSpPr>
         <p:spPr>
           <a:xfrm>
             <a:off x="8074152" y="3666744"/>
-            <a:ext cx="2825496" cy="201168"/>
+            <a:ext cx="2825496" cy="256032"/>
           </a:xfrm>
           <a:prstGeom prst="rect">
             <a:avLst/>
@@ -16214,7 +17437,7 @@
               <a:buNone/>
             </a:pPr>
             <a:r>
-              <a:rPr lang="en-US" sz="950" b="1" dirty="0">
+              <a:rPr lang="en-US" sz="1300" b="1" dirty="0">
                 <a:solidFill>
                   <a:srgbClr val="0068B7"/>
                 </a:solidFill>
@@ -16224,20 +17447,20 @@
               </a:rPr>
               <a:t>Use this for</a:t>
             </a:r>
-            <a:endParaRPr lang="en-US" sz="950" dirty="0"/>
-          </a:p>
-        </p:txBody>
-      </p:sp>
-      <p:sp>
-        <p:nvSpPr>
-          <p:cNvPr id="16" name="Text 14"/>
-          <p:cNvSpPr/>
-          <p:nvPr/>
-        </p:nvSpPr>
-        <p:spPr>
-          <a:xfrm>
-            <a:off x="8074152" y="3959352"/>
-            <a:ext cx="2825496" cy="1170432"/>
+            <a:endParaRPr lang="en-US" sz="1300" dirty="0"/>
+          </a:p>
+        </p:txBody>
+      </p:sp>
+      <p:sp>
+        <p:nvSpPr>
+          <p:cNvPr id="17" name="Text 15"/>
+          <p:cNvSpPr/>
+          <p:nvPr/>
+        </p:nvSpPr>
+        <p:spPr>
+          <a:xfrm>
+            <a:off x="8074152" y="4023360"/>
+            <a:ext cx="2825496" cy="1097280"/>
           </a:xfrm>
           <a:prstGeom prst="rect">
             <a:avLst/>
@@ -16255,7 +17478,7 @@
               <a:buNone/>
             </a:pPr>
             <a:r>
-              <a:rPr lang="en-US" sz="1250" dirty="0">
+              <a:rPr lang="en-US" sz="1550" dirty="0">
                 <a:solidFill>
                   <a:srgbClr val="17364A"/>
                 </a:solidFill>
@@ -16265,7 +17488,7 @@
               </a:rPr>
               <a:t>Connect the concept to public health decisions, safeguards, documentation, or implementation work.</a:t>
             </a:r>
-            <a:endParaRPr lang="en-US" sz="1250" dirty="0"/>
+            <a:endParaRPr lang="en-US" sz="1550" dirty="0"/>
           </a:p>
         </p:txBody>
       </p:sp>
